--- a/_implementation-notes/evening-series/FotH Evening Session 12 Slides DRAFT v1.pptx
+++ b/_implementation-notes/evening-series/FotH Evening Session 12 Slides DRAFT v1.pptx
@@ -10,6 +10,7 @@
   <p:sldIdLst>
     <p:sldId id="256" r:id="rId2"/>
     <p:sldId id="294" r:id="rId153"/>
+    <p:sldId id="552" r:id="rId22"/>
     <p:sldId id="295" r:id="rId154"/>
     <p:sldId id="429" r:id="rId155"/>
     <p:sldId id="430" r:id="rId156"/>
@@ -18,7 +19,8 @@
     <p:sldId id="433" r:id="rId159"/>
     <p:sldId id="551" r:id="rId160"/>
     <p:sldId id="434" r:id="rId161"/>
-    <p:sldId id="535" r:id="rId162"/>
+    <p:sldId id="553" r:id="rId23"/>
+    <p:sldId id="554" r:id="rId24"/>
     <p:sldId id="435" r:id="rId163"/>
     <p:sldId id="436" r:id="rId164"/>
   </p:sldIdLst>
@@ -750,6 +752,214 @@
 </p:notes>
 </file>
 
+<file path=ppt/notesSlides/notesSlide13.xml><?xml version="1.0" encoding="utf-8"?>
+<p:notes xmlns:a="http://schemas.openxmlformats.org/drawingml/2006/main" xmlns:p="http://schemas.openxmlformats.org/presentationml/2006/main" xmlns:r="http://schemas.openxmlformats.org/officeDocument/2006/relationships">
+  <p:cSld>
+    <p:spTree>
+      <p:nvGrpSpPr>
+        <p:cNvPr id="1" name=""/>
+        <p:cNvGrpSpPr/>
+        <p:nvPr/>
+      </p:nvGrpSpPr>
+      <p:grpSpPr>
+        <a:xfrm>
+          <a:off x="0" y="0"/>
+          <a:ext cx="0" cy="0"/>
+          <a:chOff x="0" y="0"/>
+          <a:chExt cx="0" cy="0"/>
+        </a:xfrm>
+      </p:grpSpPr>
+      <p:sp>
+        <p:nvSpPr>
+          <p:cNvPr id="2" name="Notes Placeholder 1"/>
+          <p:cNvSpPr>
+            <a:spLocks noGrp="1"/>
+          </p:cNvSpPr>
+          <p:nvPr>
+            <p:ph type="body" idx="1"/>
+          </p:nvPr>
+        </p:nvSpPr>
+        <p:spPr/>
+        <p:txBody>
+          <a:bodyPr/>
+          <a:lstStyle/>
+          <a:p>
+            <a:r>
+              <a:t>S12 · WELCOME · LEAD: CONTAINER HOLDER · GROUNDING — every session opens on this map</a:t>
+            </a:r>
+          </a:p>
+          <a:p>
+            <a:r>
+              <a:t>BEATS:</a:t>
+            </a:r>
+          </a:p>
+          <a:p>
+            <a:r>
+              <a:t>1. Locate tonight on the map, plainly: Session 12 returns to the whole map — all four Connects, rebuilt after the break. Each connection makes the next one real (Matt. 22:37–40).</a:t>
+            </a:r>
+          </a:p>
+          <a:p>
+            <a:r>
+              <a:t>2. The four boxes are one journey — each connection makes the next one real — rooted in the two great commandments: love God, love neighbor (Matt 22:37–40).</a:t>
+            </a:r>
+          </a:p>
+          <a:p>
+            <a:r>
+              <a:t>3. This is also the 'where we are on the map' minute the welcome owes any newcomer.</a:t>
+            </a:r>
+          </a:p>
+          <a:p>
+            <a:r>
+              <a:t>CUES: Two minutes at most; then tonight's road.</a:t>
+            </a:r>
+          </a:p>
+        </p:txBody>
+      </p:sp>
+    </p:spTree>
+  </p:cSld>
+  <p:clrMapOvr>
+    <a:masterClrMapping/>
+  </p:clrMapOvr>
+</p:notes>
+</file>
+
+<file path=ppt/notesSlides/notesSlide14.xml><?xml version="1.0" encoding="utf-8"?>
+<p:notes xmlns:a="http://schemas.openxmlformats.org/drawingml/2006/main" xmlns:p="http://schemas.openxmlformats.org/presentationml/2006/main" xmlns:r="http://schemas.openxmlformats.org/officeDocument/2006/relationships">
+  <p:cSld>
+    <p:spTree>
+      <p:nvGrpSpPr>
+        <p:cNvPr id="1" name=""/>
+        <p:cNvGrpSpPr/>
+        <p:nvPr/>
+      </p:nvGrpSpPr>
+      <p:grpSpPr>
+        <a:xfrm>
+          <a:off x="0" y="0"/>
+          <a:ext cx="0" cy="0"/>
+          <a:chOff x="0" y="0"/>
+          <a:chExt cx="0" cy="0"/>
+        </a:xfrm>
+      </p:grpSpPr>
+      <p:sp>
+        <p:nvSpPr>
+          <p:cNvPr id="2" name="Notes Placeholder 1"/>
+          <p:cNvSpPr>
+            <a:spLocks noGrp="1"/>
+          </p:cNvSpPr>
+          <p:nvPr>
+            <p:ph type="body" idx="1"/>
+          </p:nvPr>
+        </p:nvSpPr>
+        <p:spPr/>
+        <p:txBody>
+          <a:bodyPr/>
+          <a:lstStyle/>
+          <a:p>
+            <a:r>
+              <a:t>S12 · COMMISSIONING · LEAD: CONTENT PRESENTER</a:t>
+            </a:r>
+          </a:p>
+          <a:p>
+            <a:r>
+              <a:t>BEATS:</a:t>
+            </a:r>
+          </a:p>
+          <a:p>
+            <a:r>
+              <a:t>1. The sheet on the screen is the sheet in their hands — walk it, don't read it.</a:t>
+            </a:r>
+          </a:p>
+          <a:p>
+            <a:r>
+              <a:t>2. The standing rhythm first: the morning question, the evening journal line — one box per day on the week-grids.</a:t>
+            </a:r>
+          </a:p>
+          <a:p>
+            <a:r>
+              <a:t>3. A missed box is never a failure — it is an invitation to return.</a:t>
+            </a:r>
+          </a:p>
+          <a:p>
+            <a:r>
+              <a:t>CUES: The four parts are the next slide.</a:t>
+            </a:r>
+          </a:p>
+        </p:txBody>
+      </p:sp>
+    </p:spTree>
+  </p:cSld>
+  <p:clrMapOvr>
+    <a:masterClrMapping/>
+  </p:clrMapOvr>
+</p:notes>
+</file>
+
+<file path=ppt/notesSlides/notesSlide15.xml><?xml version="1.0" encoding="utf-8"?>
+<p:notes xmlns:a="http://schemas.openxmlformats.org/drawingml/2006/main" xmlns:p="http://schemas.openxmlformats.org/presentationml/2006/main" xmlns:r="http://schemas.openxmlformats.org/officeDocument/2006/relationships">
+  <p:cSld>
+    <p:spTree>
+      <p:nvGrpSpPr>
+        <p:cNvPr id="1" name=""/>
+        <p:cNvGrpSpPr/>
+        <p:nvPr/>
+      </p:nvGrpSpPr>
+      <p:grpSpPr>
+        <a:xfrm>
+          <a:off x="0" y="0"/>
+          <a:ext cx="0" cy="0"/>
+          <a:chOff x="0" y="0"/>
+          <a:chExt cx="0" cy="0"/>
+        </a:xfrm>
+      </p:grpSpPr>
+      <p:sp>
+        <p:nvSpPr>
+          <p:cNvPr id="2" name="Notes Placeholder 1"/>
+          <p:cNvSpPr>
+            <a:spLocks noGrp="1"/>
+          </p:cNvSpPr>
+          <p:nvPr>
+            <p:ph type="body" idx="1"/>
+          </p:nvPr>
+        </p:nvSpPr>
+        <p:spPr/>
+        <p:txBody>
+          <a:bodyPr/>
+          <a:lstStyle/>
+          <a:p>
+            <a:r>
+              <a:t>S12 · COMMISSIONING · LEAD: CONTENT PRESENTER</a:t>
+            </a:r>
+          </a:p>
+          <a:p>
+            <a:r>
+              <a:t>BEATS:</a:t>
+            </a:r>
+          </a:p>
+          <a:p>
+            <a:r>
+              <a:t>1. The four parts, in order: the homework practice, week one; the end-of-week-one check-in; the homework practice, week two; one sentence of preparation.</a:t>
+            </a:r>
+          </a:p>
+          <a:p>
+            <a:r>
+              <a:t>2. Check-in partners are named aloud before leaving this slide — the sheet has the line to write the name.</a:t>
+            </a:r>
+          </a:p>
+          <a:p>
+            <a:r>
+              <a:t>GUARD: The sheet-walk, not a re-teach.</a:t>
+            </a:r>
+          </a:p>
+        </p:txBody>
+      </p:sp>
+    </p:spTree>
+  </p:cSld>
+  <p:clrMapOvr>
+    <a:masterClrMapping/>
+  </p:clrMapOvr>
+</p:notes>
+</file>
+
 <file path=ppt/notesSlides/notesSlide151.xml><?xml version="1.0" encoding="utf-8"?>
 <p:notes xmlns:a="http://schemas.openxmlformats.org/drawingml/2006/main" xmlns:r="http://schemas.openxmlformats.org/officeDocument/2006/relationships" xmlns:p="http://schemas.openxmlformats.org/presentationml/2006/main">
   <p:cSld>
@@ -895,20 +1105,22 @@
           <a:lstStyle/>
           <a:p>
             <a:r>
-              <a:rPr lang="en-US" sz="1200"/>
               <a:t>S12 · 7:00–7:08 · LEAD: CONTAINER HOLDER</a:t>
             </a:r>
           </a:p>
           <a:p>
             <a:r>
-              <a:rPr lang="en-US" sz="1200"/>
               <a:t>BEATS: 1. Run ALL eight opening steps at two-thirds speed and name the slowness out loud: containers are rebuilt every time, by the same small faithful steps. 2. One-word check-in gets a second beat — one unhurried breath after each word; no commentary, no nodding anyone along. It is the most information-dense thirty seconds of the session. 3. Double the put-down silence to a full minute. 4. Spoken commitment, opening prayer, sit.</a:t>
             </a:r>
           </a:p>
           <a:p>
             <a:r>
-              <a:rPr lang="en-US" sz="1200"/>
               <a:t>GUARD: The slow open runs about 12 minutes and IS the session's first teaching — do not rush it back to the usual clip. If the room will not settle, run it slower, not louder; contain the room, don't fight it.</a:t>
+            </a:r>
+          </a:p>
+          <a:p>
+            <a:r>
+              <a:t>PAIR LEAD: name the leading pair in the welcome — two leaders hold tonight, and the room will see the evening handed back and forth between them; that is the design. The pair practices the session together beforehand.</a:t>
             </a:r>
           </a:p>
         </p:txBody>
@@ -1192,59 +1404,6 @@
             <a:r>
               <a:rPr lang="en-US" sz="1200"/>
               <a:t>BEATS: 1. Co-Companion (Parent) leads. Restart ONE daily practice — just one; the smallness is the wisdom. 2. Journals open, ninety seconds to write: the practice at the top of a fresh page with when and where — 'the morning question, 6:50, kitchen table.' 3. Miss a day? Do not start over from the beginning — begin again on the next available day. One seed goes back in the ground this week.</a:t>
-            </a:r>
-          </a:p>
-        </p:txBody>
-      </p:sp>
-    </p:spTree>
-  </p:cSld>
-  <p:clrMapOvr>
-    <a:masterClrMapping/>
-  </p:clrMapOvr>
-</p:notes>
-</file>
-
-<file path=ppt/notesSlides/notesSlide159.xml><?xml version="1.0" encoding="utf-8"?>
-<p:notes xmlns:a="http://schemas.openxmlformats.org/drawingml/2006/main" xmlns:r="http://schemas.openxmlformats.org/officeDocument/2006/relationships" xmlns:p="http://schemas.openxmlformats.org/presentationml/2006/main">
-  <p:cSld>
-    <p:spTree>
-      <p:nvGrpSpPr>
-        <p:cNvPr id="1" name=""/>
-        <p:cNvGrpSpPr/>
-        <p:nvPr/>
-      </p:nvGrpSpPr>
-      <p:grpSpPr>
-        <a:xfrm>
-          <a:off x="0" y="0"/>
-          <a:ext cx="0" cy="0"/>
-          <a:chOff x="0" y="0"/>
-          <a:chExt cx="0" cy="0"/>
-        </a:xfrm>
-      </p:grpSpPr>
-      <p:sp>
-        <p:nvSpPr>
-          <p:cNvPr id="2" name="Notes Placeholder 1"/>
-          <p:cNvSpPr>
-            <a:spLocks noGrp="1"/>
-          </p:cNvSpPr>
-          <p:nvPr>
-            <p:ph type="body" idx="1"/>
-          </p:nvPr>
-        </p:nvSpPr>
-        <p:spPr/>
-        <p:txBody>
-          <a:bodyPr/>
-          <a:lstStyle/>
-          <a:p>
-            <a:r>
-              <a:rPr lang="en-US" sz="1200"/>
-              <a:t>S12 · 8:20–8:24 · LEAD: CONTENT PRESENTER</a:t>
-            </a:r>
-          </a:p>
-          <a:p>
-            <a:r>
-              <a:rPr lang="en-US" sz="1200"/>
-              <a:t>BEATS: 1. One row only this week: my one practice, with its when and where. 2. A missed box is never a failure — it is an invitation to return. 3. The rest of the rhythm comes back a piece at a time in the coming weeks.</a:t>
             </a:r>
           </a:p>
         </p:txBody>
@@ -4568,7 +4727,7 @@
 </p:sld>
 </file>
 
-<file path=ppt/slides/slide152.xml><?xml version="1.0" encoding="utf-8"?>
+<file path=ppt/slides/slide10.xml><?xml version="1.0" encoding="utf-8"?>
 <p:sld xmlns:a="http://schemas.openxmlformats.org/drawingml/2006/main" xmlns:r="http://schemas.openxmlformats.org/officeDocument/2006/relationships" xmlns:p="http://schemas.openxmlformats.org/presentationml/2006/main">
   <p:cSld>
     <p:spTree>
@@ -4605,41 +4764,25 @@
           <a:ln>
             <a:noFill/>
           </a:ln>
-          <a:effectLst/>
-        </p:spPr>
-        <p:style>
-          <a:lnRef idx="1">
-            <a:schemeClr val="accent1"/>
-          </a:lnRef>
-          <a:fillRef idx="3">
-            <a:schemeClr val="accent1"/>
-          </a:fillRef>
-          <a:effectRef idx="2">
-            <a:schemeClr val="accent1"/>
-          </a:effectRef>
-          <a:fontRef idx="minor">
-            <a:schemeClr val="lt1"/>
-          </a:fontRef>
-        </p:style>
-        <p:txBody>
-          <a:bodyPr rtlCol="0" anchor="ctr"/>
-          <a:lstStyle/>
-          <a:p>
-            <a:pPr algn="ctr"/>
+        </p:spPr>
+        <p:txBody>
+          <a:bodyPr/>
+          <a:lstStyle/>
+          <a:p>
             <a:endParaRPr/>
           </a:p>
         </p:txBody>
       </p:sp>
       <p:sp>
         <p:nvSpPr>
-          <p:cNvPr id="4" name="TextBox 3"/>
+          <p:cNvPr id="3" name="TextBox 2"/>
           <p:cNvSpPr txBox="1"/>
           <p:nvPr/>
         </p:nvSpPr>
         <p:spPr>
           <a:xfrm>
-            <a:off x="822960" y="1828800"/>
-            <a:ext cx="5212080" cy="3291840"/>
+            <a:off x="822960" y="502920"/>
+            <a:ext cx="10515600" cy="822960"/>
           </a:xfrm>
           <a:prstGeom prst="rect">
             <a:avLst/>
@@ -4658,59 +4801,27 @@
               </a:spcAft>
             </a:pPr>
             <a:r>
-              <a:rPr sz="1800" b="1" i="0">
-                <a:solidFill>
-                  <a:srgbClr val="97BC62"/>
-                </a:solidFill>
-                <a:latin typeface="Calibri"/>
-              </a:rPr>
-              <a:t>SESSION 12</a:t>
-            </a:r>
-          </a:p>
-          <a:p>
-            <a:pPr algn="l">
-              <a:spcAft>
-                <a:spcPts val="1000"/>
-              </a:spcAft>
-            </a:pPr>
-            <a:r>
-              <a:rPr sz="3300" b="1" i="0">
+              <a:rPr sz="2800" b="1" i="0">
                 <a:solidFill>
                   <a:srgbClr val="2C5F2D"/>
                 </a:solidFill>
                 <a:latin typeface="Cambria"/>
               </a:rPr>
-              <a:t>The Return</a:t>
-            </a:r>
-          </a:p>
-          <a:p>
-            <a:pPr algn="l">
-              <a:spcAft>
-                <a:spcPts val="600"/>
-              </a:spcAft>
-            </a:pPr>
-            <a:r>
-              <a:rPr sz="1800" b="0" i="1">
-                <a:solidFill>
-                  <a:srgbClr val="595959"/>
-                </a:solidFill>
-                <a:latin typeface="Calibri"/>
-              </a:rPr>
-              <a:t>Coming home after the break — reading honestly what held, welcoming every walker back, and beginning again</a:t>
-            </a:r>
-          </a:p>
-        </p:txBody>
-      </p:sp>
-      <p:sp>
-        <p:nvSpPr>
-          <p:cNvPr id="5" name="TextBox 4"/>
+              <a:t>Homework — Two Weeks, Four Parts — Restart One</a:t>
+            </a:r>
+          </a:p>
+        </p:txBody>
+      </p:sp>
+      <p:sp>
+        <p:nvSpPr>
+          <p:cNvPr id="4" name="TextBox 4"/>
           <p:cNvSpPr txBox="1"/>
           <p:nvPr/>
         </p:nvSpPr>
         <p:spPr>
           <a:xfrm>
-            <a:off x="822960" y="6126480"/>
-            <a:ext cx="7315200" cy="457200"/>
+            <a:off x="822960" y="1554480"/>
+            <a:ext cx="6675120" cy="4892040"/>
           </a:xfrm>
           <a:prstGeom prst="rect">
             <a:avLst/>
@@ -4718,24 +4829,131 @@
           <a:noFill/>
         </p:spPr>
         <p:txBody>
-          <a:bodyPr wrap="square">
-            <a:spAutoFit/>
-          </a:bodyPr>
-          <a:lstStyle/>
-          <a:p>
-            <a:pPr algn="l">
+          <a:bodyPr wrap="square" lIns="91440" tIns="91440" rIns="91440" bIns="91440"/>
+          <a:lstStyle/>
+          <a:p>
+            <a:pPr marL="274320" indent="-274320">
               <a:spcAft>
-                <a:spcPts val="600"/>
+                <a:spcPts val="900"/>
               </a:spcAft>
             </a:pPr>
             <a:r>
-              <a:rPr sz="1800" b="0" i="0">
-                <a:solidFill>
-                  <a:srgbClr val="595959"/>
-                </a:solidFill>
-                <a:latin typeface="Calibri"/>
-              </a:rPr>
-              <a:t>Quarter 3: Mission &amp; Rhythm</a:t>
+              <a:rPr sz="2200" b="1" i="0">
+                <a:solidFill>
+                  <a:srgbClr val="97BC62"/>
+                </a:solidFill>
+                <a:latin typeface="Calibri"/>
+              </a:rPr>
+              <a:t>•  </a:t>
+            </a:r>
+            <a:r>
+              <a:rPr sz="2200" b="0" i="0">
+                <a:solidFill>
+                  <a:srgbClr val="222B22"/>
+                </a:solidFill>
+                <a:latin typeface="Calibri"/>
+              </a:rPr>
+              <a:t>Not everything. One daily practice — the morning question, the evening note, or PROAPT. Just one</a:t>
+            </a:r>
+          </a:p>
+          <a:p>
+            <a:pPr marL="274320" indent="-274320">
+              <a:spcAft>
+                <a:spcPts val="900"/>
+              </a:spcAft>
+            </a:pPr>
+            <a:r>
+              <a:rPr sz="2200" b="1" i="0">
+                <a:solidFill>
+                  <a:srgbClr val="97BC62"/>
+                </a:solidFill>
+                <a:latin typeface="Calibri"/>
+              </a:rPr>
+              <a:t>•  </a:t>
+            </a:r>
+            <a:r>
+              <a:rPr sz="2200" b="0" i="0">
+                <a:solidFill>
+                  <a:srgbClr val="222B22"/>
+                </a:solidFill>
+                <a:latin typeface="Calibri"/>
+              </a:rPr>
+              <a:t>Write it at the top of a fresh journal page tonight, with when and where: “The morning question, 6:50, kitchen table”</a:t>
+            </a:r>
+          </a:p>
+          <a:p>
+            <a:pPr marL="274320" indent="-274320">
+              <a:spcAft>
+                <a:spcPts val="900"/>
+              </a:spcAft>
+            </a:pPr>
+            <a:r>
+              <a:rPr sz="2200" b="1" i="0">
+                <a:solidFill>
+                  <a:srgbClr val="97BC62"/>
+                </a:solidFill>
+                <a:latin typeface="Calibri"/>
+              </a:rPr>
+              <a:t>•  </a:t>
+            </a:r>
+            <a:r>
+              <a:rPr sz="2200" b="0" i="0">
+                <a:solidFill>
+                  <a:srgbClr val="222B22"/>
+                </a:solidFill>
+                <a:latin typeface="Calibri"/>
+              </a:rPr>
+              <a:t>That one practice, daily, this week</a:t>
+            </a:r>
+          </a:p>
+          <a:p>
+            <a:pPr marL="274320" indent="-274320">
+              <a:spcAft>
+                <a:spcPts val="900"/>
+              </a:spcAft>
+            </a:pPr>
+            <a:r>
+              <a:rPr sz="2200" b="1" i="0">
+                <a:solidFill>
+                  <a:srgbClr val="97BC62"/>
+                </a:solidFill>
+                <a:latin typeface="Calibri"/>
+              </a:rPr>
+              <a:t>•  </a:t>
+            </a:r>
+            <a:r>
+              <a:rPr sz="2200" b="0" i="0">
+                <a:solidFill>
+                  <a:srgbClr val="222B22"/>
+                </a:solidFill>
+                <a:latin typeface="Calibri"/>
+              </a:rPr>
+              <a:t>Miss a day? Do not start over — begin again on the next available day</a:t>
+            </a:r>
+          </a:p>
+          <a:p>
+            <a:pPr marL="274320" indent="-274320">
+              <a:spcAft>
+                <a:spcPts val="900"/>
+              </a:spcAft>
+            </a:pPr>
+            <a:r>
+              <a:rPr sz="2200" b="1" i="0">
+                <a:solidFill>
+                  <a:srgbClr val="97BC62"/>
+                </a:solidFill>
+                <a:latin typeface="Calibri"/>
+              </a:rPr>
+              <a:t>•  </a:t>
+            </a:r>
+            <a:r>
+              <a:rPr sz="2200" b="0" i="0">
+                <a:solidFill>
+                  <a:srgbClr val="222B22"/>
+                </a:solidFill>
+                <a:latin typeface="Calibri"/>
+              </a:rPr>
+              <a:t>“One seed goes back in the ground. His mercies are new every morning; you only need one practice to be standing there when they arrive.”</a:t>
             </a:r>
           </a:p>
         </p:txBody>
@@ -4762,7 +4980,7 @@
           <a:p>
             <a:pPr algn="r"/>
             <a:r>
-              <a:t>152</a:t>
+              <a:t>160</a:t>
             </a:r>
             <a:endParaRPr sz="1000" b="1">
               <a:solidFill>
@@ -4775,7 +4993,7 @@
       </p:sp>
       <p:pic>
         <p:nvPicPr>
-          <p:cNvPr id="91" name="Picture 91" descr="a snowy road between tall pines with dawn light at its end"/>
+          <p:cNvPr id="33" name="Picture 33" descr="seedling - what grows between Wednesdays"/>
           <p:cNvPicPr>
             <a:picLocks noChangeAspect="1"/>
           </p:cNvPicPr>
@@ -4789,8 +5007,8 @@
         </p:blipFill>
         <p:spPr>
           <a:xfrm>
-            <a:off x="6309360" y="1630118"/>
-            <a:ext cx="5394960" cy="3597763"/>
+            <a:off x="8103612" y="1463040"/>
+            <a:ext cx="3262379" cy="4892040"/>
           </a:xfrm>
           <a:prstGeom prst="rect">
             <a:avLst/>
@@ -4817,7 +5035,7 @@
 </p:sld>
 </file>
 
-<file path=ppt/slides/slide153.xml><?xml version="1.0" encoding="utf-8"?>
+<file path=ppt/slides/slide12.xml><?xml version="1.0" encoding="utf-8"?>
 <p:sld xmlns:a="http://schemas.openxmlformats.org/drawingml/2006/main" xmlns:r="http://schemas.openxmlformats.org/officeDocument/2006/relationships" xmlns:p="http://schemas.openxmlformats.org/presentationml/2006/main">
   <p:cSld>
     <p:spTree>
@@ -4854,27 +5072,11 @@
           <a:ln>
             <a:noFill/>
           </a:ln>
-          <a:effectLst/>
-        </p:spPr>
-        <p:style>
-          <a:lnRef idx="1">
-            <a:schemeClr val="accent1"/>
-          </a:lnRef>
-          <a:fillRef idx="3">
-            <a:schemeClr val="accent1"/>
-          </a:fillRef>
-          <a:effectRef idx="2">
-            <a:schemeClr val="accent1"/>
-          </a:effectRef>
-          <a:fontRef idx="minor">
-            <a:schemeClr val="lt1"/>
-          </a:fontRef>
-        </p:style>
-        <p:txBody>
-          <a:bodyPr rtlCol="0" anchor="ctr"/>
-          <a:lstStyle/>
-          <a:p>
-            <a:pPr algn="ctr"/>
+        </p:spPr>
+        <p:txBody>
+          <a:bodyPr/>
+          <a:lstStyle/>
+          <a:p>
             <a:endParaRPr/>
           </a:p>
         </p:txBody>
@@ -4913,21 +5115,21 @@
                 </a:solidFill>
                 <a:latin typeface="Cambria"/>
               </a:rPr>
-              <a:t>Session 12 — Tonight’s Road</a:t>
-            </a:r>
-          </a:p>
-        </p:txBody>
-      </p:sp>
-      <p:sp>
-        <p:nvSpPr>
-          <p:cNvPr id="4" name="TextBox 3"/>
+              <a:t>Closing the Container + Aaronic Blessing</a:t>
+            </a:r>
+          </a:p>
+        </p:txBody>
+      </p:sp>
+      <p:sp>
+        <p:nvSpPr>
+          <p:cNvPr id="4" name="TextBox 4"/>
           <p:cNvSpPr txBox="1"/>
           <p:nvPr/>
         </p:nvSpPr>
         <p:spPr>
           <a:xfrm>
-            <a:off x="822960" y="1508760"/>
-            <a:ext cx="7040880" cy="4754880"/>
+            <a:off x="822960" y="1600200"/>
+            <a:ext cx="5669280" cy="4572000"/>
           </a:xfrm>
           <a:prstGeom prst="rect">
             <a:avLst/>
@@ -4935,233 +5137,268 @@
           <a:noFill/>
         </p:spPr>
         <p:txBody>
-          <a:bodyPr wrap="square">
-            <a:spAutoFit/>
-          </a:bodyPr>
+          <a:bodyPr wrap="square" lIns="91440" tIns="91440" rIns="91440" bIns="91440"/>
+          <a:lstStyle/>
+          <a:p>
+            <a:pPr marL="274320" indent="-274320">
+              <a:spcAft>
+                <a:spcPts val="900"/>
+              </a:spcAft>
+            </a:pPr>
+            <a:r>
+              <a:rPr sz="2200" b="1" i="0">
+                <a:solidFill>
+                  <a:srgbClr val="97BC62"/>
+                </a:solidFill>
+                <a:latin typeface="Calibri"/>
+              </a:rPr>
+              <a:t>•  </a:t>
+            </a:r>
+            <a:r>
+              <a:rPr sz="2200" b="0" i="0">
+                <a:solidFill>
+                  <a:srgbClr val="222B22"/>
+                </a:solidFill>
+                <a:latin typeface="Calibri"/>
+              </a:rPr>
+              <a:t>We close the way we opened — the container, six steps:</a:t>
+            </a:r>
+          </a:p>
+          <a:p>
+            <a:pPr marL="685800" indent="-274320">
+              <a:spcAft>
+                <a:spcPts val="700"/>
+              </a:spcAft>
+            </a:pPr>
+            <a:r>
+              <a:rPr sz="2000" b="1" i="0">
+                <a:solidFill>
+                  <a:srgbClr val="97BC62"/>
+                </a:solidFill>
+                <a:latin typeface="Calibri"/>
+              </a:rPr>
+              <a:t>1   </a:t>
+            </a:r>
+            <a:r>
+              <a:rPr sz="2000" b="0" i="0">
+                <a:solidFill>
+                  <a:srgbClr val="222B22"/>
+                </a:solidFill>
+                <a:latin typeface="Calibri"/>
+              </a:rPr>
+              <a:t>Stand again — same circle, same posture as the open</a:t>
+            </a:r>
+          </a:p>
+          <a:p>
+            <a:pPr marL="685800" indent="-274320">
+              <a:spcAft>
+                <a:spcPts val="700"/>
+              </a:spcAft>
+            </a:pPr>
+            <a:r>
+              <a:rPr sz="2000" b="1" i="0">
+                <a:solidFill>
+                  <a:srgbClr val="97BC62"/>
+                </a:solidFill>
+                <a:latin typeface="Calibri"/>
+              </a:rPr>
+              <a:t>2   </a:t>
+            </a:r>
+            <a:r>
+              <a:rPr sz="2000" b="0" i="0">
+                <a:solidFill>
+                  <a:srgbClr val="222B22"/>
+                </a:solidFill>
+                <a:latin typeface="Calibri"/>
+              </a:rPr>
+              <a:t>One-word landing — compare it to your opening word</a:t>
+            </a:r>
+          </a:p>
+          <a:p>
+            <a:pPr marL="685800" indent="-274320">
+              <a:spcAft>
+                <a:spcPts val="700"/>
+              </a:spcAft>
+            </a:pPr>
+            <a:r>
+              <a:rPr sz="2000" b="1" i="0">
+                <a:solidFill>
+                  <a:srgbClr val="97BC62"/>
+                </a:solidFill>
+                <a:latin typeface="Calibri"/>
+              </a:rPr>
+              <a:t>3   </a:t>
+            </a:r>
+            <a:r>
+              <a:rPr sz="2000" b="0" i="0">
+                <a:solidFill>
+                  <a:srgbClr val="222B22"/>
+                </a:solidFill>
+                <a:latin typeface="Calibri"/>
+              </a:rPr>
+              <a:t>The one thing you are taking from tonight</a:t>
+            </a:r>
+          </a:p>
+          <a:p>
+            <a:pPr marL="685800" indent="-274320">
+              <a:spcAft>
+                <a:spcPts val="700"/>
+              </a:spcAft>
+            </a:pPr>
+            <a:r>
+              <a:rPr sz="2000" b="1" i="0">
+                <a:solidFill>
+                  <a:srgbClr val="97BC62"/>
+                </a:solidFill>
+                <a:latin typeface="Calibri"/>
+              </a:rPr>
+              <a:t>4   </a:t>
+            </a:r>
+            <a:r>
+              <a:rPr sz="2000" b="0" i="0">
+                <a:solidFill>
+                  <a:srgbClr val="222B22"/>
+                </a:solidFill>
+                <a:latin typeface="Calibri"/>
+              </a:rPr>
+              <a:t>The one practice — committed aloud, or modified to one you will actually keep</a:t>
+            </a:r>
+          </a:p>
+          <a:p>
+            <a:pPr marL="685800" indent="-274320">
+              <a:spcAft>
+                <a:spcPts val="700"/>
+              </a:spcAft>
+            </a:pPr>
+            <a:r>
+              <a:rPr sz="2000" b="1" i="0">
+                <a:solidFill>
+                  <a:srgbClr val="97BC62"/>
+                </a:solidFill>
+                <a:latin typeface="Calibri"/>
+              </a:rPr>
+              <a:t>5   </a:t>
+            </a:r>
+            <a:r>
+              <a:rPr sz="2000" b="0" i="0">
+                <a:solidFill>
+                  <a:srgbClr val="222B22"/>
+                </a:solidFill>
+                <a:latin typeface="Calibri"/>
+              </a:rPr>
+              <a:t>Blessings — specific, witnessed, short</a:t>
+            </a:r>
+          </a:p>
+          <a:p>
+            <a:pPr marL="685800" indent="-274320">
+              <a:spcAft>
+                <a:spcPts val="700"/>
+              </a:spcAft>
+            </a:pPr>
+            <a:r>
+              <a:rPr sz="2000" b="1" i="0">
+                <a:solidFill>
+                  <a:srgbClr val="97BC62"/>
+                </a:solidFill>
+                <a:latin typeface="Calibri"/>
+              </a:rPr>
+              <a:t>6   </a:t>
+            </a:r>
+            <a:r>
+              <a:rPr sz="2000" b="0" i="0">
+                <a:solidFill>
+                  <a:srgbClr val="222B22"/>
+                </a:solidFill>
+                <a:latin typeface="Calibri"/>
+              </a:rPr>
+              <a:t>Closing prayer — and the Aaronic blessing, spoken over each other, face to face</a:t>
+            </a:r>
+          </a:p>
+        </p:txBody>
+      </p:sp>
+      <p:sp>
+        <p:nvSpPr>
+          <p:cNvPr id="6" name="TextBox 6"/>
+          <p:cNvSpPr txBox="1"/>
+          <p:nvPr/>
+        </p:nvSpPr>
+        <p:spPr>
+          <a:xfrm>
+            <a:off x="6766560" y="1737360"/>
+            <a:ext cx="4663440" cy="2926080"/>
+          </a:xfrm>
+          <a:prstGeom prst="rect">
+            <a:avLst/>
+          </a:prstGeom>
+          <a:solidFill>
+            <a:srgbClr val="F1F6EC"/>
+          </a:solidFill>
+        </p:spPr>
+        <p:txBody>
+          <a:bodyPr wrap="square" lIns="91440" tIns="91440" rIns="91440" bIns="91440" anchor="ctr"/>
           <a:lstStyle/>
           <a:p>
             <a:pPr>
               <a:spcAft>
-                <a:spcPts val="500"/>
+                <a:spcPts val="900"/>
               </a:spcAft>
             </a:pPr>
             <a:r>
-              <a:rPr sz="2800" b="1">
+              <a:rPr sz="1200" b="1" i="0">
                 <a:solidFill>
                   <a:srgbClr val="97BC62"/>
                 </a:solidFill>
                 <a:latin typeface="Calibri"/>
               </a:rPr>
-              <a:t>1   </a:t>
-            </a:r>
-            <a:r>
-              <a:rPr sz="2800">
-                <a:solidFill>
-                  <a:srgbClr val="222B22"/>
-                </a:solidFill>
-                <a:latin typeface="Calibri"/>
-              </a:rPr>
-              <a:t>Opening container — run slow</a:t>
+              <a:t>THE AARONIC BLESSING — NUMBERS 6:24–26</a:t>
             </a:r>
           </a:p>
           <a:p>
             <a:pPr>
               <a:spcAft>
-                <a:spcPts val="500"/>
+                <a:spcPts val="600"/>
               </a:spcAft>
             </a:pPr>
             <a:r>
-              <a:rPr sz="2800" b="1">
-                <a:solidFill>
-                  <a:srgbClr val="97BC62"/>
-                </a:solidFill>
-                <a:latin typeface="Calibri"/>
-              </a:rPr>
-              <a:t>2   </a:t>
-            </a:r>
-            <a:r>
-              <a:rPr sz="2800">
+              <a:rPr sz="2400" b="0" i="1">
                 <a:solidFill>
                   <a:srgbClr val="222B22"/>
                 </a:solidFill>
-                <a:latin typeface="Calibri"/>
-              </a:rPr>
-              <a:t>New every morning — Lam. 3:22–23, Ps. 126</a:t>
+                <a:latin typeface="Cambria"/>
+              </a:rPr>
+              <a:t>“The Lord bless you and keep you;</a:t>
             </a:r>
           </a:p>
           <a:p>
             <a:pPr>
               <a:spcAft>
-                <a:spcPts val="500"/>
+                <a:spcPts val="600"/>
               </a:spcAft>
             </a:pPr>
             <a:r>
-              <a:rPr sz="2800" b="1">
-                <a:solidFill>
-                  <a:srgbClr val="97BC62"/>
-                </a:solidFill>
-                <a:latin typeface="Calibri"/>
-              </a:rPr>
-              <a:t>3   </a:t>
-            </a:r>
-            <a:r>
-              <a:rPr sz="2800">
+              <a:rPr sz="2400" b="0" i="1">
                 <a:solidFill>
                   <a:srgbClr val="222B22"/>
                 </a:solidFill>
-                <a:latin typeface="Calibri"/>
-              </a:rPr>
-              <a:t>“What held?”</a:t>
+                <a:latin typeface="Cambria"/>
+              </a:rPr>
+              <a:t>the Lord make his face to shine upon you, and be gracious to you;</a:t>
             </a:r>
           </a:p>
           <a:p>
             <a:pPr>
               <a:spcAft>
-                <a:spcPts val="500"/>
+                <a:spcPts val="600"/>
               </a:spcAft>
             </a:pPr>
             <a:r>
-              <a:rPr sz="2800" b="1">
-                <a:solidFill>
-                  <a:srgbClr val="97BC62"/>
-                </a:solidFill>
-                <a:latin typeface="Calibri"/>
-              </a:rPr>
-              <a:t>4   </a:t>
-            </a:r>
-            <a:r>
-              <a:rPr sz="2800">
+              <a:rPr sz="2400" b="0" i="1">
                 <a:solidFill>
                   <a:srgbClr val="222B22"/>
                 </a:solidFill>
-                <a:latin typeface="Calibri"/>
-              </a:rPr>
-              <a:t>The walk home</a:t>
-            </a:r>
-          </a:p>
-          <a:p>
-            <a:pPr>
-              <a:spcAft>
-                <a:spcPts val="500"/>
-              </a:spcAft>
-            </a:pPr>
-            <a:r>
-              <a:rPr sz="2800" b="1">
-                <a:solidFill>
-                  <a:srgbClr val="97BC62"/>
-                </a:solidFill>
-                <a:latin typeface="Calibri"/>
-              </a:rPr>
-              <a:t>5   </a:t>
-            </a:r>
-            <a:r>
-              <a:rPr sz="2800">
-                <a:solidFill>
-                  <a:srgbClr val="222B22"/>
-                </a:solidFill>
-                <a:latin typeface="Calibri"/>
-              </a:rPr>
-              <a:t>Re-anchoring the year — and the door out, once</a:t>
-            </a:r>
-          </a:p>
-          <a:p>
-            <a:pPr>
-              <a:spcAft>
-                <a:spcPts val="500"/>
-              </a:spcAft>
-            </a:pPr>
-            <a:r>
-              <a:rPr sz="2800" b="1">
-                <a:solidFill>
-                  <a:srgbClr val="97BC62"/>
-                </a:solidFill>
-                <a:latin typeface="Calibri"/>
-              </a:rPr>
-              <a:t>6   </a:t>
-            </a:r>
-            <a:r>
-              <a:rPr sz="2800">
-                <a:solidFill>
-                  <a:srgbClr val="222B22"/>
-                </a:solidFill>
-                <a:latin typeface="Calibri"/>
-              </a:rPr>
-              <a:t>Between-session practice — restart one</a:t>
-            </a:r>
-          </a:p>
-          <a:p>
-            <a:pPr>
-              <a:spcAft>
-                <a:spcPts val="500"/>
-              </a:spcAft>
-            </a:pPr>
-            <a:r>
-              <a:rPr sz="2800" b="1">
-                <a:solidFill>
-                  <a:srgbClr val="97BC62"/>
-                </a:solidFill>
-                <a:latin typeface="Calibri"/>
-              </a:rPr>
-              <a:t>7   </a:t>
-            </a:r>
-            <a:r>
-              <a:rPr sz="2800">
-                <a:solidFill>
-                  <a:srgbClr val="222B22"/>
-                </a:solidFill>
-                <a:latin typeface="Calibri"/>
-              </a:rPr>
-              <a:t>Closing container</a:t>
-            </a:r>
-          </a:p>
-          <a:p>
-            <a:pPr>
-              <a:spcAft>
-                <a:spcPts val="500"/>
-              </a:spcAft>
-            </a:pPr>
-            <a:r>
-              <a:rPr sz="2800" b="1">
-                <a:solidFill>
-                  <a:srgbClr val="97BC62"/>
-                </a:solidFill>
-                <a:latin typeface="Calibri"/>
-              </a:rPr>
-              <a:t>8   </a:t>
-            </a:r>
-            <a:r>
-              <a:rPr sz="2800">
-                <a:solidFill>
-                  <a:srgbClr val="222B22"/>
-                </a:solidFill>
-                <a:latin typeface="Calibri"/>
-              </a:rPr>
-              <a:t>Leader Feedback Round</a:t>
-            </a:r>
-          </a:p>
-          <a:p>
-            <a:pPr>
-              <a:spcAft>
-                <a:spcPts val="500"/>
-              </a:spcAft>
-            </a:pPr>
-            <a:r>
-              <a:rPr sz="2800" b="1">
-                <a:solidFill>
-                  <a:srgbClr val="97BC62"/>
-                </a:solidFill>
-                <a:latin typeface="Calibri"/>
-              </a:rPr>
-              <a:t>9   </a:t>
-            </a:r>
-            <a:r>
-              <a:rPr sz="2800">
-                <a:solidFill>
-                  <a:srgbClr val="222B22"/>
-                </a:solidFill>
-                <a:latin typeface="Calibri"/>
-              </a:rPr>
-              <a:t>Aaronic blessing and sending</a:t>
+                <a:latin typeface="Cambria"/>
+              </a:rPr>
+              <a:t>the Lord lift up his countenance upon you, and give you peace.”</a:t>
             </a:r>
           </a:p>
         </p:txBody>
@@ -5188,7 +5425,7 @@
           <a:p>
             <a:pPr algn="r"/>
             <a:r>
-              <a:t>153</a:t>
+              <a:t>162</a:t>
             </a:r>
             <a:endParaRPr sz="1000" b="1">
               <a:solidFill>
@@ -5199,42 +5436,6 @@
           </a:p>
         </p:txBody>
       </p:sp>
-      <p:pic>
-        <p:nvPicPr>
-          <p:cNvPr id="31" name="Picture 31" descr="the open container bowl"/>
-          <p:cNvPicPr>
-            <a:picLocks noChangeAspect="1"/>
-          </p:cNvPicPr>
-          <p:nvPr/>
-        </p:nvPicPr>
-        <p:blipFill>
-          <a:blip r:embed="rId3"/>
-          <a:stretch>
-            <a:fillRect/>
-          </a:stretch>
-        </p:blipFill>
-        <p:spPr>
-          <a:xfrm>
-            <a:off x="8001000" y="1554480"/>
-            <a:ext cx="3017520" cy="4526280"/>
-          </a:xfrm>
-          <a:prstGeom prst="rect">
-            <a:avLst/>
-          </a:prstGeom>
-          <a:ln w="76200">
-            <a:solidFill>
-              <a:srgbClr val="FFFFFF"/>
-            </a:solidFill>
-          </a:ln>
-          <a:effectLst>
-            <a:outerShdw blurRad="63500" dist="25400" dir="5400000" rotWithShape="0">
-              <a:srgbClr val="000000">
-                <a:alpha val="35000"/>
-              </a:srgbClr>
-            </a:outerShdw>
-          </a:effectLst>
-        </p:spPr>
-      </p:pic>
     </p:spTree>
   </p:cSld>
   <p:clrMapOvr>
@@ -5243,7 +5444,7 @@
 </p:sld>
 </file>
 
-<file path=ppt/slides/slide154.xml><?xml version="1.0" encoding="utf-8"?>
+<file path=ppt/slides/slide13.xml><?xml version="1.0" encoding="utf-8"?>
 <p:sld xmlns:a="http://schemas.openxmlformats.org/drawingml/2006/main" xmlns:r="http://schemas.openxmlformats.org/officeDocument/2006/relationships" xmlns:p="http://schemas.openxmlformats.org/presentationml/2006/main">
   <p:cSld>
     <p:spTree>
@@ -5323,7 +5524,7 @@
                 </a:solidFill>
                 <a:latin typeface="Cambria"/>
               </a:rPr>
-              <a:t>Opening Container — Run Slow</a:t>
+              <a:t>The Leader Feedback Round</a:t>
             </a:r>
           </a:p>
         </p:txBody>
@@ -5336,8 +5537,8 @@
         </p:nvSpPr>
         <p:spPr>
           <a:xfrm>
-            <a:off x="822960" y="1600200"/>
-            <a:ext cx="5669280" cy="4572000"/>
+            <a:off x="822960" y="1554480"/>
+            <a:ext cx="6675120" cy="4892040"/>
           </a:xfrm>
           <a:prstGeom prst="rect">
             <a:avLst/>
@@ -5350,11 +5551,11 @@
           <a:p>
             <a:pPr marL="274320" indent="-274320">
               <a:spcAft>
-                <a:spcPts val="800"/>
+                <a:spcPts val="900"/>
               </a:spcAft>
             </a:pPr>
             <a:r>
-              <a:rPr sz="2000" b="1" i="0">
+              <a:rPr sz="2800" b="1" i="0">
                 <a:solidFill>
                   <a:srgbClr val="97BC62"/>
                 </a:solidFill>
@@ -5363,19 +5564,19 @@
               <a:t>•  </a:t>
             </a:r>
             <a:r>
-              <a:rPr sz="2000" b="0" i="0">
+              <a:rPr sz="2800" b="0" i="0">
                 <a:solidFill>
                   <a:srgbClr val="222B22"/>
                 </a:solidFill>
                 <a:latin typeface="Calibri"/>
               </a:rPr>
-              <a:t>Two weeks without Wednesdays — containers don’t keep. They are rebuilt every time, by the same small faithful steps</a:t>
-            </a:r>
-          </a:p>
-          <a:p>
-            <a:pPr marL="274320" indent="-274320">
+              <a:t>Two rounds, same as every session — the container holder first, then the content presenter: three things each</a:t>
+            </a:r>
+          </a:p>
+          <a:p>
+            <a:pPr marL="685800" indent="-274320">
               <a:spcAft>
-                <a:spcPts val="800"/>
+                <a:spcPts val="700"/>
               </a:spcAft>
             </a:pPr>
             <a:r>
@@ -5385,22 +5586,22 @@
                 </a:solidFill>
                 <a:latin typeface="Calibri"/>
               </a:rPr>
-              <a:t>•  </a:t>
-            </a:r>
-            <a:r>
-              <a:rPr sz="2000" b="0" i="0">
+              <a:t>–  </a:t>
+            </a:r>
+            <a:r>
+              <a:rPr sz="2000" b="0" i="1">
                 <a:solidFill>
                   <a:srgbClr val="222B22"/>
                 </a:solidFill>
                 <a:latin typeface="Calibri"/>
               </a:rPr>
-              <a:t>“Tonight we open it slowly, on purpose. Don’t rush the steps. There is nowhere else we need to be.”</a:t>
-            </a:r>
-          </a:p>
-          <a:p>
-            <a:pPr marL="274320" indent="-274320">
+              <a:t>“What I think went well tonight: ______”</a:t>
+            </a:r>
+          </a:p>
+          <a:p>
+            <a:pPr marL="685800" indent="-274320">
               <a:spcAft>
-                <a:spcPts val="800"/>
+                <a:spcPts val="700"/>
               </a:spcAft>
             </a:pPr>
             <a:r>
@@ -5410,22 +5611,22 @@
                 </a:solidFill>
                 <a:latin typeface="Calibri"/>
               </a:rPr>
-              <a:t>•  </a:t>
-            </a:r>
-            <a:r>
-              <a:rPr sz="2000" b="0" i="0">
+              <a:t>–  </a:t>
+            </a:r>
+            <a:r>
+              <a:rPr sz="2000" b="0" i="1">
                 <a:solidFill>
                   <a:srgbClr val="222B22"/>
                 </a:solidFill>
                 <a:latin typeface="Calibri"/>
               </a:rPr>
-              <a:t>The full eight steps — phones away, standing circle, put out / bring in, the prayer</a:t>
-            </a:r>
-          </a:p>
-          <a:p>
-            <a:pPr marL="274320" indent="-274320">
+              <a:t>“What I’d do differently next time: ______”</a:t>
+            </a:r>
+          </a:p>
+          <a:p>
+            <a:pPr marL="685800" indent="-274320">
               <a:spcAft>
-                <a:spcPts val="800"/>
+                <a:spcPts val="700"/>
               </a:spcAft>
             </a:pPr>
             <a:r>
@@ -5435,71 +5636,66 @@
                 </a:solidFill>
                 <a:latin typeface="Calibri"/>
               </a:rPr>
-              <a:t>•  </a:t>
-            </a:r>
-            <a:r>
-              <a:rPr sz="2000" b="0" i="0">
+              <a:t>–  </a:t>
+            </a:r>
+            <a:r>
+              <a:rPr sz="2000" b="0" i="1">
                 <a:solidFill>
                   <a:srgbClr val="222B22"/>
                 </a:solidFill>
                 <a:latin typeface="Calibri"/>
               </a:rPr>
-              <a:t>One-word check-in: “One word for how you actually are right now — not how you usually are, not how you should be.” Let each word have a breath</a:t>
-            </a:r>
-          </a:p>
-        </p:txBody>
-      </p:sp>
-      <p:sp>
-        <p:nvSpPr>
-          <p:cNvPr id="6" name="TextBox 6"/>
-          <p:cNvSpPr txBox="1"/>
-          <p:nvPr/>
-        </p:nvSpPr>
-        <p:spPr>
-          <a:xfrm>
-            <a:off x="6766560" y="1737360"/>
-            <a:ext cx="4663440" cy="2194560"/>
-          </a:xfrm>
-          <a:prstGeom prst="rect">
-            <a:avLst/>
-          </a:prstGeom>
-          <a:solidFill>
-            <a:srgbClr val="F1F6EC"/>
-          </a:solidFill>
-        </p:spPr>
-        <p:txBody>
-          <a:bodyPr wrap="square" lIns="91440" tIns="91440" rIns="91440" bIns="91440" anchor="ctr"/>
-          <a:lstStyle/>
-          <a:p>
-            <a:pPr>
+              <a:t>“If I were to teach tonight’s process to someone, I would tell them: ______”</a:t>
+            </a:r>
+          </a:p>
+          <a:p>
+            <a:pPr marL="274320" indent="-274320">
               <a:spcAft>
                 <a:spcPts val="900"/>
               </a:spcAft>
             </a:pPr>
             <a:r>
-              <a:rPr sz="1800" b="1" i="0">
+              <a:rPr sz="2800" b="1" i="0">
                 <a:solidFill>
                   <a:srgbClr val="97BC62"/>
                 </a:solidFill>
                 <a:latin typeface="Calibri"/>
               </a:rPr>
-              <a:t>THE SPOKEN COMMITMENT</a:t>
-            </a:r>
-          </a:p>
-          <a:p>
-            <a:pPr>
+              <a:t>•  </a:t>
+            </a:r>
+            <a:r>
+              <a:rPr sz="2800" b="0" i="0">
+                <a:solidFill>
+                  <a:srgbClr val="222B22"/>
+                </a:solidFill>
+                <a:latin typeface="Calibri"/>
+              </a:rPr>
+              <a:t>Then the room — the same two questions about tonight</a:t>
+            </a:r>
+          </a:p>
+          <a:p>
+            <a:pPr marL="274320" indent="-274320">
               <a:spcAft>
-                <a:spcPts val="600"/>
+                <a:spcPts val="900"/>
               </a:spcAft>
             </a:pPr>
             <a:r>
-              <a:rPr sz="2400" b="0" i="1">
+              <a:rPr sz="2800" b="1" i="0">
+                <a:solidFill>
+                  <a:srgbClr val="97BC62"/>
+                </a:solidFill>
+                <a:latin typeface="Calibri"/>
+              </a:rPr>
+              <a:t>•  </a:t>
+            </a:r>
+            <a:r>
+              <a:rPr sz="2800" b="0" i="0">
                 <a:solidFill>
                   <a:srgbClr val="222B22"/>
                 </a:solidFill>
-                <a:latin typeface="Cambria"/>
-              </a:rPr>
-              <a:t>“I am here. I am paying attention. I am willing to be moved.”</a:t>
+                <a:latin typeface="Calibri"/>
+              </a:rPr>
+              <a:t>The leaders receive without defending — “thank you” is the whole response</a:t>
             </a:r>
           </a:p>
         </p:txBody>
@@ -5526,7 +5722,7 @@
           <a:p>
             <a:pPr algn="r"/>
             <a:r>
-              <a:t>154</a:t>
+              <a:t>163</a:t>
             </a:r>
             <a:endParaRPr sz="1000" b="1">
               <a:solidFill>
@@ -5537,6 +5733,42 @@
           </a:p>
         </p:txBody>
       </p:sp>
+      <p:pic>
+        <p:nvPicPr>
+          <p:cNvPr id="33" name="Picture 33" descr="compass on the trail - the weekly bearing check"/>
+          <p:cNvPicPr>
+            <a:picLocks noChangeAspect="1"/>
+          </p:cNvPicPr>
+          <p:nvPr/>
+        </p:nvPicPr>
+        <p:blipFill>
+          <a:blip r:embed="rId3"/>
+          <a:stretch>
+            <a:fillRect/>
+          </a:stretch>
+        </p:blipFill>
+        <p:spPr>
+          <a:xfrm>
+            <a:off x="8106160" y="1463040"/>
+            <a:ext cx="3259831" cy="4892040"/>
+          </a:xfrm>
+          <a:prstGeom prst="rect">
+            <a:avLst/>
+          </a:prstGeom>
+          <a:ln w="76200">
+            <a:solidFill>
+              <a:srgbClr val="FFFFFF"/>
+            </a:solidFill>
+          </a:ln>
+          <a:effectLst>
+            <a:outerShdw blurRad="63500" dist="25400" dir="5400000" rotWithShape="0">
+              <a:srgbClr val="000000">
+                <a:alpha val="35000"/>
+              </a:srgbClr>
+            </a:outerShdw>
+          </a:effectLst>
+        </p:spPr>
+      </p:pic>
     </p:spTree>
   </p:cSld>
   <p:clrMapOvr>
@@ -5545,7 +5777,596 @@
 </p:sld>
 </file>
 
-<file path=ppt/slides/slide155.xml><?xml version="1.0" encoding="utf-8"?>
+<file path=ppt/slides/slide14.xml><?xml version="1.0" encoding="utf-8"?>
+<p:sld xmlns:a="http://schemas.openxmlformats.org/drawingml/2006/main" xmlns:p="http://schemas.openxmlformats.org/presentationml/2006/main" xmlns:r="http://schemas.openxmlformats.org/officeDocument/2006/relationships">
+  <p:cSld>
+    <p:spTree>
+      <p:nvGrpSpPr>
+        <p:cNvPr id="1" name=""/>
+        <p:cNvGrpSpPr/>
+        <p:nvPr/>
+      </p:nvGrpSpPr>
+      <p:grpSpPr/>
+      <p:sp>
+        <p:nvSpPr>
+          <p:cNvPr id="2" name="Rectangle 1"/>
+          <p:cNvSpPr/>
+          <p:nvPr/>
+        </p:nvSpPr>
+        <p:spPr>
+          <a:xfrm>
+            <a:off x="0" y="0"/>
+            <a:ext cx="12192000" cy="6858000"/>
+          </a:xfrm>
+          <a:prstGeom prst="rect">
+            <a:avLst/>
+          </a:prstGeom>
+          <a:solidFill>
+            <a:srgbClr val="FFFFFF"/>
+          </a:solidFill>
+          <a:ln>
+            <a:noFill/>
+          </a:ln>
+          <a:effectLst/>
+        </p:spPr>
+        <p:style>
+          <a:lnRef idx="1">
+            <a:schemeClr val="accent1"/>
+          </a:lnRef>
+          <a:fillRef idx="3">
+            <a:schemeClr val="accent1"/>
+          </a:fillRef>
+          <a:effectRef idx="2">
+            <a:schemeClr val="accent1"/>
+          </a:effectRef>
+          <a:fontRef idx="minor">
+            <a:schemeClr val="lt1"/>
+          </a:fontRef>
+        </p:style>
+        <p:txBody>
+          <a:bodyPr rtlCol="0" anchor="ctr"/>
+          <a:lstStyle/>
+          <a:p>
+            <a:pPr algn="ctr"/>
+          </a:p>
+        </p:txBody>
+      </p:sp>
+      <p:sp>
+        <p:nvSpPr>
+          <p:cNvPr id="3" name="TextBox 2"/>
+          <p:cNvSpPr txBox="1"/>
+          <p:nvPr/>
+        </p:nvSpPr>
+        <p:spPr>
+          <a:xfrm>
+            <a:off x="822960" y="502920"/>
+            <a:ext cx="10515600" cy="822960"/>
+          </a:xfrm>
+          <a:prstGeom prst="rect">
+            <a:avLst/>
+          </a:prstGeom>
+          <a:noFill/>
+        </p:spPr>
+        <p:txBody>
+          <a:bodyPr wrap="square">
+            <a:spAutoFit/>
+          </a:bodyPr>
+          <a:lstStyle/>
+          <a:p>
+            <a:r>
+              <a:rPr sz="2800" b="1">
+                <a:solidFill>
+                  <a:srgbClr val="2C5F2D"/>
+                </a:solidFill>
+                <a:latin typeface="Cambria"/>
+              </a:rPr>
+              <a:t>Where We Are — the Four Connects</a:t>
+            </a:r>
+          </a:p>
+        </p:txBody>
+      </p:sp>
+      <p:pic>
+        <p:nvPicPr>
+          <p:cNvPr id="4" name="Picture 3" descr="four-connects.png"/>
+          <p:cNvPicPr>
+            <a:picLocks noChangeAspect="1"/>
+          </p:cNvPicPr>
+          <p:nvPr/>
+        </p:nvPicPr>
+        <p:blipFill>
+          <a:blip r:embed="rId2"/>
+          <a:stretch>
+            <a:fillRect/>
+          </a:stretch>
+        </p:blipFill>
+        <p:spPr>
+          <a:xfrm>
+            <a:off x="932688" y="1645920"/>
+            <a:ext cx="10332720" cy="3708663"/>
+          </a:xfrm>
+          <a:prstGeom prst="rect">
+            <a:avLst/>
+          </a:prstGeom>
+        </p:spPr>
+      </p:pic>
+      <p:sp>
+        <p:nvSpPr>
+          <p:cNvPr id="5" name="TextBox 4"/>
+          <p:cNvSpPr txBox="1"/>
+          <p:nvPr/>
+        </p:nvSpPr>
+        <p:spPr>
+          <a:xfrm>
+            <a:off x="822960" y="5623560"/>
+            <a:ext cx="10515600" cy="914400"/>
+          </a:xfrm>
+          <a:prstGeom prst="rect">
+            <a:avLst/>
+          </a:prstGeom>
+          <a:noFill/>
+        </p:spPr>
+        <p:txBody>
+          <a:bodyPr wrap="square">
+            <a:spAutoFit/>
+          </a:bodyPr>
+          <a:lstStyle/>
+          <a:p>
+            <a:r>
+              <a:rPr sz="1800" b="0">
+                <a:solidFill>
+                  <a:srgbClr val="222B22"/>
+                </a:solidFill>
+                <a:latin typeface="Calibri"/>
+              </a:rPr>
+              <a:t>Session 12 returns to the whole map — </a:t>
+            </a:r>
+            <a:r>
+              <a:rPr sz="1800" b="1">
+                <a:solidFill>
+                  <a:srgbClr val="2C5F2D"/>
+                </a:solidFill>
+                <a:latin typeface="Calibri"/>
+              </a:rPr>
+              <a:t>all four Connects</a:t>
+            </a:r>
+            <a:r>
+              <a:rPr sz="1800" b="0">
+                <a:solidFill>
+                  <a:srgbClr val="222B22"/>
+                </a:solidFill>
+                <a:latin typeface="Calibri"/>
+              </a:rPr>
+              <a:t>, rebuilt after the break. Each connection makes the next one real (Matt. 22:37–40).</a:t>
+            </a:r>
+          </a:p>
+        </p:txBody>
+      </p:sp>
+      <p:sp>
+        <p:nvSpPr>
+          <p:cNvPr id="90" name="SlideNum"/>
+          <p:cNvSpPr txBox="1"/>
+          <p:nvPr/>
+        </p:nvSpPr>
+        <p:spPr>
+          <a:xfrm>
+            <a:off x="11384280" y="6446520"/>
+            <a:ext cx="640080" cy="292608"/>
+          </a:xfrm>
+          <a:prstGeom prst="rect">
+            <a:avLst/>
+          </a:prstGeom>
+          <a:noFill/>
+        </p:spPr>
+        <p:txBody>
+          <a:bodyPr wrap="none" lIns="0" tIns="0" rIns="45720" bIns="0" anchor="ctr"/>
+          <a:lstStyle/>
+          <a:p>
+            <a:pPr algn="r"/>
+            <a:r>
+              <a:t>152a</a:t>
+            </a:r>
+            <a:endParaRPr sz="1000" b="1">
+              <a:solidFill>
+                <a:srgbClr val="7A8A6E"/>
+              </a:solidFill>
+              <a:latin typeface="Calibri"/>
+            </a:endParaRPr>
+          </a:p>
+        </p:txBody>
+      </p:sp>
+    </p:spTree>
+  </p:cSld>
+  <p:clrMapOvr>
+    <a:masterClrMapping/>
+  </p:clrMapOvr>
+</p:sld>
+</file>
+
+<file path=ppt/slides/slide15.xml><?xml version="1.0" encoding="utf-8"?>
+<p:sld xmlns:a="http://schemas.openxmlformats.org/drawingml/2006/main" xmlns:p="http://schemas.openxmlformats.org/presentationml/2006/main" xmlns:r="http://schemas.openxmlformats.org/officeDocument/2006/relationships">
+  <p:cSld>
+    <p:spTree>
+      <p:nvGrpSpPr>
+        <p:cNvPr id="1" name=""/>
+        <p:cNvGrpSpPr/>
+        <p:nvPr/>
+      </p:nvGrpSpPr>
+      <p:grpSpPr/>
+      <p:sp>
+        <p:nvSpPr>
+          <p:cNvPr id="2" name="Rectangle 1"/>
+          <p:cNvSpPr/>
+          <p:nvPr/>
+        </p:nvSpPr>
+        <p:spPr>
+          <a:xfrm>
+            <a:off x="0" y="0"/>
+            <a:ext cx="12192000" cy="6858000"/>
+          </a:xfrm>
+          <a:prstGeom prst="rect">
+            <a:avLst/>
+          </a:prstGeom>
+          <a:solidFill>
+            <a:srgbClr val="FFFFFF"/>
+          </a:solidFill>
+          <a:ln>
+            <a:noFill/>
+          </a:ln>
+          <a:effectLst/>
+        </p:spPr>
+        <p:style>
+          <a:lnRef idx="1">
+            <a:schemeClr val="accent1"/>
+          </a:lnRef>
+          <a:fillRef idx="3">
+            <a:schemeClr val="accent1"/>
+          </a:fillRef>
+          <a:effectRef idx="2">
+            <a:schemeClr val="accent1"/>
+          </a:effectRef>
+          <a:fontRef idx="minor">
+            <a:schemeClr val="lt1"/>
+          </a:fontRef>
+        </p:style>
+        <p:txBody>
+          <a:bodyPr rtlCol="0" anchor="ctr"/>
+          <a:lstStyle/>
+          <a:p>
+            <a:pPr algn="ctr"/>
+          </a:p>
+        </p:txBody>
+      </p:sp>
+      <p:sp>
+        <p:nvSpPr>
+          <p:cNvPr id="3" name="TextBox 2"/>
+          <p:cNvSpPr txBox="1"/>
+          <p:nvPr/>
+        </p:nvSpPr>
+        <p:spPr>
+          <a:xfrm>
+            <a:off x="822960" y="502920"/>
+            <a:ext cx="10515600" cy="822960"/>
+          </a:xfrm>
+          <a:prstGeom prst="rect">
+            <a:avLst/>
+          </a:prstGeom>
+          <a:noFill/>
+        </p:spPr>
+        <p:txBody>
+          <a:bodyPr wrap="square">
+            <a:spAutoFit/>
+          </a:bodyPr>
+          <a:lstStyle/>
+          <a:p>
+            <a:r>
+              <a:rPr sz="2800" b="1">
+                <a:solidFill>
+                  <a:srgbClr val="2C5F2D"/>
+                </a:solidFill>
+                <a:latin typeface="Cambria"/>
+              </a:rPr>
+              <a:t>The Take-Home Sheet — the Daily Rhythm</a:t>
+            </a:r>
+          </a:p>
+        </p:txBody>
+      </p:sp>
+      <p:pic>
+        <p:nvPicPr>
+          <p:cNvPr id="4" name="Picture 3" descr="s12_part1.png"/>
+          <p:cNvPicPr>
+            <a:picLocks noChangeAspect="1"/>
+          </p:cNvPicPr>
+          <p:nvPr/>
+        </p:nvPicPr>
+        <p:blipFill>
+          <a:blip r:embed="rId2"/>
+          <a:stretch>
+            <a:fillRect/>
+          </a:stretch>
+        </p:blipFill>
+        <p:spPr>
+          <a:xfrm>
+            <a:off x="1798167" y="1463040"/>
+            <a:ext cx="8595360" cy="4039819"/>
+          </a:xfrm>
+          <a:prstGeom prst="rect">
+            <a:avLst/>
+          </a:prstGeom>
+          <a:ln w="12700">
+            <a:solidFill>
+              <a:srgbClr val="C8C8C8"/>
+            </a:solidFill>
+          </a:ln>
+        </p:spPr>
+      </p:pic>
+      <p:sp>
+        <p:nvSpPr>
+          <p:cNvPr id="5" name="TextBox 4"/>
+          <p:cNvSpPr txBox="1"/>
+          <p:nvPr/>
+        </p:nvSpPr>
+        <p:spPr>
+          <a:xfrm>
+            <a:off x="822960" y="6355080"/>
+            <a:ext cx="10515600" cy="411480"/>
+          </a:xfrm>
+          <a:prstGeom prst="rect">
+            <a:avLst/>
+          </a:prstGeom>
+          <a:noFill/>
+        </p:spPr>
+        <p:txBody>
+          <a:bodyPr wrap="square">
+            <a:spAutoFit/>
+          </a:bodyPr>
+          <a:lstStyle/>
+          <a:p>
+            <a:r>
+              <a:rPr sz="1400" i="1">
+                <a:solidFill>
+                  <a:srgbClr val="595959"/>
+                </a:solidFill>
+                <a:latin typeface="Calibri"/>
+              </a:rPr>
+              <a:t>Handed out now — this is the sheet in your hands.</a:t>
+            </a:r>
+          </a:p>
+        </p:txBody>
+      </p:sp>
+      <p:sp>
+        <p:nvSpPr>
+          <p:cNvPr id="90" name="SlideNum"/>
+          <p:cNvSpPr txBox="1"/>
+          <p:nvPr/>
+        </p:nvSpPr>
+        <p:spPr>
+          <a:xfrm>
+            <a:off x="11384280" y="6446520"/>
+            <a:ext cx="640080" cy="292608"/>
+          </a:xfrm>
+          <a:prstGeom prst="rect">
+            <a:avLst/>
+          </a:prstGeom>
+          <a:noFill/>
+        </p:spPr>
+        <p:txBody>
+          <a:bodyPr wrap="none" lIns="0" tIns="0" rIns="45720" bIns="0" anchor="ctr"/>
+          <a:lstStyle/>
+          <a:p>
+            <a:pPr algn="r"/>
+            <a:r>
+              <a:t>161</a:t>
+            </a:r>
+            <a:endParaRPr sz="1000" b="1">
+              <a:solidFill>
+                <a:srgbClr val="7A8A6E"/>
+              </a:solidFill>
+              <a:latin typeface="Calibri"/>
+            </a:endParaRPr>
+          </a:p>
+        </p:txBody>
+      </p:sp>
+    </p:spTree>
+  </p:cSld>
+  <p:clrMapOvr>
+    <a:masterClrMapping/>
+  </p:clrMapOvr>
+</p:sld>
+</file>
+
+<file path=ppt/slides/slide16.xml><?xml version="1.0" encoding="utf-8"?>
+<p:sld xmlns:a="http://schemas.openxmlformats.org/drawingml/2006/main" xmlns:p="http://schemas.openxmlformats.org/presentationml/2006/main" xmlns:r="http://schemas.openxmlformats.org/officeDocument/2006/relationships">
+  <p:cSld>
+    <p:spTree>
+      <p:nvGrpSpPr>
+        <p:cNvPr id="1" name=""/>
+        <p:cNvGrpSpPr/>
+        <p:nvPr/>
+      </p:nvGrpSpPr>
+      <p:grpSpPr/>
+      <p:sp>
+        <p:nvSpPr>
+          <p:cNvPr id="2" name="Rectangle 1"/>
+          <p:cNvSpPr/>
+          <p:nvPr/>
+        </p:nvSpPr>
+        <p:spPr>
+          <a:xfrm>
+            <a:off x="0" y="0"/>
+            <a:ext cx="12192000" cy="6858000"/>
+          </a:xfrm>
+          <a:prstGeom prst="rect">
+            <a:avLst/>
+          </a:prstGeom>
+          <a:solidFill>
+            <a:srgbClr val="FFFFFF"/>
+          </a:solidFill>
+          <a:ln>
+            <a:noFill/>
+          </a:ln>
+          <a:effectLst/>
+        </p:spPr>
+        <p:style>
+          <a:lnRef idx="1">
+            <a:schemeClr val="accent1"/>
+          </a:lnRef>
+          <a:fillRef idx="3">
+            <a:schemeClr val="accent1"/>
+          </a:fillRef>
+          <a:effectRef idx="2">
+            <a:schemeClr val="accent1"/>
+          </a:effectRef>
+          <a:fontRef idx="minor">
+            <a:schemeClr val="lt1"/>
+          </a:fontRef>
+        </p:style>
+        <p:txBody>
+          <a:bodyPr rtlCol="0" anchor="ctr"/>
+          <a:lstStyle/>
+          <a:p>
+            <a:pPr algn="ctr"/>
+          </a:p>
+        </p:txBody>
+      </p:sp>
+      <p:sp>
+        <p:nvSpPr>
+          <p:cNvPr id="3" name="TextBox 2"/>
+          <p:cNvSpPr txBox="1"/>
+          <p:nvPr/>
+        </p:nvSpPr>
+        <p:spPr>
+          <a:xfrm>
+            <a:off x="822960" y="502920"/>
+            <a:ext cx="10515600" cy="822960"/>
+          </a:xfrm>
+          <a:prstGeom prst="rect">
+            <a:avLst/>
+          </a:prstGeom>
+          <a:noFill/>
+        </p:spPr>
+        <p:txBody>
+          <a:bodyPr wrap="square">
+            <a:spAutoFit/>
+          </a:bodyPr>
+          <a:lstStyle/>
+          <a:p>
+            <a:r>
+              <a:rPr sz="2800" b="1">
+                <a:solidFill>
+                  <a:srgbClr val="2C5F2D"/>
+                </a:solidFill>
+                <a:latin typeface="Cambria"/>
+              </a:rPr>
+              <a:t>The Take-Home Sheet — the Four Parts</a:t>
+            </a:r>
+          </a:p>
+        </p:txBody>
+      </p:sp>
+      <p:pic>
+        <p:nvPicPr>
+          <p:cNvPr id="4" name="Picture 3" descr="s12_part2.png"/>
+          <p:cNvPicPr>
+            <a:picLocks noChangeAspect="1"/>
+          </p:cNvPicPr>
+          <p:nvPr/>
+        </p:nvPicPr>
+        <p:blipFill>
+          <a:blip r:embed="rId2"/>
+          <a:stretch>
+            <a:fillRect/>
+          </a:stretch>
+        </p:blipFill>
+        <p:spPr>
+          <a:xfrm>
+            <a:off x="2066004" y="1463040"/>
+            <a:ext cx="8059687" cy="4709160"/>
+          </a:xfrm>
+          <a:prstGeom prst="rect">
+            <a:avLst/>
+          </a:prstGeom>
+          <a:ln w="12700">
+            <a:solidFill>
+              <a:srgbClr val="C8C8C8"/>
+            </a:solidFill>
+          </a:ln>
+        </p:spPr>
+      </p:pic>
+      <p:sp>
+        <p:nvSpPr>
+          <p:cNvPr id="5" name="TextBox 4"/>
+          <p:cNvSpPr txBox="1"/>
+          <p:nvPr/>
+        </p:nvSpPr>
+        <p:spPr>
+          <a:xfrm>
+            <a:off x="822960" y="6355080"/>
+            <a:ext cx="10515600" cy="411480"/>
+          </a:xfrm>
+          <a:prstGeom prst="rect">
+            <a:avLst/>
+          </a:prstGeom>
+          <a:noFill/>
+        </p:spPr>
+        <p:txBody>
+          <a:bodyPr wrap="square">
+            <a:spAutoFit/>
+          </a:bodyPr>
+          <a:lstStyle/>
+          <a:p>
+            <a:r>
+              <a:rPr sz="1400" i="1">
+                <a:solidFill>
+                  <a:srgbClr val="595959"/>
+                </a:solidFill>
+                <a:latin typeface="Calibri"/>
+              </a:rPr>
+              <a:t>One practice at a time — and a partner expecting you at the end of week one.</a:t>
+            </a:r>
+          </a:p>
+        </p:txBody>
+      </p:sp>
+      <p:sp>
+        <p:nvSpPr>
+          <p:cNvPr id="90" name="SlideNum"/>
+          <p:cNvSpPr txBox="1"/>
+          <p:nvPr/>
+        </p:nvSpPr>
+        <p:spPr>
+          <a:xfrm>
+            <a:off x="11384280" y="6446520"/>
+            <a:ext cx="640080" cy="292608"/>
+          </a:xfrm>
+          <a:prstGeom prst="rect">
+            <a:avLst/>
+          </a:prstGeom>
+          <a:noFill/>
+        </p:spPr>
+        <p:txBody>
+          <a:bodyPr wrap="none" lIns="0" tIns="0" rIns="45720" bIns="0" anchor="ctr"/>
+          <a:lstStyle/>
+          <a:p>
+            <a:pPr algn="r"/>
+            <a:r>
+              <a:t>161a</a:t>
+            </a:r>
+            <a:endParaRPr sz="1000" b="1">
+              <a:solidFill>
+                <a:srgbClr val="7A8A6E"/>
+              </a:solidFill>
+              <a:latin typeface="Calibri"/>
+            </a:endParaRPr>
+          </a:p>
+        </p:txBody>
+      </p:sp>
+    </p:spTree>
+  </p:cSld>
+  <p:clrMapOvr>
+    <a:masterClrMapping/>
+  </p:clrMapOvr>
+</p:sld>
+</file>
+
+<file path=ppt/slides/slide2.xml><?xml version="1.0" encoding="utf-8"?>
 <p:sld xmlns:a="http://schemas.openxmlformats.org/drawingml/2006/main" xmlns:r="http://schemas.openxmlformats.org/officeDocument/2006/relationships" xmlns:p="http://schemas.openxmlformats.org/presentationml/2006/main">
   <p:cSld>
     <p:spTree>
@@ -5582,25 +6403,41 @@
           <a:ln>
             <a:noFill/>
           </a:ln>
-        </p:spPr>
-        <p:txBody>
-          <a:bodyPr/>
-          <a:lstStyle/>
-          <a:p>
+          <a:effectLst/>
+        </p:spPr>
+        <p:style>
+          <a:lnRef idx="1">
+            <a:schemeClr val="accent1"/>
+          </a:lnRef>
+          <a:fillRef idx="3">
+            <a:schemeClr val="accent1"/>
+          </a:fillRef>
+          <a:effectRef idx="2">
+            <a:schemeClr val="accent1"/>
+          </a:effectRef>
+          <a:fontRef idx="minor">
+            <a:schemeClr val="lt1"/>
+          </a:fontRef>
+        </p:style>
+        <p:txBody>
+          <a:bodyPr rtlCol="0" anchor="ctr"/>
+          <a:lstStyle/>
+          <a:p>
+            <a:pPr algn="ctr"/>
             <a:endParaRPr/>
           </a:p>
         </p:txBody>
       </p:sp>
       <p:sp>
         <p:nvSpPr>
-          <p:cNvPr id="3" name="TextBox 2"/>
+          <p:cNvPr id="4" name="TextBox 3"/>
           <p:cNvSpPr txBox="1"/>
           <p:nvPr/>
         </p:nvSpPr>
         <p:spPr>
           <a:xfrm>
-            <a:off x="822960" y="502920"/>
-            <a:ext cx="10515600" cy="822960"/>
+            <a:off x="822960" y="1828800"/>
+            <a:ext cx="5212080" cy="3291840"/>
           </a:xfrm>
           <a:prstGeom prst="rect">
             <a:avLst/>
@@ -5619,27 +6456,59 @@
               </a:spcAft>
             </a:pPr>
             <a:r>
-              <a:rPr sz="2800" b="1" i="0">
+              <a:rPr sz="1800" b="1" i="0">
+                <a:solidFill>
+                  <a:srgbClr val="97BC62"/>
+                </a:solidFill>
+                <a:latin typeface="Calibri"/>
+              </a:rPr>
+              <a:t>SESSION 12</a:t>
+            </a:r>
+          </a:p>
+          <a:p>
+            <a:pPr algn="l">
+              <a:spcAft>
+                <a:spcPts val="1000"/>
+              </a:spcAft>
+            </a:pPr>
+            <a:r>
+              <a:rPr sz="3300" b="1" i="0">
                 <a:solidFill>
                   <a:srgbClr val="2C5F2D"/>
                 </a:solidFill>
                 <a:latin typeface="Cambria"/>
               </a:rPr>
-              <a:t>New Every Morning — Lam. 3:22–23, Ps. 126</a:t>
-            </a:r>
-          </a:p>
-        </p:txBody>
-      </p:sp>
-      <p:sp>
-        <p:nvSpPr>
-          <p:cNvPr id="4" name="TextBox 4"/>
+              <a:t>The Return</a:t>
+            </a:r>
+          </a:p>
+          <a:p>
+            <a:pPr algn="l">
+              <a:spcAft>
+                <a:spcPts val="600"/>
+              </a:spcAft>
+            </a:pPr>
+            <a:r>
+              <a:rPr sz="1800" b="0" i="1">
+                <a:solidFill>
+                  <a:srgbClr val="595959"/>
+                </a:solidFill>
+                <a:latin typeface="Calibri"/>
+              </a:rPr>
+              <a:t>Coming home after the break — reading honestly what held, welcoming every walker back, and beginning again</a:t>
+            </a:r>
+          </a:p>
+        </p:txBody>
+      </p:sp>
+      <p:sp>
+        <p:nvSpPr>
+          <p:cNvPr id="5" name="TextBox 4"/>
           <p:cNvSpPr txBox="1"/>
           <p:nvPr/>
         </p:nvSpPr>
         <p:spPr>
           <a:xfrm>
-            <a:off x="822960" y="1600200"/>
-            <a:ext cx="5669280" cy="4572000"/>
+            <a:off x="822960" y="6126480"/>
+            <a:ext cx="7315200" cy="457200"/>
           </a:xfrm>
           <a:prstGeom prst="rect">
             <a:avLst/>
@@ -5647,161 +6516,24 @@
           <a:noFill/>
         </p:spPr>
         <p:txBody>
-          <a:bodyPr wrap="square" lIns="91440" tIns="91440" rIns="91440" bIns="91440"/>
-          <a:lstStyle/>
-          <a:p>
-            <a:pPr marL="274320" indent="-274320">
-              <a:spcAft>
-                <a:spcPts val="800"/>
-              </a:spcAft>
-            </a:pPr>
-            <a:r>
-              <a:rPr sz="2000" b="1" i="0">
-                <a:solidFill>
-                  <a:srgbClr val="97BC62"/>
-                </a:solidFill>
-                <a:latin typeface="Calibri"/>
-              </a:rPr>
-              <a:t>•  </a:t>
-            </a:r>
-            <a:r>
-              <a:rPr sz="2000" b="0" i="0">
-                <a:solidFill>
-                  <a:srgbClr val="222B22"/>
-                </a:solidFill>
-                <a:latin typeface="Calibri"/>
-              </a:rPr>
-              <a:t>Written in the ashes of Jerusalem — the mercies-new truth lives in the mornings after the seasons that didn’t hold</a:t>
-            </a:r>
-          </a:p>
-          <a:p>
-            <a:pPr marL="274320" indent="-274320">
-              <a:spcAft>
-                <a:spcPts val="800"/>
-              </a:spcAft>
-            </a:pPr>
-            <a:r>
-              <a:rPr sz="2000" b="1" i="0">
-                <a:solidFill>
-                  <a:srgbClr val="97BC62"/>
-                </a:solidFill>
-                <a:latin typeface="Calibri"/>
-              </a:rPr>
-              <a:t>•  </a:t>
-            </a:r>
-            <a:r>
-              <a:rPr sz="2000" b="0" i="0">
-                <a:solidFill>
-                  <a:srgbClr val="222B22"/>
-                </a:solidFill>
-                <a:latin typeface="Calibri"/>
-              </a:rPr>
-              <a:t>Not new every morning that you earned. Issued fresh, this morning, to everyone in this circle — whatever the break looked like</a:t>
-            </a:r>
-          </a:p>
-          <a:p>
-            <a:pPr marL="274320" indent="-274320">
-              <a:spcAft>
-                <a:spcPts val="800"/>
-              </a:spcAft>
-            </a:pPr>
-            <a:r>
-              <a:rPr sz="2000" b="1" i="0">
-                <a:solidFill>
-                  <a:srgbClr val="97BC62"/>
-                </a:solidFill>
-                <a:latin typeface="Calibri"/>
-              </a:rPr>
-              <a:t>•  </a:t>
-            </a:r>
-            <a:r>
-              <a:rPr sz="2000" b="0" i="0">
-                <a:solidFill>
-                  <a:srgbClr val="222B22"/>
-                </a:solidFill>
-                <a:latin typeface="Calibri"/>
-              </a:rPr>
-              <a:t>Psalm 126 — “those who sow in tears shall reap with shouts of joy!” Coming home is not make-up work; it is the happiest walk there is</a:t>
-            </a:r>
-          </a:p>
-          <a:p>
-            <a:pPr marL="274320" indent="-274320">
-              <a:spcAft>
-                <a:spcPts val="800"/>
-              </a:spcAft>
-            </a:pPr>
-            <a:r>
-              <a:rPr sz="2000" b="1" i="0">
-                <a:solidFill>
-                  <a:srgbClr val="97BC62"/>
-                </a:solidFill>
-                <a:latin typeface="Calibri"/>
-              </a:rPr>
-              <a:t>•  </a:t>
-            </a:r>
-            <a:r>
-              <a:rPr sz="2000" b="0" i="0">
-                <a:solidFill>
-                  <a:srgbClr val="222B22"/>
-                </a:solidFill>
-                <a:latin typeface="Calibri"/>
-              </a:rPr>
-              <a:t>Tonight we read the break honestly — and we can afford to, because the mercy was already new before we walked in</a:t>
-            </a:r>
-          </a:p>
-        </p:txBody>
-      </p:sp>
-      <p:sp>
-        <p:nvSpPr>
-          <p:cNvPr id="6" name="TextBox 6"/>
-          <p:cNvSpPr txBox="1"/>
-          <p:nvPr/>
-        </p:nvSpPr>
-        <p:spPr>
-          <a:xfrm>
-            <a:off x="6766560" y="1737360"/>
-            <a:ext cx="4663440" cy="2194560"/>
-          </a:xfrm>
-          <a:prstGeom prst="rect">
-            <a:avLst/>
-          </a:prstGeom>
-          <a:solidFill>
-            <a:srgbClr val="F1F6EC"/>
-          </a:solidFill>
-        </p:spPr>
-        <p:txBody>
-          <a:bodyPr wrap="square" lIns="91440" tIns="91440" rIns="91440" bIns="91440" anchor="ctr"/>
-          <a:lstStyle/>
-          <a:p>
-            <a:pPr>
-              <a:spcAft>
-                <a:spcPts val="900"/>
-              </a:spcAft>
-            </a:pPr>
-            <a:r>
-              <a:rPr sz="1200" b="1" i="0">
-                <a:solidFill>
-                  <a:srgbClr val="97BC62"/>
-                </a:solidFill>
-                <a:latin typeface="Calibri"/>
-              </a:rPr>
-              <a:t>LAMENTATIONS 3:22–23</a:t>
-            </a:r>
-          </a:p>
-          <a:p>
-            <a:pPr>
+          <a:bodyPr wrap="square">
+            <a:spAutoFit/>
+          </a:bodyPr>
+          <a:lstStyle/>
+          <a:p>
+            <a:pPr algn="l">
               <a:spcAft>
                 <a:spcPts val="600"/>
               </a:spcAft>
             </a:pPr>
             <a:r>
-              <a:rPr sz="2400" b="0" i="1">
-                <a:solidFill>
-                  <a:srgbClr val="222B22"/>
-                </a:solidFill>
-                <a:latin typeface="Cambria"/>
-              </a:rPr>
-              <a:t>“The steadfast love of the LORD never ceases; his mercies never come to an end; they are new every morning; great is your faithfulness.”</a:t>
+              <a:rPr sz="1800" b="0" i="0">
+                <a:solidFill>
+                  <a:srgbClr val="595959"/>
+                </a:solidFill>
+                <a:latin typeface="Calibri"/>
+              </a:rPr>
+              <a:t>Quarter 3: Mission &amp; Rhythm</a:t>
             </a:r>
           </a:p>
         </p:txBody>
@@ -5828,7 +6560,7 @@
           <a:p>
             <a:pPr algn="r"/>
             <a:r>
-              <a:t>155</a:t>
+              <a:t>152</a:t>
             </a:r>
             <a:endParaRPr sz="1000" b="1">
               <a:solidFill>
@@ -5839,6 +6571,42 @@
           </a:p>
         </p:txBody>
       </p:sp>
+      <p:pic>
+        <p:nvPicPr>
+          <p:cNvPr id="91" name="Picture 91" descr="a snowy road between tall pines with dawn light at its end"/>
+          <p:cNvPicPr>
+            <a:picLocks noChangeAspect="1"/>
+          </p:cNvPicPr>
+          <p:nvPr/>
+        </p:nvPicPr>
+        <p:blipFill>
+          <a:blip r:embed="rId3"/>
+          <a:stretch>
+            <a:fillRect/>
+          </a:stretch>
+        </p:blipFill>
+        <p:spPr>
+          <a:xfrm>
+            <a:off x="6309360" y="1630118"/>
+            <a:ext cx="5394960" cy="3597763"/>
+          </a:xfrm>
+          <a:prstGeom prst="rect">
+            <a:avLst/>
+          </a:prstGeom>
+          <a:ln w="76200">
+            <a:solidFill>
+              <a:srgbClr val="FFFFFF"/>
+            </a:solidFill>
+          </a:ln>
+          <a:effectLst>
+            <a:outerShdw blurRad="63500" dist="25400" dir="5400000" rotWithShape="0">
+              <a:srgbClr val="000000">
+                <a:alpha val="35000"/>
+              </a:srgbClr>
+            </a:outerShdw>
+          </a:effectLst>
+        </p:spPr>
+      </p:pic>
     </p:spTree>
   </p:cSld>
   <p:clrMapOvr>
@@ -5847,7 +6615,7 @@
 </p:sld>
 </file>
 
-<file path=ppt/slides/slide156.xml><?xml version="1.0" encoding="utf-8"?>
+<file path=ppt/slides/slide3.xml><?xml version="1.0" encoding="utf-8"?>
 <p:sld xmlns:a="http://schemas.openxmlformats.org/drawingml/2006/main" xmlns:r="http://schemas.openxmlformats.org/officeDocument/2006/relationships" xmlns:p="http://schemas.openxmlformats.org/presentationml/2006/main">
   <p:cSld>
     <p:spTree>
@@ -5884,11 +6652,27 @@
           <a:ln>
             <a:noFill/>
           </a:ln>
-        </p:spPr>
-        <p:txBody>
-          <a:bodyPr/>
-          <a:lstStyle/>
-          <a:p>
+          <a:effectLst/>
+        </p:spPr>
+        <p:style>
+          <a:lnRef idx="1">
+            <a:schemeClr val="accent1"/>
+          </a:lnRef>
+          <a:fillRef idx="3">
+            <a:schemeClr val="accent1"/>
+          </a:fillRef>
+          <a:effectRef idx="2">
+            <a:schemeClr val="accent1"/>
+          </a:effectRef>
+          <a:fontRef idx="minor">
+            <a:schemeClr val="lt1"/>
+          </a:fontRef>
+        </p:style>
+        <p:txBody>
+          <a:bodyPr rtlCol="0" anchor="ctr"/>
+          <a:lstStyle/>
+          <a:p>
+            <a:pPr algn="ctr"/>
             <a:endParaRPr/>
           </a:p>
         </p:txBody>
@@ -5927,21 +6711,21 @@
                 </a:solidFill>
                 <a:latin typeface="Cambria"/>
               </a:rPr>
-              <a:t>“What Held?”</a:t>
-            </a:r>
-          </a:p>
-        </p:txBody>
-      </p:sp>
-      <p:sp>
-        <p:nvSpPr>
-          <p:cNvPr id="4" name="TextBox 4"/>
+              <a:t>Session 12 — Tonight’s Road</a:t>
+            </a:r>
+          </a:p>
+        </p:txBody>
+      </p:sp>
+      <p:sp>
+        <p:nvSpPr>
+          <p:cNvPr id="4" name="TextBox 3"/>
           <p:cNvSpPr txBox="1"/>
           <p:nvPr/>
         </p:nvSpPr>
         <p:spPr>
           <a:xfrm>
-            <a:off x="822960" y="1554480"/>
-            <a:ext cx="6675120" cy="4892040"/>
+            <a:off x="822960" y="1508760"/>
+            <a:ext cx="7040880" cy="4754880"/>
           </a:xfrm>
           <a:prstGeom prst="rect">
             <a:avLst/>
@@ -5949,156 +6733,233 @@
           <a:noFill/>
         </p:spPr>
         <p:txBody>
-          <a:bodyPr wrap="square" lIns="91440" tIns="91440" rIns="91440" bIns="91440"/>
-          <a:lstStyle/>
-          <a:p>
-            <a:pPr marL="274320" indent="-274320">
+          <a:bodyPr wrap="square">
+            <a:spAutoFit/>
+          </a:bodyPr>
+          <a:lstStyle/>
+          <a:p>
+            <a:pPr>
               <a:spcAft>
-                <a:spcPts val="750"/>
+                <a:spcPts val="500"/>
               </a:spcAft>
             </a:pPr>
             <a:r>
-              <a:rPr sz="2000" b="1" i="0">
+              <a:rPr sz="2800" b="1">
                 <a:solidFill>
                   <a:srgbClr val="97BC62"/>
                 </a:solidFill>
                 <a:latin typeface="Calibri"/>
               </a:rPr>
-              <a:t>•  </a:t>
-            </a:r>
-            <a:r>
-              <a:rPr sz="2000" b="0" i="0">
+              <a:t>1   </a:t>
+            </a:r>
+            <a:r>
+              <a:rPr sz="2800">
                 <a:solidFill>
                   <a:srgbClr val="222B22"/>
                 </a:solidFill>
                 <a:latin typeface="Calibri"/>
               </a:rPr>
-              <a:t>A reading, not a report card — which practices held through the break, and which slipped</a:t>
-            </a:r>
-          </a:p>
-          <a:p>
-            <a:pPr marL="274320" indent="-274320">
+              <a:t>Opening container — run slow</a:t>
+            </a:r>
+          </a:p>
+          <a:p>
+            <a:pPr>
               <a:spcAft>
-                <a:spcPts val="750"/>
+                <a:spcPts val="500"/>
               </a:spcAft>
             </a:pPr>
             <a:r>
-              <a:rPr sz="2000" b="1" i="0">
+              <a:rPr sz="2800" b="1">
                 <a:solidFill>
                   <a:srgbClr val="97BC62"/>
                 </a:solidFill>
                 <a:latin typeface="Calibri"/>
               </a:rPr>
-              <a:t>•  </a:t>
-            </a:r>
-            <a:r>
-              <a:rPr sz="2000" b="0" i="0">
+              <a:t>2   </a:t>
+            </a:r>
+            <a:r>
+              <a:rPr sz="2800">
                 <a:solidFill>
                   <a:srgbClr val="222B22"/>
                 </a:solidFill>
                 <a:latin typeface="Calibri"/>
               </a:rPr>
-              <a:t>“Every break is a natural test, and it is a test of the practices, not of you.”</a:t>
-            </a:r>
-          </a:p>
-          <a:p>
-            <a:pPr marL="274320" indent="-274320">
+              <a:t>New every morning — Lam. 3:22–23, Ps. 126</a:t>
+            </a:r>
+          </a:p>
+          <a:p>
+            <a:pPr>
               <a:spcAft>
-                <a:spcPts val="750"/>
+                <a:spcPts val="500"/>
               </a:spcAft>
             </a:pPr>
             <a:r>
-              <a:rPr sz="2000" b="1" i="0">
+              <a:rPr sz="2800" b="1">
                 <a:solidFill>
                   <a:srgbClr val="97BC62"/>
                 </a:solidFill>
                 <a:latin typeface="Calibri"/>
               </a:rPr>
-              <a:t>•  </a:t>
-            </a:r>
-            <a:r>
-              <a:rPr sz="2000" b="0" i="0">
+              <a:t>3   </a:t>
+            </a:r>
+            <a:r>
+              <a:rPr sz="2800">
                 <a:solidFill>
                   <a:srgbClr val="222B22"/>
                 </a:solidFill>
                 <a:latin typeface="Calibri"/>
               </a:rPr>
-              <a:t>One at a time, plain words — a parent starts in each pair</a:t>
-            </a:r>
-          </a:p>
-          <a:p>
-            <a:pPr marL="274320" indent="-274320">
+              <a:t>“What held?”</a:t>
+            </a:r>
+          </a:p>
+          <a:p>
+            <a:pPr>
               <a:spcAft>
-                <a:spcPts val="750"/>
+                <a:spcPts val="500"/>
               </a:spcAft>
             </a:pPr>
             <a:r>
-              <a:rPr sz="2000" b="1" i="0">
+              <a:rPr sz="2800" b="1">
                 <a:solidFill>
                   <a:srgbClr val="97BC62"/>
                 </a:solidFill>
                 <a:latin typeface="Calibri"/>
               </a:rPr>
-              <a:t>•  </a:t>
-            </a:r>
-            <a:r>
-              <a:rPr sz="2000" b="0" i="0">
+              <a:t>4   </a:t>
+            </a:r>
+            <a:r>
+              <a:rPr sz="2800">
                 <a:solidFill>
                   <a:srgbClr val="222B22"/>
                 </a:solidFill>
                 <a:latin typeface="Calibri"/>
               </a:rPr>
-              <a:t>Nobody fixes anybody. Nobody compares. Slips are data — useful information, not a verdict</a:t>
-            </a:r>
-          </a:p>
-          <a:p>
-            <a:pPr marL="274320" indent="-274320">
+              <a:t>The walk home</a:t>
+            </a:r>
+          </a:p>
+          <a:p>
+            <a:pPr>
               <a:spcAft>
-                <a:spcPts val="750"/>
+                <a:spcPts val="500"/>
               </a:spcAft>
             </a:pPr>
             <a:r>
-              <a:rPr sz="2000" b="1" i="0">
+              <a:rPr sz="2800" b="1">
                 <a:solidFill>
                   <a:srgbClr val="97BC62"/>
                 </a:solidFill>
                 <a:latin typeface="Calibri"/>
               </a:rPr>
-              <a:t>•  </a:t>
-            </a:r>
-            <a:r>
-              <a:rPr sz="2000" b="0" i="0">
+              <a:t>5   </a:t>
+            </a:r>
+            <a:r>
+              <a:rPr sz="2800">
                 <a:solidFill>
                   <a:srgbClr val="222B22"/>
                 </a:solidFill>
                 <a:latin typeface="Calibri"/>
               </a:rPr>
-              <a:t>“Most of it slipped” is a complete answer; pass is a complete answer</a:t>
-            </a:r>
-          </a:p>
-          <a:p>
-            <a:pPr marL="685800" indent="-274320">
+              <a:t>Re-anchoring the year — and the door out, once</a:t>
+            </a:r>
+          </a:p>
+          <a:p>
+            <a:pPr>
               <a:spcAft>
-                <a:spcPts val="550"/>
+                <a:spcPts val="500"/>
               </a:spcAft>
             </a:pPr>
             <a:r>
-              <a:rPr sz="1800" b="1" i="0">
+              <a:rPr sz="2800" b="1">
                 <a:solidFill>
                   <a:srgbClr val="97BC62"/>
                 </a:solidFill>
                 <a:latin typeface="Calibri"/>
               </a:rPr>
-              <a:t>–  </a:t>
-            </a:r>
-            <a:r>
-              <a:rPr sz="1800" b="0" i="1">
+              <a:t>6   </a:t>
+            </a:r>
+            <a:r>
+              <a:rPr sz="2800">
                 <a:solidFill>
                   <a:srgbClr val="222B22"/>
                 </a:solidFill>
                 <a:latin typeface="Calibri"/>
               </a:rPr>
-              <a:t>If time allows: “Did anything about the break surprise you?”</a:t>
+              <a:t>Between-session practice — restart one</a:t>
+            </a:r>
+          </a:p>
+          <a:p>
+            <a:pPr>
+              <a:spcAft>
+                <a:spcPts val="500"/>
+              </a:spcAft>
+            </a:pPr>
+            <a:r>
+              <a:rPr sz="2800" b="1">
+                <a:solidFill>
+                  <a:srgbClr val="97BC62"/>
+                </a:solidFill>
+                <a:latin typeface="Calibri"/>
+              </a:rPr>
+              <a:t>7   </a:t>
+            </a:r>
+            <a:r>
+              <a:rPr sz="2800">
+                <a:solidFill>
+                  <a:srgbClr val="222B22"/>
+                </a:solidFill>
+                <a:latin typeface="Calibri"/>
+              </a:rPr>
+              <a:t>Closing container</a:t>
+            </a:r>
+          </a:p>
+          <a:p>
+            <a:pPr>
+              <a:spcAft>
+                <a:spcPts val="500"/>
+              </a:spcAft>
+            </a:pPr>
+            <a:r>
+              <a:rPr sz="2800" b="1">
+                <a:solidFill>
+                  <a:srgbClr val="97BC62"/>
+                </a:solidFill>
+                <a:latin typeface="Calibri"/>
+              </a:rPr>
+              <a:t>8   </a:t>
+            </a:r>
+            <a:r>
+              <a:rPr sz="2800">
+                <a:solidFill>
+                  <a:srgbClr val="222B22"/>
+                </a:solidFill>
+                <a:latin typeface="Calibri"/>
+              </a:rPr>
+              <a:t>Leader Feedback Round</a:t>
+            </a:r>
+          </a:p>
+          <a:p>
+            <a:pPr>
+              <a:spcAft>
+                <a:spcPts val="500"/>
+              </a:spcAft>
+            </a:pPr>
+            <a:r>
+              <a:rPr sz="2800" b="1">
+                <a:solidFill>
+                  <a:srgbClr val="97BC62"/>
+                </a:solidFill>
+                <a:latin typeface="Calibri"/>
+              </a:rPr>
+              <a:t>9   </a:t>
+            </a:r>
+            <a:r>
+              <a:rPr sz="2800">
+                <a:solidFill>
+                  <a:srgbClr val="222B22"/>
+                </a:solidFill>
+                <a:latin typeface="Calibri"/>
+              </a:rPr>
+              <a:t>Aaronic blessing and sending</a:t>
             </a:r>
           </a:p>
         </p:txBody>
@@ -6125,7 +6986,7 @@
           <a:p>
             <a:pPr algn="r"/>
             <a:r>
-              <a:t>156</a:t>
+              <a:t>153</a:t>
             </a:r>
             <a:endParaRPr sz="1000" b="1">
               <a:solidFill>
@@ -6138,7 +6999,7 @@
       </p:sp>
       <p:pic>
         <p:nvPicPr>
-          <p:cNvPr id="32" name="Picture 32" descr="trail cairn - the weekly check-in"/>
+          <p:cNvPr id="31" name="Picture 31" descr="the open container bowl"/>
           <p:cNvPicPr>
             <a:picLocks noChangeAspect="1"/>
           </p:cNvPicPr>
@@ -6152,8 +7013,8 @@
         </p:blipFill>
         <p:spPr>
           <a:xfrm>
-            <a:off x="8103612" y="1463040"/>
-            <a:ext cx="3262379" cy="4892040"/>
+            <a:off x="8001000" y="1554480"/>
+            <a:ext cx="3017520" cy="4526280"/>
           </a:xfrm>
           <a:prstGeom prst="rect">
             <a:avLst/>
@@ -6172,53 +7033,6 @@
           </a:effectLst>
         </p:spPr>
       </p:pic>
-      <p:sp>
-        <p:nvSpPr>
-          <p:cNvPr id="91" name="JoshuaCard"/>
-          <p:cNvSpPr txBox="1"/>
-          <p:nvPr/>
-        </p:nvSpPr>
-        <p:spPr>
-          <a:xfrm>
-            <a:off x="822960" y="5230368"/>
-            <a:ext cx="6675120" cy="1078992"/>
-          </a:xfrm>
-          <a:prstGeom prst="rect">
-            <a:avLst/>
-          </a:prstGeom>
-          <a:solidFill>
-            <a:srgbClr val="F1F6EC"/>
-          </a:solidFill>
-        </p:spPr>
-        <p:txBody>
-          <a:bodyPr wrap="square" lIns="137160" tIns="73152" rIns="137160" bIns="73152" anchor="ctr"/>
-          <a:lstStyle/>
-          <a:p>
-            <a:pPr algn="l"/>
-            <a:r>
-              <a:rPr lang="en-US" sz="2400" i="1">
-                <a:solidFill>
-                  <a:srgbClr val="222B22"/>
-                </a:solidFill>
-                <a:latin typeface="Cambria"/>
-              </a:rPr>
-              <a:t>“When your children ask their fathers in times to come, ‘What do these stones mean?’”</a:t>
-            </a:r>
-          </a:p>
-          <a:p>
-            <a:pPr algn="l"/>
-            <a:r>
-              <a:rPr lang="en-US" sz="1100" b="1">
-                <a:solidFill>
-                  <a:srgbClr val="97BC62"/>
-                </a:solidFill>
-                <a:latin typeface="Calibri"/>
-              </a:rPr>
-              <a:t>— JOSHUA 4:21 (ESV)</a:t>
-            </a:r>
-          </a:p>
-        </p:txBody>
-      </p:sp>
     </p:spTree>
   </p:cSld>
   <p:clrMapOvr>
@@ -6227,7 +7041,7 @@
 </p:sld>
 </file>
 
-<file path=ppt/slides/slide157.xml><?xml version="1.0" encoding="utf-8"?>
+<file path=ppt/slides/slide4.xml><?xml version="1.0" encoding="utf-8"?>
 <p:sld xmlns:a="http://schemas.openxmlformats.org/drawingml/2006/main" xmlns:r="http://schemas.openxmlformats.org/officeDocument/2006/relationships" xmlns:p="http://schemas.openxmlformats.org/presentationml/2006/main">
   <p:cSld>
     <p:spTree>
@@ -6307,7 +7121,7 @@
                 </a:solidFill>
                 <a:latin typeface="Cambria"/>
               </a:rPr>
-              <a:t>The Walk Home</a:t>
+              <a:t>Opening Container — Run Slow</a:t>
             </a:r>
           </a:p>
         </p:txBody>
@@ -6353,7 +7167,7 @@
                 </a:solidFill>
                 <a:latin typeface="Calibri"/>
               </a:rPr>
-              <a:t>The Path Home Card — filed weeks ago, while the room was warm. Tonight it is not taught; it is enacted</a:t>
+              <a:t>Two weeks without Wednesdays — containers don’t keep. They are rebuilt every time, by the same small faithful steps</a:t>
             </a:r>
           </a:p>
           <a:p>
@@ -6378,7 +7192,7 @@
                 </a:solidFill>
                 <a:latin typeface="Calibri"/>
               </a:rPr>
-              <a:t>“Nobody in this room owes anybody an explanation for the break. You already walked back. You are in the chair. That is the whole return.”</a:t>
+              <a:t>“Tonight we open it slowly, on purpose. Don’t rush the steps. There is nowhere else we need to be.”</a:t>
             </a:r>
           </a:p>
           <a:p>
@@ -6403,7 +7217,7 @@
                 </a:solidFill>
                 <a:latin typeface="Calibri"/>
               </a:rPr>
-              <a:t>The way back is unglamorous: do not start over from the beginning; begin again on the next available day. Five dry minutes tomorrow morning is a full return</a:t>
+              <a:t>The full eight steps — phones away, standing circle, put out / bring in, the prayer</a:t>
             </a:r>
           </a:p>
           <a:p>
@@ -6428,32 +7242,7 @@
                 </a:solidFill>
                 <a:latin typeface="Calibri"/>
               </a:rPr>
-              <a:t>Everybody here came back — every chair filled tonight is a small feast</a:t>
-            </a:r>
-          </a:p>
-          <a:p>
-            <a:pPr marL="274320" indent="-274320">
-              <a:spcAft>
-                <a:spcPts val="800"/>
-              </a:spcAft>
-            </a:pPr>
-            <a:r>
-              <a:rPr sz="2000" b="1" i="0">
-                <a:solidFill>
-                  <a:srgbClr val="97BC62"/>
-                </a:solidFill>
-                <a:latin typeface="Calibri"/>
-              </a:rPr>
-              <a:t>•  </a:t>
-            </a:r>
-            <a:r>
-              <a:rPr sz="2000" b="0" i="0">
-                <a:solidFill>
-                  <a:srgbClr val="222B22"/>
-                </a:solidFill>
-                <a:latin typeface="Calibri"/>
-              </a:rPr>
-              <a:t>If the break was hard in ways that have nothing to do with practices — that is a Companion conversation, tonight or this week</a:t>
+              <a:t>One-word check-in: “One word for how you actually are right now — not how you usually are, not how you should be.” Let each word have a breath</a:t>
             </a:r>
           </a:p>
         </p:txBody>
@@ -6492,7 +7281,7 @@
                 </a:solidFill>
                 <a:latin typeface="Calibri"/>
               </a:rPr>
-              <a:t>LUKE 15:20</a:t>
+              <a:t>THE SPOKEN COMMITMENT</a:t>
             </a:r>
           </a:p>
           <a:p>
@@ -6508,7 +7297,7 @@
                 </a:solidFill>
                 <a:latin typeface="Cambria"/>
               </a:rPr>
-              <a:t>“But while he was still a long way off, his father saw him and felt compassion, and ran and embraced him and kissed him.”</a:t>
+              <a:t>“I am here. I am paying attention. I am willing to be moved.”</a:t>
             </a:r>
           </a:p>
         </p:txBody>
@@ -6535,7 +7324,7 @@
           <a:p>
             <a:pPr algn="r"/>
             <a:r>
-              <a:t>157</a:t>
+              <a:t>154</a:t>
             </a:r>
             <a:endParaRPr sz="1000" b="1">
               <a:solidFill>
@@ -6554,7 +7343,7 @@
 </p:sld>
 </file>
 
-<file path=ppt/slides/slide158.xml><?xml version="1.0" encoding="utf-8"?>
+<file path=ppt/slides/slide5.xml><?xml version="1.0" encoding="utf-8"?>
 <p:sld xmlns:a="http://schemas.openxmlformats.org/drawingml/2006/main" xmlns:r="http://schemas.openxmlformats.org/officeDocument/2006/relationships" xmlns:p="http://schemas.openxmlformats.org/presentationml/2006/main">
   <p:cSld>
     <p:spTree>
@@ -6634,7 +7423,7 @@
                 </a:solidFill>
                 <a:latin typeface="Cambria"/>
               </a:rPr>
-              <a:t>Re-Anchoring the Year</a:t>
+              <a:t>New Every Morning — Lam. 3:22–23, Ps. 126</a:t>
             </a:r>
           </a:p>
         </p:txBody>
@@ -6647,8 +7436,8 @@
         </p:nvSpPr>
         <p:spPr>
           <a:xfrm>
-            <a:off x="822960" y="1554480"/>
-            <a:ext cx="10515600" cy="4892040"/>
+            <a:off x="822960" y="1600200"/>
+            <a:ext cx="5669280" cy="4572000"/>
           </a:xfrm>
           <a:prstGeom prst="rect">
             <a:avLst/>
@@ -6661,11 +7450,11 @@
           <a:p>
             <a:pPr marL="274320" indent="-274320">
               <a:spcAft>
-                <a:spcPts val="900"/>
+                <a:spcPts val="800"/>
               </a:spcAft>
             </a:pPr>
             <a:r>
-              <a:rPr sz="2800" b="1" i="0">
+              <a:rPr sz="2000" b="1" i="0">
                 <a:solidFill>
                   <a:srgbClr val="97BC62"/>
                 </a:solidFill>
@@ -6674,88 +7463,143 @@
               <a:t>•  </a:t>
             </a:r>
             <a:r>
-              <a:rPr sz="2800" b="0" i="0">
+              <a:rPr sz="2000" b="0" i="0">
                 <a:solidFill>
                   <a:srgbClr val="222B22"/>
                 </a:solidFill>
                 <a:latin typeface="Calibri"/>
               </a:rPr>
-              <a:t>Behind us: the whole God arc — the container, your story, the soils, being known; then the hearing: PROAPT, the garden, the doubts brought honestly</a:t>
+              <a:t>Written in the ashes of Jerusalem — the mercies-new truth lives in the mornings after the seasons that didn’t hold</a:t>
             </a:r>
           </a:p>
           <a:p>
             <a:pPr marL="274320" indent="-274320">
+              <a:spcAft>
+                <a:spcPts val="800"/>
+              </a:spcAft>
+            </a:pPr>
+            <a:r>
+              <a:rPr sz="2000" b="1" i="0">
+                <a:solidFill>
+                  <a:srgbClr val="97BC62"/>
+                </a:solidFill>
+                <a:latin typeface="Calibri"/>
+              </a:rPr>
+              <a:t>•  </a:t>
+            </a:r>
+            <a:r>
+              <a:rPr sz="2000" b="0" i="0">
+                <a:solidFill>
+                  <a:srgbClr val="222B22"/>
+                </a:solidFill>
+                <a:latin typeface="Calibri"/>
+              </a:rPr>
+              <a:t>Not new every morning that you earned. Issued fresh, this morning, to everyone in this circle — whatever the break looked like</a:t>
+            </a:r>
+          </a:p>
+          <a:p>
+            <a:pPr marL="274320" indent="-274320">
+              <a:spcAft>
+                <a:spcPts val="800"/>
+              </a:spcAft>
+            </a:pPr>
+            <a:r>
+              <a:rPr sz="2000" b="1" i="0">
+                <a:solidFill>
+                  <a:srgbClr val="97BC62"/>
+                </a:solidFill>
+                <a:latin typeface="Calibri"/>
+              </a:rPr>
+              <a:t>•  </a:t>
+            </a:r>
+            <a:r>
+              <a:rPr sz="2000" b="0" i="0">
+                <a:solidFill>
+                  <a:srgbClr val="222B22"/>
+                </a:solidFill>
+                <a:latin typeface="Calibri"/>
+              </a:rPr>
+              <a:t>Psalm 126 — “those who sow in tears shall reap with shouts of joy!” Coming home is not make-up work; it is the happiest walk there is</a:t>
+            </a:r>
+          </a:p>
+          <a:p>
+            <a:pPr marL="274320" indent="-274320">
+              <a:spcAft>
+                <a:spcPts val="800"/>
+              </a:spcAft>
+            </a:pPr>
+            <a:r>
+              <a:rPr sz="2000" b="1" i="0">
+                <a:solidFill>
+                  <a:srgbClr val="97BC62"/>
+                </a:solidFill>
+                <a:latin typeface="Calibri"/>
+              </a:rPr>
+              <a:t>•  </a:t>
+            </a:r>
+            <a:r>
+              <a:rPr sz="2000" b="0" i="0">
+                <a:solidFill>
+                  <a:srgbClr val="222B22"/>
+                </a:solidFill>
+                <a:latin typeface="Calibri"/>
+              </a:rPr>
+              <a:t>Tonight we read the break honestly — and we can afford to, because the mercy was already new before we walked in</a:t>
+            </a:r>
+          </a:p>
+        </p:txBody>
+      </p:sp>
+      <p:sp>
+        <p:nvSpPr>
+          <p:cNvPr id="6" name="TextBox 6"/>
+          <p:cNvSpPr txBox="1"/>
+          <p:nvPr/>
+        </p:nvSpPr>
+        <p:spPr>
+          <a:xfrm>
+            <a:off x="6766560" y="1737360"/>
+            <a:ext cx="4663440" cy="2194560"/>
+          </a:xfrm>
+          <a:prstGeom prst="rect">
+            <a:avLst/>
+          </a:prstGeom>
+          <a:solidFill>
+            <a:srgbClr val="F1F6EC"/>
+          </a:solidFill>
+        </p:spPr>
+        <p:txBody>
+          <a:bodyPr wrap="square" lIns="91440" tIns="91440" rIns="91440" bIns="91440" anchor="ctr"/>
+          <a:lstStyle/>
+          <a:p>
+            <a:pPr>
               <a:spcAft>
                 <a:spcPts val="900"/>
               </a:spcAft>
             </a:pPr>
             <a:r>
-              <a:rPr sz="2800" b="1" i="0">
+              <a:rPr sz="1200" b="1" i="0">
                 <a:solidFill>
                   <a:srgbClr val="97BC62"/>
                 </a:solidFill>
                 <a:latin typeface="Calibri"/>
               </a:rPr>
-              <a:t>•  </a:t>
-            </a:r>
-            <a:r>
-              <a:rPr sz="2800" b="0" i="0">
-                <a:solidFill>
-                  <a:srgbClr val="222B22"/>
-                </a:solidFill>
-                <a:latin typeface="Calibri"/>
-              </a:rPr>
-              <a:t>“That work is in you now. The break did not take it away.”</a:t>
-            </a:r>
-          </a:p>
-          <a:p>
-            <a:pPr marL="274320" indent="-274320">
+              <a:t>LAMENTATIONS 3:22–23</a:t>
+            </a:r>
+          </a:p>
+          <a:p>
+            <a:pPr>
               <a:spcAft>
-                <a:spcPts val="900"/>
+                <a:spcPts val="600"/>
               </a:spcAft>
             </a:pPr>
             <a:r>
-              <a:rPr sz="2800" b="1" i="0">
-                <a:solidFill>
-                  <a:srgbClr val="97BC62"/>
-                </a:solidFill>
-                <a:latin typeface="Calibri"/>
-              </a:rPr>
-              <a:t>•  </a:t>
-            </a:r>
-            <a:r>
-              <a:rPr sz="2800" b="0" i="0">
+              <a:rPr sz="2400" b="0" i="1">
                 <a:solidFill>
                   <a:srgbClr val="222B22"/>
                 </a:solidFill>
-                <a:latin typeface="Calibri"/>
-              </a:rPr>
-              <a:t>Ahead: Week 13 — Mission, the turn outward; then the Rhythm — one card you build with your own hand; then the sendings and the commissionings</a:t>
-            </a:r>
-          </a:p>
-          <a:p>
-            <a:pPr marL="274320" indent="-274320">
-              <a:spcAft>
-                <a:spcPts val="900"/>
-              </a:spcAft>
-            </a:pPr>
-            <a:r>
-              <a:rPr sz="2800" b="1" i="0">
-                <a:solidFill>
-                  <a:srgbClr val="97BC62"/>
-                </a:solidFill>
-                <a:latin typeface="Calibri"/>
-              </a:rPr>
-              <a:t>•  </a:t>
-            </a:r>
-            <a:r>
-              <a:rPr sz="2800" b="0" i="0">
-                <a:solidFill>
-                  <a:srgbClr val="222B22"/>
-                </a:solidFill>
-                <a:latin typeface="Calibri"/>
-              </a:rPr>
-              <a:t>“We are not starting over tonight. We are picking the trail back up, together, further along than we have ever been.”</a:t>
+                <a:latin typeface="Cambria"/>
+              </a:rPr>
+              <a:t>“The steadfast love of the LORD never ceases; his mercies never come to an end; they are new every morning; great is your faithfulness.”</a:t>
             </a:r>
           </a:p>
         </p:txBody>
@@ -6782,7 +7626,7 @@
           <a:p>
             <a:pPr algn="r"/>
             <a:r>
-              <a:t>158</a:t>
+              <a:t>155</a:t>
             </a:r>
             <a:endParaRPr sz="1000" b="1">
               <a:solidFill>
@@ -6801,7 +7645,7 @@
 </p:sld>
 </file>
 
-<file path=ppt/slides/slide159.xml><?xml version="1.0" encoding="utf-8"?>
+<file path=ppt/slides/slide6.xml><?xml version="1.0" encoding="utf-8"?>
 <p:sld xmlns:a="http://schemas.openxmlformats.org/drawingml/2006/main" xmlns:r="http://schemas.openxmlformats.org/officeDocument/2006/relationships" xmlns:p="http://schemas.openxmlformats.org/presentationml/2006/main">
   <p:cSld>
     <p:spTree>
@@ -6881,7 +7725,7 @@
                 </a:solidFill>
                 <a:latin typeface="Cambria"/>
               </a:rPr>
-              <a:t>One More Thing, While We Are Getting Our Bearings</a:t>
+              <a:t>“What Held?”</a:t>
             </a:r>
           </a:p>
         </p:txBody>
@@ -6895,7 +7739,7 @@
         <p:spPr>
           <a:xfrm>
             <a:off x="822960" y="1554480"/>
-            <a:ext cx="6675120" cy="4754880"/>
+            <a:ext cx="6675120" cy="4892040"/>
           </a:xfrm>
           <a:prstGeom prst="rect">
             <a:avLst/>
@@ -6908,49 +7752,151 @@
           <a:p>
             <a:pPr marL="274320" indent="-274320">
               <a:spcAft>
-                <a:spcPts val="900"/>
+                <a:spcPts val="750"/>
               </a:spcAft>
             </a:pPr>
             <a:r>
-              <a:rPr sz="2800" b="1" i="0">
+              <a:rPr sz="2000" b="1" i="0">
                 <a:solidFill>
                   <a:srgbClr val="97BC62"/>
                 </a:solidFill>
                 <a:latin typeface="Calibri"/>
               </a:rPr>
-              <a:t>•  Pastor Bobby Gore  ·  (831) 277-9878  —  still there, and still not part of our team</a:t>
+              <a:t>•  </a:t>
+            </a:r>
+            <a:r>
+              <a:rPr sz="2000" b="0" i="0">
+                <a:solidFill>
+                  <a:srgbClr val="222B22"/>
+                </a:solidFill>
+                <a:latin typeface="Calibri"/>
+              </a:rPr>
+              <a:t>A reading, not a report card — which practices held through the break, and which slipped</a:t>
             </a:r>
           </a:p>
           <a:p>
             <a:pPr marL="274320" indent="-274320">
               <a:spcAft>
-                <a:spcPts val="900"/>
+                <a:spcPts val="750"/>
               </a:spcAft>
             </a:pPr>
             <a:r>
-              <a:rPr sz="2800" b="1" i="0">
+              <a:rPr sz="2000" b="1" i="0">
                 <a:solidFill>
                   <a:srgbClr val="97BC62"/>
                 </a:solidFill>
                 <a:latin typeface="Calibri"/>
               </a:rPr>
-              <a:t>•  His number is on the safety page at the front of your journal</a:t>
+              <a:t>•  </a:t>
+            </a:r>
+            <a:r>
+              <a:rPr sz="2000" b="0" i="0">
+                <a:solidFill>
+                  <a:srgbClr val="222B22"/>
+                </a:solidFill>
+                <a:latin typeface="Calibri"/>
+              </a:rPr>
+              <a:t>“Every break is a natural test, and it is a test of the practices, not of you.”</a:t>
             </a:r>
           </a:p>
           <a:p>
             <a:pPr marL="274320" indent="-274320">
               <a:spcAft>
-                <a:spcPts val="900"/>
+                <a:spcPts val="750"/>
               </a:spcAft>
             </a:pPr>
             <a:r>
-              <a:rPr sz="2800" b="1" i="0">
+              <a:rPr sz="2000" b="1" i="0">
                 <a:solidFill>
                   <a:srgbClr val="97BC62"/>
                 </a:solidFill>
                 <a:latin typeface="Calibri"/>
               </a:rPr>
-              <a:t>•  Same as we said in September</a:t>
+              <a:t>•  </a:t>
+            </a:r>
+            <a:r>
+              <a:rPr sz="2000" b="0" i="0">
+                <a:solidFill>
+                  <a:srgbClr val="222B22"/>
+                </a:solidFill>
+                <a:latin typeface="Calibri"/>
+              </a:rPr>
+              <a:t>One at a time, plain words — a parent starts in each pair</a:t>
+            </a:r>
+          </a:p>
+          <a:p>
+            <a:pPr marL="274320" indent="-274320">
+              <a:spcAft>
+                <a:spcPts val="750"/>
+              </a:spcAft>
+            </a:pPr>
+            <a:r>
+              <a:rPr sz="2000" b="1" i="0">
+                <a:solidFill>
+                  <a:srgbClr val="97BC62"/>
+                </a:solidFill>
+                <a:latin typeface="Calibri"/>
+              </a:rPr>
+              <a:t>•  </a:t>
+            </a:r>
+            <a:r>
+              <a:rPr sz="2000" b="0" i="0">
+                <a:solidFill>
+                  <a:srgbClr val="222B22"/>
+                </a:solidFill>
+                <a:latin typeface="Calibri"/>
+              </a:rPr>
+              <a:t>Nobody fixes anybody. Nobody compares. Slips are data — useful information, not a verdict</a:t>
+            </a:r>
+          </a:p>
+          <a:p>
+            <a:pPr marL="274320" indent="-274320">
+              <a:spcAft>
+                <a:spcPts val="750"/>
+              </a:spcAft>
+            </a:pPr>
+            <a:r>
+              <a:rPr sz="2000" b="1" i="0">
+                <a:solidFill>
+                  <a:srgbClr val="97BC62"/>
+                </a:solidFill>
+                <a:latin typeface="Calibri"/>
+              </a:rPr>
+              <a:t>•  </a:t>
+            </a:r>
+            <a:r>
+              <a:rPr sz="2000" b="0" i="0">
+                <a:solidFill>
+                  <a:srgbClr val="222B22"/>
+                </a:solidFill>
+                <a:latin typeface="Calibri"/>
+              </a:rPr>
+              <a:t>“Most of it slipped” is a complete answer; pass is a complete answer</a:t>
+            </a:r>
+          </a:p>
+          <a:p>
+            <a:pPr marL="685800" indent="-274320">
+              <a:spcAft>
+                <a:spcPts val="550"/>
+              </a:spcAft>
+            </a:pPr>
+            <a:r>
+              <a:rPr sz="1800" b="1" i="0">
+                <a:solidFill>
+                  <a:srgbClr val="97BC62"/>
+                </a:solidFill>
+                <a:latin typeface="Calibri"/>
+              </a:rPr>
+              <a:t>–  </a:t>
+            </a:r>
+            <a:r>
+              <a:rPr sz="1800" b="0" i="1">
+                <a:solidFill>
+                  <a:srgbClr val="222B22"/>
+                </a:solidFill>
+                <a:latin typeface="Calibri"/>
+              </a:rPr>
+              <a:t>If time allows: “Did anything about the break surprise you?”</a:t>
             </a:r>
           </a:p>
         </p:txBody>
@@ -6977,7 +7923,7 @@
           <a:p>
             <a:pPr algn="r"/>
             <a:r>
-              <a:t>159</a:t>
+              <a:t>156</a:t>
             </a:r>
             <a:endParaRPr sz="1000" b="1">
               <a:solidFill>
@@ -6985,6 +7931,89 @@
               </a:solidFill>
               <a:latin typeface="Calibri"/>
             </a:endParaRPr>
+          </a:p>
+        </p:txBody>
+      </p:sp>
+      <p:pic>
+        <p:nvPicPr>
+          <p:cNvPr id="32" name="Picture 32" descr="trail cairn - the weekly check-in"/>
+          <p:cNvPicPr>
+            <a:picLocks noChangeAspect="1"/>
+          </p:cNvPicPr>
+          <p:nvPr/>
+        </p:nvPicPr>
+        <p:blipFill>
+          <a:blip r:embed="rId3"/>
+          <a:stretch>
+            <a:fillRect/>
+          </a:stretch>
+        </p:blipFill>
+        <p:spPr>
+          <a:xfrm>
+            <a:off x="8103612" y="1463040"/>
+            <a:ext cx="3262379" cy="4892040"/>
+          </a:xfrm>
+          <a:prstGeom prst="rect">
+            <a:avLst/>
+          </a:prstGeom>
+          <a:ln w="76200">
+            <a:solidFill>
+              <a:srgbClr val="FFFFFF"/>
+            </a:solidFill>
+          </a:ln>
+          <a:effectLst>
+            <a:outerShdw blurRad="63500" dist="25400" dir="5400000" rotWithShape="0">
+              <a:srgbClr val="000000">
+                <a:alpha val="35000"/>
+              </a:srgbClr>
+            </a:outerShdw>
+          </a:effectLst>
+        </p:spPr>
+      </p:pic>
+      <p:sp>
+        <p:nvSpPr>
+          <p:cNvPr id="91" name="JoshuaCard"/>
+          <p:cNvSpPr txBox="1"/>
+          <p:nvPr/>
+        </p:nvSpPr>
+        <p:spPr>
+          <a:xfrm>
+            <a:off x="822960" y="5230368"/>
+            <a:ext cx="6675120" cy="1078992"/>
+          </a:xfrm>
+          <a:prstGeom prst="rect">
+            <a:avLst/>
+          </a:prstGeom>
+          <a:solidFill>
+            <a:srgbClr val="F1F6EC"/>
+          </a:solidFill>
+        </p:spPr>
+        <p:txBody>
+          <a:bodyPr wrap="square" lIns="137160" tIns="73152" rIns="137160" bIns="73152" anchor="ctr"/>
+          <a:lstStyle/>
+          <a:p>
+            <a:pPr algn="l"/>
+            <a:r>
+              <a:rPr lang="en-US" sz="2400" i="1">
+                <a:solidFill>
+                  <a:srgbClr val="222B22"/>
+                </a:solidFill>
+                <a:latin typeface="Cambria"/>
+              </a:rPr>
+              <a:t>“When your children ask their fathers in times to come, ‘What do these stones mean?’”</a:t>
+            </a:r>
+          </a:p>
+          <a:p>
+            <a:pPr algn="l"/>
+            <a:r>
+              <a:rPr lang="en-US" sz="1100" b="1">
+                <a:solidFill>
+                  <a:srgbClr val="97BC62"/>
+                </a:solidFill>
+                <a:latin typeface="Calibri"/>
+              </a:rPr>
+              <a:t>— JOSHUA 4:21 (ESV)</a:t>
+            </a:r>
           </a:p>
         </p:txBody>
       </p:sp>
@@ -6996,7 +8025,7 @@
 </p:sld>
 </file>
 
-<file path=ppt/slides/slide160.xml><?xml version="1.0" encoding="utf-8"?>
+<file path=ppt/slides/slide7.xml><?xml version="1.0" encoding="utf-8"?>
 <p:sld xmlns:a="http://schemas.openxmlformats.org/drawingml/2006/main" xmlns:r="http://schemas.openxmlformats.org/officeDocument/2006/relationships" xmlns:p="http://schemas.openxmlformats.org/presentationml/2006/main">
   <p:cSld>
     <p:spTree>
@@ -7076,7 +8105,7 @@
                 </a:solidFill>
                 <a:latin typeface="Cambria"/>
               </a:rPr>
-              <a:t>Homework — Two Weeks, Four Parts — Restart One</a:t>
+              <a:t>The Walk Home</a:t>
             </a:r>
           </a:p>
         </p:txBody>
@@ -7089,8 +8118,8 @@
         </p:nvSpPr>
         <p:spPr>
           <a:xfrm>
-            <a:off x="822960" y="1554480"/>
-            <a:ext cx="6675120" cy="4892040"/>
+            <a:off x="822960" y="1600200"/>
+            <a:ext cx="5669280" cy="4572000"/>
           </a:xfrm>
           <a:prstGeom prst="rect">
             <a:avLst/>
@@ -7103,11 +8132,11 @@
           <a:p>
             <a:pPr marL="274320" indent="-274320">
               <a:spcAft>
-                <a:spcPts val="900"/>
+                <a:spcPts val="800"/>
               </a:spcAft>
             </a:pPr>
             <a:r>
-              <a:rPr sz="2200" b="1" i="0">
+              <a:rPr sz="2000" b="1" i="0">
                 <a:solidFill>
                   <a:srgbClr val="97BC62"/>
                 </a:solidFill>
@@ -7116,113 +8145,168 @@
               <a:t>•  </a:t>
             </a:r>
             <a:r>
-              <a:rPr sz="2200" b="0" i="0">
+              <a:rPr sz="2000" b="0" i="0">
                 <a:solidFill>
                   <a:srgbClr val="222B22"/>
                 </a:solidFill>
                 <a:latin typeface="Calibri"/>
               </a:rPr>
-              <a:t>Not everything. One daily practice — the morning question, the evening note, or PROAPT. Just one</a:t>
+              <a:t>The Path Home Card — filed weeks ago, while the room was warm. Tonight it is not taught; it is enacted</a:t>
             </a:r>
           </a:p>
           <a:p>
             <a:pPr marL="274320" indent="-274320">
+              <a:spcAft>
+                <a:spcPts val="800"/>
+              </a:spcAft>
+            </a:pPr>
+            <a:r>
+              <a:rPr sz="2000" b="1" i="0">
+                <a:solidFill>
+                  <a:srgbClr val="97BC62"/>
+                </a:solidFill>
+                <a:latin typeface="Calibri"/>
+              </a:rPr>
+              <a:t>•  </a:t>
+            </a:r>
+            <a:r>
+              <a:rPr sz="2000" b="0" i="0">
+                <a:solidFill>
+                  <a:srgbClr val="222B22"/>
+                </a:solidFill>
+                <a:latin typeface="Calibri"/>
+              </a:rPr>
+              <a:t>“Nobody in this room owes anybody an explanation for the break. You already walked back. You are in the chair. That is the whole return.”</a:t>
+            </a:r>
+          </a:p>
+          <a:p>
+            <a:pPr marL="274320" indent="-274320">
+              <a:spcAft>
+                <a:spcPts val="800"/>
+              </a:spcAft>
+            </a:pPr>
+            <a:r>
+              <a:rPr sz="2000" b="1" i="0">
+                <a:solidFill>
+                  <a:srgbClr val="97BC62"/>
+                </a:solidFill>
+                <a:latin typeface="Calibri"/>
+              </a:rPr>
+              <a:t>•  </a:t>
+            </a:r>
+            <a:r>
+              <a:rPr sz="2000" b="0" i="0">
+                <a:solidFill>
+                  <a:srgbClr val="222B22"/>
+                </a:solidFill>
+                <a:latin typeface="Calibri"/>
+              </a:rPr>
+              <a:t>The way back is unglamorous: do not start over from the beginning; begin again on the next available day. Five dry minutes tomorrow morning is a full return</a:t>
+            </a:r>
+          </a:p>
+          <a:p>
+            <a:pPr marL="274320" indent="-274320">
+              <a:spcAft>
+                <a:spcPts val="800"/>
+              </a:spcAft>
+            </a:pPr>
+            <a:r>
+              <a:rPr sz="2000" b="1" i="0">
+                <a:solidFill>
+                  <a:srgbClr val="97BC62"/>
+                </a:solidFill>
+                <a:latin typeface="Calibri"/>
+              </a:rPr>
+              <a:t>•  </a:t>
+            </a:r>
+            <a:r>
+              <a:rPr sz="2000" b="0" i="0">
+                <a:solidFill>
+                  <a:srgbClr val="222B22"/>
+                </a:solidFill>
+                <a:latin typeface="Calibri"/>
+              </a:rPr>
+              <a:t>Everybody here came back — every chair filled tonight is a small feast</a:t>
+            </a:r>
+          </a:p>
+          <a:p>
+            <a:pPr marL="274320" indent="-274320">
+              <a:spcAft>
+                <a:spcPts val="800"/>
+              </a:spcAft>
+            </a:pPr>
+            <a:r>
+              <a:rPr sz="2000" b="1" i="0">
+                <a:solidFill>
+                  <a:srgbClr val="97BC62"/>
+                </a:solidFill>
+                <a:latin typeface="Calibri"/>
+              </a:rPr>
+              <a:t>•  </a:t>
+            </a:r>
+            <a:r>
+              <a:rPr sz="2000" b="0" i="0">
+                <a:solidFill>
+                  <a:srgbClr val="222B22"/>
+                </a:solidFill>
+                <a:latin typeface="Calibri"/>
+              </a:rPr>
+              <a:t>If the break was hard in ways that have nothing to do with practices — that is a Companion conversation, tonight or this week</a:t>
+            </a:r>
+          </a:p>
+        </p:txBody>
+      </p:sp>
+      <p:sp>
+        <p:nvSpPr>
+          <p:cNvPr id="6" name="TextBox 6"/>
+          <p:cNvSpPr txBox="1"/>
+          <p:nvPr/>
+        </p:nvSpPr>
+        <p:spPr>
+          <a:xfrm>
+            <a:off x="6766560" y="1737360"/>
+            <a:ext cx="4663440" cy="2194560"/>
+          </a:xfrm>
+          <a:prstGeom prst="rect">
+            <a:avLst/>
+          </a:prstGeom>
+          <a:solidFill>
+            <a:srgbClr val="F1F6EC"/>
+          </a:solidFill>
+        </p:spPr>
+        <p:txBody>
+          <a:bodyPr wrap="square" lIns="91440" tIns="91440" rIns="91440" bIns="91440" anchor="ctr"/>
+          <a:lstStyle/>
+          <a:p>
+            <a:pPr>
               <a:spcAft>
                 <a:spcPts val="900"/>
               </a:spcAft>
             </a:pPr>
             <a:r>
-              <a:rPr sz="2200" b="1" i="0">
+              <a:rPr sz="1800" b="1" i="0">
                 <a:solidFill>
                   <a:srgbClr val="97BC62"/>
                 </a:solidFill>
                 <a:latin typeface="Calibri"/>
               </a:rPr>
-              <a:t>•  </a:t>
-            </a:r>
-            <a:r>
-              <a:rPr sz="2200" b="0" i="0">
-                <a:solidFill>
-                  <a:srgbClr val="222B22"/>
-                </a:solidFill>
-                <a:latin typeface="Calibri"/>
-              </a:rPr>
-              <a:t>Write it at the top of a fresh journal page tonight, with when and where: “The morning question, 6:50, kitchen table”</a:t>
-            </a:r>
-          </a:p>
-          <a:p>
-            <a:pPr marL="274320" indent="-274320">
+              <a:t>LUKE 15:20</a:t>
+            </a:r>
+          </a:p>
+          <a:p>
+            <a:pPr>
               <a:spcAft>
-                <a:spcPts val="900"/>
+                <a:spcPts val="600"/>
               </a:spcAft>
             </a:pPr>
             <a:r>
-              <a:rPr sz="2200" b="1" i="0">
-                <a:solidFill>
-                  <a:srgbClr val="97BC62"/>
-                </a:solidFill>
-                <a:latin typeface="Calibri"/>
-              </a:rPr>
-              <a:t>•  </a:t>
-            </a:r>
-            <a:r>
-              <a:rPr sz="2200" b="0" i="0">
+              <a:rPr sz="2400" b="0" i="1">
                 <a:solidFill>
                   <a:srgbClr val="222B22"/>
                 </a:solidFill>
-                <a:latin typeface="Calibri"/>
-              </a:rPr>
-              <a:t>That one practice, daily, this week</a:t>
-            </a:r>
-          </a:p>
-          <a:p>
-            <a:pPr marL="274320" indent="-274320">
-              <a:spcAft>
-                <a:spcPts val="900"/>
-              </a:spcAft>
-            </a:pPr>
-            <a:r>
-              <a:rPr sz="2200" b="1" i="0">
-                <a:solidFill>
-                  <a:srgbClr val="97BC62"/>
-                </a:solidFill>
-                <a:latin typeface="Calibri"/>
-              </a:rPr>
-              <a:t>•  </a:t>
-            </a:r>
-            <a:r>
-              <a:rPr sz="2200" b="0" i="0">
-                <a:solidFill>
-                  <a:srgbClr val="222B22"/>
-                </a:solidFill>
-                <a:latin typeface="Calibri"/>
-              </a:rPr>
-              <a:t>Miss a day? Do not start over — begin again on the next available day</a:t>
-            </a:r>
-          </a:p>
-          <a:p>
-            <a:pPr marL="274320" indent="-274320">
-              <a:spcAft>
-                <a:spcPts val="900"/>
-              </a:spcAft>
-            </a:pPr>
-            <a:r>
-              <a:rPr sz="2200" b="1" i="0">
-                <a:solidFill>
-                  <a:srgbClr val="97BC62"/>
-                </a:solidFill>
-                <a:latin typeface="Calibri"/>
-              </a:rPr>
-              <a:t>•  </a:t>
-            </a:r>
-            <a:r>
-              <a:rPr sz="2200" b="0" i="0">
-                <a:solidFill>
-                  <a:srgbClr val="222B22"/>
-                </a:solidFill>
-                <a:latin typeface="Calibri"/>
-              </a:rPr>
-              <a:t>“One seed goes back in the ground. His mercies are new every morning; you only need one practice to be standing there when they arrive.”</a:t>
+                <a:latin typeface="Cambria"/>
+              </a:rPr>
+              <a:t>“But while he was still a long way off, his father saw him and felt compassion, and ran and embraced him and kissed him.”</a:t>
             </a:r>
           </a:p>
         </p:txBody>
@@ -7249,7 +8333,7 @@
           <a:p>
             <a:pPr algn="r"/>
             <a:r>
-              <a:t>160</a:t>
+              <a:t>157</a:t>
             </a:r>
             <a:endParaRPr sz="1000" b="1">
               <a:solidFill>
@@ -7260,42 +8344,6 @@
           </a:p>
         </p:txBody>
       </p:sp>
-      <p:pic>
-        <p:nvPicPr>
-          <p:cNvPr id="33" name="Picture 33" descr="seedling - what grows between Wednesdays"/>
-          <p:cNvPicPr>
-            <a:picLocks noChangeAspect="1"/>
-          </p:cNvPicPr>
-          <p:nvPr/>
-        </p:nvPicPr>
-        <p:blipFill>
-          <a:blip r:embed="rId3"/>
-          <a:stretch>
-            <a:fillRect/>
-          </a:stretch>
-        </p:blipFill>
-        <p:spPr>
-          <a:xfrm>
-            <a:off x="8103612" y="1463040"/>
-            <a:ext cx="3262379" cy="4892040"/>
-          </a:xfrm>
-          <a:prstGeom prst="rect">
-            <a:avLst/>
-          </a:prstGeom>
-          <a:ln w="76200">
-            <a:solidFill>
-              <a:srgbClr val="FFFFFF"/>
-            </a:solidFill>
-          </a:ln>
-          <a:effectLst>
-            <a:outerShdw blurRad="63500" dist="25400" dir="5400000" rotWithShape="0">
-              <a:srgbClr val="000000">
-                <a:alpha val="35000"/>
-              </a:srgbClr>
-            </a:outerShdw>
-          </a:effectLst>
-        </p:spPr>
-      </p:pic>
     </p:spTree>
   </p:cSld>
   <p:clrMapOvr>
@@ -7304,7 +8352,7 @@
 </p:sld>
 </file>
 
-<file path=ppt/slides/slide161.xml><?xml version="1.0" encoding="utf-8"?>
+<file path=ppt/slides/slide8.xml><?xml version="1.0" encoding="utf-8"?>
 <p:sld xmlns:a="http://schemas.openxmlformats.org/drawingml/2006/main" xmlns:r="http://schemas.openxmlformats.org/officeDocument/2006/relationships" xmlns:p="http://schemas.openxmlformats.org/presentationml/2006/main">
   <p:cSld>
     <p:spTree>
@@ -7384,21 +8432,21 @@
                 </a:solidFill>
                 <a:latin typeface="Cambria"/>
               </a:rPr>
-              <a:t>Your Take-Home Card — This Session’s Practice</a:t>
-            </a:r>
-          </a:p>
-        </p:txBody>
-      </p:sp>
-      <p:sp>
-        <p:nvSpPr>
-          <p:cNvPr id="90" name="SlideNum"/>
+              <a:t>Re-Anchoring the Year</a:t>
+            </a:r>
+          </a:p>
+        </p:txBody>
+      </p:sp>
+      <p:sp>
+        <p:nvSpPr>
+          <p:cNvPr id="4" name="TextBox 4"/>
           <p:cNvSpPr txBox="1"/>
           <p:nvPr/>
         </p:nvSpPr>
         <p:spPr>
           <a:xfrm>
-            <a:off x="11384280" y="6446520"/>
-            <a:ext cx="640080" cy="292608"/>
+            <a:off x="822960" y="1554480"/>
+            <a:ext cx="10515600" cy="4892040"/>
           </a:xfrm>
           <a:prstGeom prst="rect">
             <a:avLst/>
@@ -7406,12 +8454,133 @@
           <a:noFill/>
         </p:spPr>
         <p:txBody>
+          <a:bodyPr wrap="square" lIns="91440" tIns="91440" rIns="91440" bIns="91440"/>
+          <a:lstStyle/>
+          <a:p>
+            <a:pPr marL="274320" indent="-274320">
+              <a:spcAft>
+                <a:spcPts val="900"/>
+              </a:spcAft>
+            </a:pPr>
+            <a:r>
+              <a:rPr sz="2800" b="1" i="0">
+                <a:solidFill>
+                  <a:srgbClr val="97BC62"/>
+                </a:solidFill>
+                <a:latin typeface="Calibri"/>
+              </a:rPr>
+              <a:t>•  </a:t>
+            </a:r>
+            <a:r>
+              <a:rPr sz="2800" b="0" i="0">
+                <a:solidFill>
+                  <a:srgbClr val="222B22"/>
+                </a:solidFill>
+                <a:latin typeface="Calibri"/>
+              </a:rPr>
+              <a:t>Behind us: the whole God arc — the container, your story, the soils, being known; then the hearing: PROAPT, the garden, the doubts brought honestly</a:t>
+            </a:r>
+          </a:p>
+          <a:p>
+            <a:pPr marL="274320" indent="-274320">
+              <a:spcAft>
+                <a:spcPts val="900"/>
+              </a:spcAft>
+            </a:pPr>
+            <a:r>
+              <a:rPr sz="2800" b="1" i="0">
+                <a:solidFill>
+                  <a:srgbClr val="97BC62"/>
+                </a:solidFill>
+                <a:latin typeface="Calibri"/>
+              </a:rPr>
+              <a:t>•  </a:t>
+            </a:r>
+            <a:r>
+              <a:rPr sz="2800" b="0" i="0">
+                <a:solidFill>
+                  <a:srgbClr val="222B22"/>
+                </a:solidFill>
+                <a:latin typeface="Calibri"/>
+              </a:rPr>
+              <a:t>“That work is in you now. The break did not take it away.”</a:t>
+            </a:r>
+          </a:p>
+          <a:p>
+            <a:pPr marL="274320" indent="-274320">
+              <a:spcAft>
+                <a:spcPts val="900"/>
+              </a:spcAft>
+            </a:pPr>
+            <a:r>
+              <a:rPr sz="2800" b="1" i="0">
+                <a:solidFill>
+                  <a:srgbClr val="97BC62"/>
+                </a:solidFill>
+                <a:latin typeface="Calibri"/>
+              </a:rPr>
+              <a:t>•  </a:t>
+            </a:r>
+            <a:r>
+              <a:rPr sz="2800" b="0" i="0">
+                <a:solidFill>
+                  <a:srgbClr val="222B22"/>
+                </a:solidFill>
+                <a:latin typeface="Calibri"/>
+              </a:rPr>
+              <a:t>Ahead: Week 13 — Mission, the turn outward; then the Rhythm — one card you build with your own hand; then the sendings and the commissionings</a:t>
+            </a:r>
+          </a:p>
+          <a:p>
+            <a:pPr marL="274320" indent="-274320">
+              <a:spcAft>
+                <a:spcPts val="900"/>
+              </a:spcAft>
+            </a:pPr>
+            <a:r>
+              <a:rPr sz="2800" b="1" i="0">
+                <a:solidFill>
+                  <a:srgbClr val="97BC62"/>
+                </a:solidFill>
+                <a:latin typeface="Calibri"/>
+              </a:rPr>
+              <a:t>•  </a:t>
+            </a:r>
+            <a:r>
+              <a:rPr sz="2800" b="0" i="0">
+                <a:solidFill>
+                  <a:srgbClr val="222B22"/>
+                </a:solidFill>
+                <a:latin typeface="Calibri"/>
+              </a:rPr>
+              <a:t>“We are not starting over tonight. We are picking the trail back up, together, further along than we have ever been.”</a:t>
+            </a:r>
+          </a:p>
+        </p:txBody>
+      </p:sp>
+      <p:sp>
+        <p:nvSpPr>
+          <p:cNvPr id="90" name="SlideNum"/>
+          <p:cNvSpPr txBox="1"/>
+          <p:nvPr/>
+        </p:nvSpPr>
+        <p:spPr>
+          <a:xfrm>
+            <a:off x="11384280" y="6446520"/>
+            <a:ext cx="640080" cy="292608"/>
+          </a:xfrm>
+          <a:prstGeom prst="rect">
+            <a:avLst/>
+          </a:prstGeom>
+          <a:noFill/>
+        </p:spPr>
+        <p:txBody>
           <a:bodyPr wrap="none" lIns="0" tIns="0" rIns="45720" bIns="0" anchor="ctr"/>
           <a:lstStyle/>
           <a:p>
             <a:pPr algn="r"/>
             <a:r>
-              <a:t>161</a:t>
+              <a:t>158</a:t>
             </a:r>
             <a:endParaRPr sz="1000" b="1">
               <a:solidFill>
@@ -7419,75 +8588,6 @@
               </a:solidFill>
               <a:latin typeface="Calibri"/>
             </a:endParaRPr>
-          </a:p>
-        </p:txBody>
-      </p:sp>
-      <p:pic>
-        <p:nvPicPr>
-          <p:cNvPr id="270" name="CardImage" descr="the Week 12 check-off card, as handed out"/>
-          <p:cNvPicPr>
-            <a:picLocks noChangeAspect="1"/>
-          </p:cNvPicPr>
-          <p:nvPr/>
-        </p:nvPicPr>
-        <p:blipFill>
-          <a:blip r:embed="rId3"/>
-          <a:stretch>
-            <a:fillRect/>
-          </a:stretch>
-        </p:blipFill>
-        <p:spPr>
-          <a:xfrm>
-            <a:off x="1158087" y="1554480"/>
-            <a:ext cx="9875520" cy="3235532"/>
-          </a:xfrm>
-          <a:prstGeom prst="rect">
-            <a:avLst/>
-          </a:prstGeom>
-          <a:ln w="76200">
-            <a:solidFill>
-              <a:srgbClr val="FFFFFF"/>
-            </a:solidFill>
-          </a:ln>
-          <a:effectLst>
-            <a:outerShdw blurRad="63500" dist="25400" dir="5400000" rotWithShape="0">
-              <a:srgbClr val="000000">
-                <a:alpha val="35000"/>
-              </a:srgbClr>
-            </a:outerShdw>
-          </a:effectLst>
-        </p:spPr>
-      </p:pic>
-      <p:sp>
-        <p:nvSpPr>
-          <p:cNvPr id="271" name="Caption"/>
-          <p:cNvSpPr txBox="1"/>
-          <p:nvPr/>
-        </p:nvSpPr>
-        <p:spPr>
-          <a:xfrm>
-            <a:off x="822960" y="4972892"/>
-            <a:ext cx="10515600" cy="457200"/>
-          </a:xfrm>
-          <a:prstGeom prst="rect">
-            <a:avLst/>
-          </a:prstGeom>
-          <a:noFill/>
-        </p:spPr>
-        <p:txBody>
-          <a:bodyPr wrap="square"/>
-          <a:lstStyle/>
-          <a:p>
-            <a:pPr algn="ctr"/>
-            <a:r>
-              <a:rPr sz="1800" b="0" i="1">
-                <a:solidFill>
-                  <a:srgbClr val="222B22"/>
-                </a:solidFill>
-                <a:latin typeface="Calibri"/>
-              </a:rPr>
-              <a:t>Handed out now — fridge, mirror, journal pocket.</a:t>
-            </a:r>
           </a:p>
         </p:txBody>
       </p:sp>
@@ -7499,7 +8599,7 @@
 </p:sld>
 </file>
 
-<file path=ppt/slides/slide162.xml><?xml version="1.0" encoding="utf-8"?>
+<file path=ppt/slides/slide9.xml><?xml version="1.0" encoding="utf-8"?>
 <p:sld xmlns:a="http://schemas.openxmlformats.org/drawingml/2006/main" xmlns:r="http://schemas.openxmlformats.org/officeDocument/2006/relationships" xmlns:p="http://schemas.openxmlformats.org/presentationml/2006/main">
   <p:cSld>
     <p:spTree>
@@ -7579,7 +8679,7 @@
                 </a:solidFill>
                 <a:latin typeface="Cambria"/>
               </a:rPr>
-              <a:t>Closing the Container + Aaronic Blessing</a:t>
+              <a:t>One More Thing, While We Are Getting Our Bearings</a:t>
             </a:r>
           </a:p>
         </p:txBody>
@@ -7592,8 +8692,8 @@
         </p:nvSpPr>
         <p:spPr>
           <a:xfrm>
-            <a:off x="822960" y="1600200"/>
-            <a:ext cx="5669280" cy="4572000"/>
+            <a:off x="822960" y="1554480"/>
+            <a:ext cx="6675120" cy="4754880"/>
           </a:xfrm>
           <a:prstGeom prst="rect">
             <a:avLst/>
@@ -7610,259 +8710,45 @@
               </a:spcAft>
             </a:pPr>
             <a:r>
-              <a:rPr sz="2200" b="1" i="0">
+              <a:rPr sz="2800" b="1" i="0">
                 <a:solidFill>
                   <a:srgbClr val="97BC62"/>
                 </a:solidFill>
                 <a:latin typeface="Calibri"/>
               </a:rPr>
-              <a:t>•  </a:t>
-            </a:r>
-            <a:r>
-              <a:rPr sz="2200" b="0" i="0">
-                <a:solidFill>
-                  <a:srgbClr val="222B22"/>
-                </a:solidFill>
-                <a:latin typeface="Calibri"/>
-              </a:rPr>
-              <a:t>We close the way we opened — the container, six steps:</a:t>
-            </a:r>
-          </a:p>
-          <a:p>
-            <a:pPr marL="685800" indent="-274320">
-              <a:spcAft>
-                <a:spcPts val="700"/>
-              </a:spcAft>
-            </a:pPr>
-            <a:r>
-              <a:rPr sz="2000" b="1" i="0">
-                <a:solidFill>
-                  <a:srgbClr val="97BC62"/>
-                </a:solidFill>
-                <a:latin typeface="Calibri"/>
-              </a:rPr>
-              <a:t>1   </a:t>
-            </a:r>
-            <a:r>
-              <a:rPr sz="2000" b="0" i="0">
-                <a:solidFill>
-                  <a:srgbClr val="222B22"/>
-                </a:solidFill>
-                <a:latin typeface="Calibri"/>
-              </a:rPr>
-              <a:t>Stand again — same circle, same posture as the open</a:t>
-            </a:r>
-          </a:p>
-          <a:p>
-            <a:pPr marL="685800" indent="-274320">
-              <a:spcAft>
-                <a:spcPts val="700"/>
-              </a:spcAft>
-            </a:pPr>
-            <a:r>
-              <a:rPr sz="2000" b="1" i="0">
-                <a:solidFill>
-                  <a:srgbClr val="97BC62"/>
-                </a:solidFill>
-                <a:latin typeface="Calibri"/>
-              </a:rPr>
-              <a:t>2   </a:t>
-            </a:r>
-            <a:r>
-              <a:rPr sz="2000" b="0" i="0">
-                <a:solidFill>
-                  <a:srgbClr val="222B22"/>
-                </a:solidFill>
-                <a:latin typeface="Calibri"/>
-              </a:rPr>
-              <a:t>One-word landing — compare it to your opening word</a:t>
-            </a:r>
-          </a:p>
-          <a:p>
-            <a:pPr marL="685800" indent="-274320">
-              <a:spcAft>
-                <a:spcPts val="700"/>
-              </a:spcAft>
-            </a:pPr>
-            <a:r>
-              <a:rPr sz="2000" b="1" i="0">
-                <a:solidFill>
-                  <a:srgbClr val="97BC62"/>
-                </a:solidFill>
-                <a:latin typeface="Calibri"/>
-              </a:rPr>
-              <a:t>3   </a:t>
-            </a:r>
-            <a:r>
-              <a:rPr sz="2000" b="0" i="0">
-                <a:solidFill>
-                  <a:srgbClr val="222B22"/>
-                </a:solidFill>
-                <a:latin typeface="Calibri"/>
-              </a:rPr>
-              <a:t>The one thing you are taking from tonight</a:t>
-            </a:r>
-          </a:p>
-          <a:p>
-            <a:pPr marL="685800" indent="-274320">
-              <a:spcAft>
-                <a:spcPts val="700"/>
-              </a:spcAft>
-            </a:pPr>
-            <a:r>
-              <a:rPr sz="2000" b="1" i="0">
-                <a:solidFill>
-                  <a:srgbClr val="97BC62"/>
-                </a:solidFill>
-                <a:latin typeface="Calibri"/>
-              </a:rPr>
-              <a:t>4   </a:t>
-            </a:r>
-            <a:r>
-              <a:rPr sz="2000" b="0" i="0">
-                <a:solidFill>
-                  <a:srgbClr val="222B22"/>
-                </a:solidFill>
-                <a:latin typeface="Calibri"/>
-              </a:rPr>
-              <a:t>The one practice — committed aloud, or modified to one you will actually keep</a:t>
-            </a:r>
-          </a:p>
-          <a:p>
-            <a:pPr marL="685800" indent="-274320">
-              <a:spcAft>
-                <a:spcPts val="700"/>
-              </a:spcAft>
-            </a:pPr>
-            <a:r>
-              <a:rPr sz="2000" b="1" i="0">
-                <a:solidFill>
-                  <a:srgbClr val="97BC62"/>
-                </a:solidFill>
-                <a:latin typeface="Calibri"/>
-              </a:rPr>
-              <a:t>5   </a:t>
-            </a:r>
-            <a:r>
-              <a:rPr sz="2000" b="0" i="0">
-                <a:solidFill>
-                  <a:srgbClr val="222B22"/>
-                </a:solidFill>
-                <a:latin typeface="Calibri"/>
-              </a:rPr>
-              <a:t>Blessings — specific, witnessed, short</a:t>
-            </a:r>
-          </a:p>
-          <a:p>
-            <a:pPr marL="685800" indent="-274320">
-              <a:spcAft>
-                <a:spcPts val="700"/>
-              </a:spcAft>
-            </a:pPr>
-            <a:r>
-              <a:rPr sz="2000" b="1" i="0">
-                <a:solidFill>
-                  <a:srgbClr val="97BC62"/>
-                </a:solidFill>
-                <a:latin typeface="Calibri"/>
-              </a:rPr>
-              <a:t>6   </a:t>
-            </a:r>
-            <a:r>
-              <a:rPr sz="2000" b="0" i="0">
-                <a:solidFill>
-                  <a:srgbClr val="222B22"/>
-                </a:solidFill>
-                <a:latin typeface="Calibri"/>
-              </a:rPr>
-              <a:t>Closing prayer — and the Aaronic blessing, spoken over each other, face to face</a:t>
-            </a:r>
-          </a:p>
-        </p:txBody>
-      </p:sp>
-      <p:sp>
-        <p:nvSpPr>
-          <p:cNvPr id="6" name="TextBox 6"/>
-          <p:cNvSpPr txBox="1"/>
-          <p:nvPr/>
-        </p:nvSpPr>
-        <p:spPr>
-          <a:xfrm>
-            <a:off x="6766560" y="1737360"/>
-            <a:ext cx="4663440" cy="2926080"/>
-          </a:xfrm>
-          <a:prstGeom prst="rect">
-            <a:avLst/>
-          </a:prstGeom>
-          <a:solidFill>
-            <a:srgbClr val="F1F6EC"/>
-          </a:solidFill>
-        </p:spPr>
-        <p:txBody>
-          <a:bodyPr wrap="square" lIns="91440" tIns="91440" rIns="91440" bIns="91440" anchor="ctr"/>
-          <a:lstStyle/>
-          <a:p>
-            <a:pPr>
+              <a:t>•  Pastor Bobby Gore  ·  (831) 277-9878  —  still there, and still not part of our team</a:t>
+            </a:r>
+          </a:p>
+          <a:p>
+            <a:pPr marL="274320" indent="-274320">
               <a:spcAft>
                 <a:spcPts val="900"/>
               </a:spcAft>
             </a:pPr>
             <a:r>
-              <a:rPr sz="1200" b="1" i="0">
+              <a:rPr sz="2800" b="1" i="0">
                 <a:solidFill>
                   <a:srgbClr val="97BC62"/>
                 </a:solidFill>
                 <a:latin typeface="Calibri"/>
               </a:rPr>
-              <a:t>THE AARONIC BLESSING — NUMBERS 6:24–26</a:t>
-            </a:r>
-          </a:p>
-          <a:p>
-            <a:pPr>
+              <a:t>•  His number is on the safety page at the front of your journal</a:t>
+            </a:r>
+          </a:p>
+          <a:p>
+            <a:pPr marL="274320" indent="-274320">
               <a:spcAft>
-                <a:spcPts val="600"/>
+                <a:spcPts val="900"/>
               </a:spcAft>
             </a:pPr>
             <a:r>
-              <a:rPr sz="2400" b="0" i="1">
-                <a:solidFill>
-                  <a:srgbClr val="222B22"/>
-                </a:solidFill>
-                <a:latin typeface="Cambria"/>
-              </a:rPr>
-              <a:t>“The Lord bless you and keep you;</a:t>
-            </a:r>
-          </a:p>
-          <a:p>
-            <a:pPr>
-              <a:spcAft>
-                <a:spcPts val="600"/>
-              </a:spcAft>
-            </a:pPr>
-            <a:r>
-              <a:rPr sz="2400" b="0" i="1">
-                <a:solidFill>
-                  <a:srgbClr val="222B22"/>
-                </a:solidFill>
-                <a:latin typeface="Cambria"/>
-              </a:rPr>
-              <a:t>the Lord make his face to shine upon you, and be gracious to you;</a:t>
-            </a:r>
-          </a:p>
-          <a:p>
-            <a:pPr>
-              <a:spcAft>
-                <a:spcPts val="600"/>
-              </a:spcAft>
-            </a:pPr>
-            <a:r>
-              <a:rPr sz="2400" b="0" i="1">
-                <a:solidFill>
-                  <a:srgbClr val="222B22"/>
-                </a:solidFill>
-                <a:latin typeface="Cambria"/>
-              </a:rPr>
-              <a:t>the Lord lift up his countenance upon you, and give you peace.”</a:t>
+              <a:rPr sz="2800" b="1" i="0">
+                <a:solidFill>
+                  <a:srgbClr val="97BC62"/>
+                </a:solidFill>
+                <a:latin typeface="Calibri"/>
+              </a:rPr>
+              <a:t>•  Same as we said in September</a:t>
             </a:r>
           </a:p>
         </p:txBody>
@@ -7889,7 +8775,7 @@
           <a:p>
             <a:pPr algn="r"/>
             <a:r>
-              <a:t>162</a:t>
+              <a:t>159</a:t>
             </a:r>
             <a:endParaRPr sz="1000" b="1">
               <a:solidFill>
@@ -7900,339 +8786,6 @@
           </a:p>
         </p:txBody>
       </p:sp>
-    </p:spTree>
-  </p:cSld>
-  <p:clrMapOvr>
-    <a:masterClrMapping/>
-  </p:clrMapOvr>
-</p:sld>
-</file>
-
-<file path=ppt/slides/slide163.xml><?xml version="1.0" encoding="utf-8"?>
-<p:sld xmlns:a="http://schemas.openxmlformats.org/drawingml/2006/main" xmlns:r="http://schemas.openxmlformats.org/officeDocument/2006/relationships" xmlns:p="http://schemas.openxmlformats.org/presentationml/2006/main">
-  <p:cSld>
-    <p:spTree>
-      <p:nvGrpSpPr>
-        <p:cNvPr id="1" name=""/>
-        <p:cNvGrpSpPr/>
-        <p:nvPr/>
-      </p:nvGrpSpPr>
-      <p:grpSpPr>
-        <a:xfrm>
-          <a:off x="0" y="0"/>
-          <a:ext cx="0" cy="0"/>
-          <a:chOff x="0" y="0"/>
-          <a:chExt cx="0" cy="0"/>
-        </a:xfrm>
-      </p:grpSpPr>
-      <p:sp>
-        <p:nvSpPr>
-          <p:cNvPr id="2" name="Rectangle 1"/>
-          <p:cNvSpPr/>
-          <p:nvPr/>
-        </p:nvSpPr>
-        <p:spPr>
-          <a:xfrm>
-            <a:off x="0" y="0"/>
-            <a:ext cx="12191695" cy="6858000"/>
-          </a:xfrm>
-          <a:prstGeom prst="rect">
-            <a:avLst/>
-          </a:prstGeom>
-          <a:solidFill>
-            <a:srgbClr val="FFFFFF"/>
-          </a:solidFill>
-          <a:ln>
-            <a:noFill/>
-          </a:ln>
-        </p:spPr>
-        <p:txBody>
-          <a:bodyPr/>
-          <a:lstStyle/>
-          <a:p>
-            <a:endParaRPr/>
-          </a:p>
-        </p:txBody>
-      </p:sp>
-      <p:sp>
-        <p:nvSpPr>
-          <p:cNvPr id="3" name="TextBox 2"/>
-          <p:cNvSpPr txBox="1"/>
-          <p:nvPr/>
-        </p:nvSpPr>
-        <p:spPr>
-          <a:xfrm>
-            <a:off x="822960" y="502920"/>
-            <a:ext cx="10515600" cy="822960"/>
-          </a:xfrm>
-          <a:prstGeom prst="rect">
-            <a:avLst/>
-          </a:prstGeom>
-          <a:noFill/>
-        </p:spPr>
-        <p:txBody>
-          <a:bodyPr wrap="square">
-            <a:spAutoFit/>
-          </a:bodyPr>
-          <a:lstStyle/>
-          <a:p>
-            <a:pPr algn="l">
-              <a:spcAft>
-                <a:spcPts val="600"/>
-              </a:spcAft>
-            </a:pPr>
-            <a:r>
-              <a:rPr sz="2800" b="1" i="0">
-                <a:solidFill>
-                  <a:srgbClr val="2C5F2D"/>
-                </a:solidFill>
-                <a:latin typeface="Cambria"/>
-              </a:rPr>
-              <a:t>The Leader Feedback Round</a:t>
-            </a:r>
-          </a:p>
-        </p:txBody>
-      </p:sp>
-      <p:sp>
-        <p:nvSpPr>
-          <p:cNvPr id="4" name="TextBox 4"/>
-          <p:cNvSpPr txBox="1"/>
-          <p:nvPr/>
-        </p:nvSpPr>
-        <p:spPr>
-          <a:xfrm>
-            <a:off x="822960" y="1554480"/>
-            <a:ext cx="6675120" cy="4892040"/>
-          </a:xfrm>
-          <a:prstGeom prst="rect">
-            <a:avLst/>
-          </a:prstGeom>
-          <a:noFill/>
-        </p:spPr>
-        <p:txBody>
-          <a:bodyPr wrap="square" lIns="91440" tIns="91440" rIns="91440" bIns="91440"/>
-          <a:lstStyle/>
-          <a:p>
-            <a:pPr marL="274320" indent="-274320">
-              <a:spcAft>
-                <a:spcPts val="900"/>
-              </a:spcAft>
-            </a:pPr>
-            <a:r>
-              <a:rPr sz="2800" b="1" i="0">
-                <a:solidFill>
-                  <a:srgbClr val="97BC62"/>
-                </a:solidFill>
-                <a:latin typeface="Calibri"/>
-              </a:rPr>
-              <a:t>•  </a:t>
-            </a:r>
-            <a:r>
-              <a:rPr sz="2800" b="0" i="0">
-                <a:solidFill>
-                  <a:srgbClr val="222B22"/>
-                </a:solidFill>
-                <a:latin typeface="Calibri"/>
-              </a:rPr>
-              <a:t>Two rounds, same as every session — the container holder first, then the content presenter: three things each</a:t>
-            </a:r>
-          </a:p>
-          <a:p>
-            <a:pPr marL="685800" indent="-274320">
-              <a:spcAft>
-                <a:spcPts val="700"/>
-              </a:spcAft>
-            </a:pPr>
-            <a:r>
-              <a:rPr sz="2000" b="1" i="0">
-                <a:solidFill>
-                  <a:srgbClr val="97BC62"/>
-                </a:solidFill>
-                <a:latin typeface="Calibri"/>
-              </a:rPr>
-              <a:t>–  </a:t>
-            </a:r>
-            <a:r>
-              <a:rPr sz="2000" b="0" i="1">
-                <a:solidFill>
-                  <a:srgbClr val="222B22"/>
-                </a:solidFill>
-                <a:latin typeface="Calibri"/>
-              </a:rPr>
-              <a:t>“What I think went well tonight: ______”</a:t>
-            </a:r>
-          </a:p>
-          <a:p>
-            <a:pPr marL="685800" indent="-274320">
-              <a:spcAft>
-                <a:spcPts val="700"/>
-              </a:spcAft>
-            </a:pPr>
-            <a:r>
-              <a:rPr sz="2000" b="1" i="0">
-                <a:solidFill>
-                  <a:srgbClr val="97BC62"/>
-                </a:solidFill>
-                <a:latin typeface="Calibri"/>
-              </a:rPr>
-              <a:t>–  </a:t>
-            </a:r>
-            <a:r>
-              <a:rPr sz="2000" b="0" i="1">
-                <a:solidFill>
-                  <a:srgbClr val="222B22"/>
-                </a:solidFill>
-                <a:latin typeface="Calibri"/>
-              </a:rPr>
-              <a:t>“What I’d do differently next time: ______”</a:t>
-            </a:r>
-          </a:p>
-          <a:p>
-            <a:pPr marL="685800" indent="-274320">
-              <a:spcAft>
-                <a:spcPts val="700"/>
-              </a:spcAft>
-            </a:pPr>
-            <a:r>
-              <a:rPr sz="2000" b="1" i="0">
-                <a:solidFill>
-                  <a:srgbClr val="97BC62"/>
-                </a:solidFill>
-                <a:latin typeface="Calibri"/>
-              </a:rPr>
-              <a:t>–  </a:t>
-            </a:r>
-            <a:r>
-              <a:rPr sz="2000" b="0" i="1">
-                <a:solidFill>
-                  <a:srgbClr val="222B22"/>
-                </a:solidFill>
-                <a:latin typeface="Calibri"/>
-              </a:rPr>
-              <a:t>“If I were to teach tonight’s process to someone, I would tell them: ______”</a:t>
-            </a:r>
-          </a:p>
-          <a:p>
-            <a:pPr marL="274320" indent="-274320">
-              <a:spcAft>
-                <a:spcPts val="900"/>
-              </a:spcAft>
-            </a:pPr>
-            <a:r>
-              <a:rPr sz="2800" b="1" i="0">
-                <a:solidFill>
-                  <a:srgbClr val="97BC62"/>
-                </a:solidFill>
-                <a:latin typeface="Calibri"/>
-              </a:rPr>
-              <a:t>•  </a:t>
-            </a:r>
-            <a:r>
-              <a:rPr sz="2800" b="0" i="0">
-                <a:solidFill>
-                  <a:srgbClr val="222B22"/>
-                </a:solidFill>
-                <a:latin typeface="Calibri"/>
-              </a:rPr>
-              <a:t>Then the room — the same two questions about tonight</a:t>
-            </a:r>
-          </a:p>
-          <a:p>
-            <a:pPr marL="274320" indent="-274320">
-              <a:spcAft>
-                <a:spcPts val="900"/>
-              </a:spcAft>
-            </a:pPr>
-            <a:r>
-              <a:rPr sz="2800" b="1" i="0">
-                <a:solidFill>
-                  <a:srgbClr val="97BC62"/>
-                </a:solidFill>
-                <a:latin typeface="Calibri"/>
-              </a:rPr>
-              <a:t>•  </a:t>
-            </a:r>
-            <a:r>
-              <a:rPr sz="2800" b="0" i="0">
-                <a:solidFill>
-                  <a:srgbClr val="222B22"/>
-                </a:solidFill>
-                <a:latin typeface="Calibri"/>
-              </a:rPr>
-              <a:t>The leaders receive without defending — “thank you” is the whole response</a:t>
-            </a:r>
-          </a:p>
-        </p:txBody>
-      </p:sp>
-      <p:sp>
-        <p:nvSpPr>
-          <p:cNvPr id="90" name="SlideNum"/>
-          <p:cNvSpPr txBox="1"/>
-          <p:nvPr/>
-        </p:nvSpPr>
-        <p:spPr>
-          <a:xfrm>
-            <a:off x="11384280" y="6446520"/>
-            <a:ext cx="640080" cy="292608"/>
-          </a:xfrm>
-          <a:prstGeom prst="rect">
-            <a:avLst/>
-          </a:prstGeom>
-          <a:noFill/>
-        </p:spPr>
-        <p:txBody>
-          <a:bodyPr wrap="none" lIns="0" tIns="0" rIns="45720" bIns="0" anchor="ctr"/>
-          <a:lstStyle/>
-          <a:p>
-            <a:pPr algn="r"/>
-            <a:r>
-              <a:t>163</a:t>
-            </a:r>
-            <a:endParaRPr sz="1000" b="1">
-              <a:solidFill>
-                <a:srgbClr val="7A8A6E"/>
-              </a:solidFill>
-              <a:latin typeface="Calibri"/>
-            </a:endParaRPr>
-          </a:p>
-        </p:txBody>
-      </p:sp>
-      <p:pic>
-        <p:nvPicPr>
-          <p:cNvPr id="33" name="Picture 33" descr="compass on the trail - the weekly bearing check"/>
-          <p:cNvPicPr>
-            <a:picLocks noChangeAspect="1"/>
-          </p:cNvPicPr>
-          <p:nvPr/>
-        </p:nvPicPr>
-        <p:blipFill>
-          <a:blip r:embed="rId3"/>
-          <a:stretch>
-            <a:fillRect/>
-          </a:stretch>
-        </p:blipFill>
-        <p:spPr>
-          <a:xfrm>
-            <a:off x="8106160" y="1463040"/>
-            <a:ext cx="3259831" cy="4892040"/>
-          </a:xfrm>
-          <a:prstGeom prst="rect">
-            <a:avLst/>
-          </a:prstGeom>
-          <a:ln w="76200">
-            <a:solidFill>
-              <a:srgbClr val="FFFFFF"/>
-            </a:solidFill>
-          </a:ln>
-          <a:effectLst>
-            <a:outerShdw blurRad="63500" dist="25400" dir="5400000" rotWithShape="0">
-              <a:srgbClr val="000000">
-                <a:alpha val="35000"/>
-              </a:srgbClr>
-            </a:outerShdw>
-          </a:effectLst>
-        </p:spPr>
-      </p:pic>
     </p:spTree>
   </p:cSld>
   <p:clrMapOvr>

--- a/_implementation-notes/evening-series/FotH Evening Session 12 Slides DRAFT v1.pptx
+++ b/_implementation-notes/evening-series/FotH Evening Session 12 Slides DRAFT v1.pptx
@@ -4807,7 +4807,7 @@
                 </a:solidFill>
                 <a:latin typeface="Cambria"/>
               </a:rPr>
-              <a:t>Homework — Two Weeks, Four Parts — Restart One</a:t>
+              <a:t>One More Thing, While We Are Getting Our Bearings</a:t>
             </a:r>
           </a:p>
         </p:txBody>
@@ -4821,7 +4821,7 @@
         <p:spPr>
           <a:xfrm>
             <a:off x="822960" y="1554480"/>
-            <a:ext cx="6675120" cy="4892040"/>
+            <a:ext cx="6675120" cy="4754880"/>
           </a:xfrm>
           <a:prstGeom prst="rect">
             <a:avLst/>
@@ -4838,22 +4838,13 @@
               </a:spcAft>
             </a:pPr>
             <a:r>
-              <a:rPr sz="2200" b="1" i="0">
+              <a:rPr sz="2800" b="1" i="0">
                 <a:solidFill>
                   <a:srgbClr val="97BC62"/>
                 </a:solidFill>
                 <a:latin typeface="Calibri"/>
               </a:rPr>
-              <a:t>•  </a:t>
-            </a:r>
-            <a:r>
-              <a:rPr sz="2200" b="0" i="0">
-                <a:solidFill>
-                  <a:srgbClr val="222B22"/>
-                </a:solidFill>
-                <a:latin typeface="Calibri"/>
-              </a:rPr>
-              <a:t>Not everything. One daily practice — the morning question, the evening note, or PROAPT. Just one</a:t>
+              <a:t>•  Pastor Bobby Gore  ·  (831) 277-9878  —  still there, and still not part of our team</a:t>
             </a:r>
           </a:p>
           <a:p>
@@ -4863,22 +4854,13 @@
               </a:spcAft>
             </a:pPr>
             <a:r>
-              <a:rPr sz="2200" b="1" i="0">
+              <a:rPr sz="2800" b="1" i="0">
                 <a:solidFill>
                   <a:srgbClr val="97BC62"/>
                 </a:solidFill>
                 <a:latin typeface="Calibri"/>
               </a:rPr>
-              <a:t>•  </a:t>
-            </a:r>
-            <a:r>
-              <a:rPr sz="2200" b="0" i="0">
-                <a:solidFill>
-                  <a:srgbClr val="222B22"/>
-                </a:solidFill>
-                <a:latin typeface="Calibri"/>
-              </a:rPr>
-              <a:t>Write it at the top of a fresh journal page tonight, with when and where: “The morning question, 6:50, kitchen table”</a:t>
+              <a:t>•  His number is on the safety page at the front of your journal</a:t>
             </a:r>
           </a:p>
           <a:p>
@@ -4888,72 +4870,13 @@
               </a:spcAft>
             </a:pPr>
             <a:r>
-              <a:rPr sz="2200" b="1" i="0">
+              <a:rPr sz="2800" b="1" i="0">
                 <a:solidFill>
                   <a:srgbClr val="97BC62"/>
                 </a:solidFill>
                 <a:latin typeface="Calibri"/>
               </a:rPr>
-              <a:t>•  </a:t>
-            </a:r>
-            <a:r>
-              <a:rPr sz="2200" b="0" i="0">
-                <a:solidFill>
-                  <a:srgbClr val="222B22"/>
-                </a:solidFill>
-                <a:latin typeface="Calibri"/>
-              </a:rPr>
-              <a:t>That one practice, daily, this week</a:t>
-            </a:r>
-          </a:p>
-          <a:p>
-            <a:pPr marL="274320" indent="-274320">
-              <a:spcAft>
-                <a:spcPts val="900"/>
-              </a:spcAft>
-            </a:pPr>
-            <a:r>
-              <a:rPr sz="2200" b="1" i="0">
-                <a:solidFill>
-                  <a:srgbClr val="97BC62"/>
-                </a:solidFill>
-                <a:latin typeface="Calibri"/>
-              </a:rPr>
-              <a:t>•  </a:t>
-            </a:r>
-            <a:r>
-              <a:rPr sz="2200" b="0" i="0">
-                <a:solidFill>
-                  <a:srgbClr val="222B22"/>
-                </a:solidFill>
-                <a:latin typeface="Calibri"/>
-              </a:rPr>
-              <a:t>Miss a day? Do not start over — begin again on the next available day</a:t>
-            </a:r>
-          </a:p>
-          <a:p>
-            <a:pPr marL="274320" indent="-274320">
-              <a:spcAft>
-                <a:spcPts val="900"/>
-              </a:spcAft>
-            </a:pPr>
-            <a:r>
-              <a:rPr sz="2200" b="1" i="0">
-                <a:solidFill>
-                  <a:srgbClr val="97BC62"/>
-                </a:solidFill>
-                <a:latin typeface="Calibri"/>
-              </a:rPr>
-              <a:t>•  </a:t>
-            </a:r>
-            <a:r>
-              <a:rPr sz="2200" b="0" i="0">
-                <a:solidFill>
-                  <a:srgbClr val="222B22"/>
-                </a:solidFill>
-                <a:latin typeface="Calibri"/>
-              </a:rPr>
-              <a:t>“One seed goes back in the ground. His mercies are new every morning; you only need one practice to be standing there when they arrive.”</a:t>
+              <a:t>•  Same as we said in September</a:t>
             </a:r>
           </a:p>
         </p:txBody>
@@ -4980,7 +4903,7 @@
           <a:p>
             <a:pPr algn="r"/>
             <a:r>
-              <a:t>160</a:t>
+              <a:t>159</a:t>
             </a:r>
             <a:endParaRPr sz="1000" b="1">
               <a:solidFill>
@@ -4991,42 +4914,6 @@
           </a:p>
         </p:txBody>
       </p:sp>
-      <p:pic>
-        <p:nvPicPr>
-          <p:cNvPr id="33" name="Picture 33" descr="seedling - what grows between Wednesdays"/>
-          <p:cNvPicPr>
-            <a:picLocks noChangeAspect="1"/>
-          </p:cNvPicPr>
-          <p:nvPr/>
-        </p:nvPicPr>
-        <p:blipFill>
-          <a:blip r:embed="rId3"/>
-          <a:stretch>
-            <a:fillRect/>
-          </a:stretch>
-        </p:blipFill>
-        <p:spPr>
-          <a:xfrm>
-            <a:off x="8103612" y="1463040"/>
-            <a:ext cx="3262379" cy="4892040"/>
-          </a:xfrm>
-          <a:prstGeom prst="rect">
-            <a:avLst/>
-          </a:prstGeom>
-          <a:ln w="76200">
-            <a:solidFill>
-              <a:srgbClr val="FFFFFF"/>
-            </a:solidFill>
-          </a:ln>
-          <a:effectLst>
-            <a:outerShdw blurRad="63500" dist="25400" dir="5400000" rotWithShape="0">
-              <a:srgbClr val="000000">
-                <a:alpha val="35000"/>
-              </a:srgbClr>
-            </a:outerShdw>
-          </a:effectLst>
-        </p:spPr>
-      </p:pic>
     </p:spTree>
   </p:cSld>
   <p:clrMapOvr>
@@ -5035,7 +4922,7 @@
 </p:sld>
 </file>
 
-<file path=ppt/slides/slide12.xml><?xml version="1.0" encoding="utf-8"?>
+<file path=ppt/slides/slide11.xml><?xml version="1.0" encoding="utf-8"?>
 <p:sld xmlns:a="http://schemas.openxmlformats.org/drawingml/2006/main" xmlns:r="http://schemas.openxmlformats.org/officeDocument/2006/relationships" xmlns:p="http://schemas.openxmlformats.org/presentationml/2006/main">
   <p:cSld>
     <p:spTree>
@@ -5115,7 +5002,7 @@
                 </a:solidFill>
                 <a:latin typeface="Cambria"/>
               </a:rPr>
-              <a:t>Closing the Container + Aaronic Blessing</a:t>
+              <a:t>Homework — Two Weeks, Four Parts — Restart One</a:t>
             </a:r>
           </a:p>
         </p:txBody>
@@ -5128,8 +5015,8 @@
         </p:nvSpPr>
         <p:spPr>
           <a:xfrm>
-            <a:off x="822960" y="1600200"/>
-            <a:ext cx="5669280" cy="4572000"/>
+            <a:off x="822960" y="1554480"/>
+            <a:ext cx="6675120" cy="4892040"/>
           </a:xfrm>
           <a:prstGeom prst="rect">
             <a:avLst/>
@@ -5161,258 +5048,252 @@
                 </a:solidFill>
                 <a:latin typeface="Calibri"/>
               </a:rPr>
-              <a:t>We close the way we opened — the container, six steps:</a:t>
-            </a:r>
-          </a:p>
-          <a:p>
-            <a:pPr marL="685800" indent="-274320">
+              <a:t>Not everything. One daily practice — the morning question, the evening note, or PROAPT. Just one</a:t>
+            </a:r>
+          </a:p>
+          <a:p>
+            <a:pPr marL="274320" indent="-274320">
               <a:spcAft>
-                <a:spcPts val="700"/>
+                <a:spcPts val="900"/>
               </a:spcAft>
             </a:pPr>
             <a:r>
-              <a:rPr sz="2000" b="1" i="0">
+              <a:rPr sz="2200" b="1" i="0">
                 <a:solidFill>
                   <a:srgbClr val="97BC62"/>
                 </a:solidFill>
                 <a:latin typeface="Calibri"/>
               </a:rPr>
-              <a:t>1   </a:t>
-            </a:r>
-            <a:r>
-              <a:rPr sz="2000" b="0" i="0">
+              <a:t>•  </a:t>
+            </a:r>
+            <a:r>
+              <a:rPr sz="2200" b="0" i="0">
                 <a:solidFill>
                   <a:srgbClr val="222B22"/>
                 </a:solidFill>
                 <a:latin typeface="Calibri"/>
               </a:rPr>
-              <a:t>Stand again — same circle, same posture as the open</a:t>
-            </a:r>
-          </a:p>
-          <a:p>
-            <a:pPr marL="685800" indent="-274320">
+              <a:t>Write it at the top of a fresh journal page tonight, with when and where: “The morning question, 6:50, kitchen table”</a:t>
+            </a:r>
+          </a:p>
+          <a:p>
+            <a:pPr marL="274320" indent="-274320">
               <a:spcAft>
-                <a:spcPts val="700"/>
+                <a:spcPts val="900"/>
               </a:spcAft>
             </a:pPr>
             <a:r>
-              <a:rPr sz="2000" b="1" i="0">
+              <a:rPr sz="2200" b="1" i="0">
                 <a:solidFill>
                   <a:srgbClr val="97BC62"/>
                 </a:solidFill>
                 <a:latin typeface="Calibri"/>
               </a:rPr>
-              <a:t>2   </a:t>
-            </a:r>
-            <a:r>
-              <a:rPr sz="2000" b="0" i="0">
+              <a:t>•  </a:t>
+            </a:r>
+            <a:r>
+              <a:rPr sz="2200" b="0" i="0">
                 <a:solidFill>
                   <a:srgbClr val="222B22"/>
                 </a:solidFill>
                 <a:latin typeface="Calibri"/>
               </a:rPr>
-              <a:t>One-word landing — compare it to your opening word</a:t>
-            </a:r>
-          </a:p>
-          <a:p>
-            <a:pPr marL="685800" indent="-274320">
+              <a:t>That one practice, daily, this week</a:t>
+            </a:r>
+          </a:p>
+          <a:p>
+            <a:pPr marL="274320" indent="-274320">
               <a:spcAft>
-                <a:spcPts val="700"/>
+                <a:spcPts val="900"/>
               </a:spcAft>
             </a:pPr>
             <a:r>
-              <a:rPr sz="2000" b="1" i="0">
+              <a:rPr sz="2200" b="1" i="0">
                 <a:solidFill>
                   <a:srgbClr val="97BC62"/>
                 </a:solidFill>
                 <a:latin typeface="Calibri"/>
               </a:rPr>
-              <a:t>3   </a:t>
-            </a:r>
-            <a:r>
-              <a:rPr sz="2000" b="0" i="0">
+              <a:t>•  </a:t>
+            </a:r>
+            <a:r>
+              <a:rPr sz="2200" b="0" i="0">
                 <a:solidFill>
                   <a:srgbClr val="222B22"/>
                 </a:solidFill>
                 <a:latin typeface="Calibri"/>
               </a:rPr>
-              <a:t>The one thing you are taking from tonight</a:t>
-            </a:r>
-          </a:p>
-          <a:p>
-            <a:pPr marL="685800" indent="-274320">
+              <a:t>Miss a day? Do not start over — begin again on the next available day</a:t>
+            </a:r>
+          </a:p>
+          <a:p>
+            <a:pPr marL="274320" indent="-274320">
               <a:spcAft>
-                <a:spcPts val="700"/>
+                <a:spcPts val="900"/>
               </a:spcAft>
             </a:pPr>
             <a:r>
-              <a:rPr sz="2000" b="1" i="0">
+              <a:rPr sz="2200" b="1" i="0">
                 <a:solidFill>
                   <a:srgbClr val="97BC62"/>
                 </a:solidFill>
                 <a:latin typeface="Calibri"/>
               </a:rPr>
-              <a:t>4   </a:t>
-            </a:r>
-            <a:r>
-              <a:rPr sz="2000" b="0" i="0">
+              <a:t>•  </a:t>
+            </a:r>
+            <a:r>
+              <a:rPr sz="2200" b="0" i="0">
                 <a:solidFill>
                   <a:srgbClr val="222B22"/>
                 </a:solidFill>
                 <a:latin typeface="Calibri"/>
               </a:rPr>
-              <a:t>The one practice — committed aloud, or modified to one you will actually keep</a:t>
-            </a:r>
-          </a:p>
-          <a:p>
-            <a:pPr marL="685800" indent="-274320">
-              <a:spcAft>
-                <a:spcPts val="700"/>
-              </a:spcAft>
-            </a:pPr>
-            <a:r>
-              <a:rPr sz="2000" b="1" i="0">
-                <a:solidFill>
-                  <a:srgbClr val="97BC62"/>
-                </a:solidFill>
-                <a:latin typeface="Calibri"/>
-              </a:rPr>
-              <a:t>5   </a:t>
-            </a:r>
-            <a:r>
-              <a:rPr sz="2000" b="0" i="0">
-                <a:solidFill>
-                  <a:srgbClr val="222B22"/>
-                </a:solidFill>
-                <a:latin typeface="Calibri"/>
-              </a:rPr>
-              <a:t>Blessings — specific, witnessed, short</a:t>
-            </a:r>
-          </a:p>
-          <a:p>
-            <a:pPr marL="685800" indent="-274320">
-              <a:spcAft>
-                <a:spcPts val="700"/>
-              </a:spcAft>
-            </a:pPr>
-            <a:r>
-              <a:rPr sz="2000" b="1" i="0">
-                <a:solidFill>
-                  <a:srgbClr val="97BC62"/>
-                </a:solidFill>
-                <a:latin typeface="Calibri"/>
-              </a:rPr>
-              <a:t>6   </a:t>
-            </a:r>
-            <a:r>
-              <a:rPr sz="2000" b="0" i="0">
-                <a:solidFill>
-                  <a:srgbClr val="222B22"/>
-                </a:solidFill>
-                <a:latin typeface="Calibri"/>
-              </a:rPr>
-              <a:t>Closing prayer — and the Aaronic blessing, spoken over each other, face to face</a:t>
-            </a:r>
-          </a:p>
-        </p:txBody>
-      </p:sp>
-      <p:sp>
-        <p:nvSpPr>
-          <p:cNvPr id="6" name="TextBox 6"/>
+              <a:t>“One seed goes back in the ground. His mercies are new every morning; you only need one practice to be standing there when they arrive.”</a:t>
+            </a:r>
+          </a:p>
+        </p:txBody>
+      </p:sp>
+      <p:sp>
+        <p:nvSpPr>
+          <p:cNvPr id="90" name="SlideNum"/>
           <p:cNvSpPr txBox="1"/>
           <p:nvPr/>
         </p:nvSpPr>
         <p:spPr>
           <a:xfrm>
-            <a:off x="6766560" y="1737360"/>
-            <a:ext cx="4663440" cy="2926080"/>
+            <a:off x="11384280" y="6446520"/>
+            <a:ext cx="640080" cy="292608"/>
+          </a:xfrm>
+          <a:prstGeom prst="rect">
+            <a:avLst/>
+          </a:prstGeom>
+          <a:noFill/>
+        </p:spPr>
+        <p:txBody>
+          <a:bodyPr wrap="none" lIns="0" tIns="0" rIns="45720" bIns="0" anchor="ctr"/>
+          <a:lstStyle/>
+          <a:p>
+            <a:pPr algn="r"/>
+            <a:r>
+              <a:t>160</a:t>
+            </a:r>
+            <a:endParaRPr sz="1000" b="1">
+              <a:solidFill>
+                <a:srgbClr val="7A8A6E"/>
+              </a:solidFill>
+              <a:latin typeface="Calibri"/>
+            </a:endParaRPr>
+          </a:p>
+        </p:txBody>
+      </p:sp>
+      <p:pic>
+        <p:nvPicPr>
+          <p:cNvPr id="33" name="Picture 33" descr="seedling - what grows between Wednesdays"/>
+          <p:cNvPicPr>
+            <a:picLocks noChangeAspect="1"/>
+          </p:cNvPicPr>
+          <p:nvPr/>
+        </p:nvPicPr>
+        <p:blipFill>
+          <a:blip r:embed="rId3"/>
+          <a:stretch>
+            <a:fillRect/>
+          </a:stretch>
+        </p:blipFill>
+        <p:spPr>
+          <a:xfrm>
+            <a:off x="8103612" y="1463040"/>
+            <a:ext cx="3262379" cy="4892040"/>
+          </a:xfrm>
+          <a:prstGeom prst="rect">
+            <a:avLst/>
+          </a:prstGeom>
+          <a:ln w="76200">
+            <a:solidFill>
+              <a:srgbClr val="FFFFFF"/>
+            </a:solidFill>
+          </a:ln>
+          <a:effectLst>
+            <a:outerShdw blurRad="63500" dist="25400" dir="5400000" rotWithShape="0">
+              <a:srgbClr val="000000">
+                <a:alpha val="35000"/>
+              </a:srgbClr>
+            </a:outerShdw>
+          </a:effectLst>
+        </p:spPr>
+      </p:pic>
+    </p:spTree>
+  </p:cSld>
+  <p:clrMapOvr>
+    <a:masterClrMapping/>
+  </p:clrMapOvr>
+</p:sld>
+</file>
+
+<file path=ppt/slides/slide12.xml><?xml version="1.0" encoding="utf-8"?>
+<p:sld xmlns:a="http://schemas.openxmlformats.org/drawingml/2006/main" xmlns:p="http://schemas.openxmlformats.org/presentationml/2006/main" xmlns:r="http://schemas.openxmlformats.org/officeDocument/2006/relationships">
+  <p:cSld>
+    <p:spTree>
+      <p:nvGrpSpPr>
+        <p:cNvPr id="1" name=""/>
+        <p:cNvGrpSpPr/>
+        <p:nvPr/>
+      </p:nvGrpSpPr>
+      <p:grpSpPr/>
+      <p:sp>
+        <p:nvSpPr>
+          <p:cNvPr id="2" name="Rectangle 1"/>
+          <p:cNvSpPr/>
+          <p:nvPr/>
+        </p:nvSpPr>
+        <p:spPr>
+          <a:xfrm>
+            <a:off x="0" y="0"/>
+            <a:ext cx="12192000" cy="6858000"/>
           </a:xfrm>
           <a:prstGeom prst="rect">
             <a:avLst/>
           </a:prstGeom>
           <a:solidFill>
-            <a:srgbClr val="F1F6EC"/>
+            <a:srgbClr val="FFFFFF"/>
           </a:solidFill>
-        </p:spPr>
-        <p:txBody>
-          <a:bodyPr wrap="square" lIns="91440" tIns="91440" rIns="91440" bIns="91440" anchor="ctr"/>
-          <a:lstStyle/>
-          <a:p>
-            <a:pPr>
-              <a:spcAft>
-                <a:spcPts val="900"/>
-              </a:spcAft>
-            </a:pPr>
-            <a:r>
-              <a:rPr sz="1200" b="1" i="0">
-                <a:solidFill>
-                  <a:srgbClr val="97BC62"/>
-                </a:solidFill>
-                <a:latin typeface="Calibri"/>
-              </a:rPr>
-              <a:t>THE AARONIC BLESSING — NUMBERS 6:24–26</a:t>
-            </a:r>
-          </a:p>
-          <a:p>
-            <a:pPr>
-              <a:spcAft>
-                <a:spcPts val="600"/>
-              </a:spcAft>
-            </a:pPr>
-            <a:r>
-              <a:rPr sz="2400" b="0" i="1">
-                <a:solidFill>
-                  <a:srgbClr val="222B22"/>
-                </a:solidFill>
-                <a:latin typeface="Cambria"/>
-              </a:rPr>
-              <a:t>“The Lord bless you and keep you;</a:t>
-            </a:r>
-          </a:p>
-          <a:p>
-            <a:pPr>
-              <a:spcAft>
-                <a:spcPts val="600"/>
-              </a:spcAft>
-            </a:pPr>
-            <a:r>
-              <a:rPr sz="2400" b="0" i="1">
-                <a:solidFill>
-                  <a:srgbClr val="222B22"/>
-                </a:solidFill>
-                <a:latin typeface="Cambria"/>
-              </a:rPr>
-              <a:t>the Lord make his face to shine upon you, and be gracious to you;</a:t>
-            </a:r>
-          </a:p>
-          <a:p>
-            <a:pPr>
-              <a:spcAft>
-                <a:spcPts val="600"/>
-              </a:spcAft>
-            </a:pPr>
-            <a:r>
-              <a:rPr sz="2400" b="0" i="1">
-                <a:solidFill>
-                  <a:srgbClr val="222B22"/>
-                </a:solidFill>
-                <a:latin typeface="Cambria"/>
-              </a:rPr>
-              <a:t>the Lord lift up his countenance upon you, and give you peace.”</a:t>
-            </a:r>
-          </a:p>
-        </p:txBody>
-      </p:sp>
-      <p:sp>
-        <p:nvSpPr>
-          <p:cNvPr id="90" name="SlideNum"/>
+          <a:ln>
+            <a:noFill/>
+          </a:ln>
+          <a:effectLst/>
+        </p:spPr>
+        <p:style>
+          <a:lnRef idx="1">
+            <a:schemeClr val="accent1"/>
+          </a:lnRef>
+          <a:fillRef idx="3">
+            <a:schemeClr val="accent1"/>
+          </a:fillRef>
+          <a:effectRef idx="2">
+            <a:schemeClr val="accent1"/>
+          </a:effectRef>
+          <a:fontRef idx="minor">
+            <a:schemeClr val="lt1"/>
+          </a:fontRef>
+        </p:style>
+        <p:txBody>
+          <a:bodyPr rtlCol="0" anchor="ctr"/>
+          <a:lstStyle/>
+          <a:p>
+            <a:pPr algn="ctr"/>
+          </a:p>
+        </p:txBody>
+      </p:sp>
+      <p:sp>
+        <p:nvSpPr>
+          <p:cNvPr id="3" name="TextBox 2"/>
           <p:cNvSpPr txBox="1"/>
           <p:nvPr/>
         </p:nvSpPr>
         <p:spPr>
           <a:xfrm>
-            <a:off x="11384280" y="6446520"/>
-            <a:ext cx="640080" cy="292608"/>
+            <a:off x="822960" y="502920"/>
+            <a:ext cx="10515600" cy="822960"/>
           </a:xfrm>
           <a:prstGeom prst="rect">
             <a:avLst/>
@@ -5420,12 +5301,109 @@
           <a:noFill/>
         </p:spPr>
         <p:txBody>
+          <a:bodyPr wrap="square">
+            <a:spAutoFit/>
+          </a:bodyPr>
+          <a:lstStyle/>
+          <a:p>
+            <a:r>
+              <a:rPr sz="2800" b="1">
+                <a:solidFill>
+                  <a:srgbClr val="2C5F2D"/>
+                </a:solidFill>
+                <a:latin typeface="Cambria"/>
+              </a:rPr>
+              <a:t>The Take-Home Sheet — the Daily Rhythm</a:t>
+            </a:r>
+          </a:p>
+        </p:txBody>
+      </p:sp>
+      <p:pic>
+        <p:nvPicPr>
+          <p:cNvPr id="4" name="Picture 3" descr="s12_part1.png"/>
+          <p:cNvPicPr>
+            <a:picLocks noChangeAspect="1"/>
+          </p:cNvPicPr>
+          <p:nvPr/>
+        </p:nvPicPr>
+        <p:blipFill>
+          <a:blip r:embed="rId2"/>
+          <a:stretch>
+            <a:fillRect/>
+          </a:stretch>
+        </p:blipFill>
+        <p:spPr>
+          <a:xfrm>
+            <a:off x="1798167" y="1463040"/>
+            <a:ext cx="8595360" cy="4039819"/>
+          </a:xfrm>
+          <a:prstGeom prst="rect">
+            <a:avLst/>
+          </a:prstGeom>
+          <a:ln w="12700">
+            <a:solidFill>
+              <a:srgbClr val="C8C8C8"/>
+            </a:solidFill>
+          </a:ln>
+        </p:spPr>
+      </p:pic>
+      <p:sp>
+        <p:nvSpPr>
+          <p:cNvPr id="5" name="TextBox 4"/>
+          <p:cNvSpPr txBox="1"/>
+          <p:nvPr/>
+        </p:nvSpPr>
+        <p:spPr>
+          <a:xfrm>
+            <a:off x="822960" y="6355080"/>
+            <a:ext cx="10515600" cy="411480"/>
+          </a:xfrm>
+          <a:prstGeom prst="rect">
+            <a:avLst/>
+          </a:prstGeom>
+          <a:noFill/>
+        </p:spPr>
+        <p:txBody>
+          <a:bodyPr wrap="square">
+            <a:spAutoFit/>
+          </a:bodyPr>
+          <a:lstStyle/>
+          <a:p>
+            <a:r>
+              <a:rPr sz="1400" i="1">
+                <a:solidFill>
+                  <a:srgbClr val="595959"/>
+                </a:solidFill>
+                <a:latin typeface="Calibri"/>
+              </a:rPr>
+              <a:t>Handed out now — this is the sheet in your hands.</a:t>
+            </a:r>
+          </a:p>
+        </p:txBody>
+      </p:sp>
+      <p:sp>
+        <p:nvSpPr>
+          <p:cNvPr id="90" name="SlideNum"/>
+          <p:cNvSpPr txBox="1"/>
+          <p:nvPr/>
+        </p:nvSpPr>
+        <p:spPr>
+          <a:xfrm>
+            <a:off x="11384280" y="6446520"/>
+            <a:ext cx="640080" cy="292608"/>
+          </a:xfrm>
+          <a:prstGeom prst="rect">
+            <a:avLst/>
+          </a:prstGeom>
+          <a:noFill/>
+        </p:spPr>
+        <p:txBody>
           <a:bodyPr wrap="none" lIns="0" tIns="0" rIns="45720" bIns="0" anchor="ctr"/>
           <a:lstStyle/>
           <a:p>
             <a:pPr algn="r"/>
             <a:r>
-              <a:t>162</a:t>
+              <a:t>161</a:t>
             </a:r>
             <a:endParaRPr sz="1000" b="1">
               <a:solidFill>
@@ -5445,6 +5423,198 @@
 </file>
 
 <file path=ppt/slides/slide13.xml><?xml version="1.0" encoding="utf-8"?>
+<p:sld xmlns:a="http://schemas.openxmlformats.org/drawingml/2006/main" xmlns:p="http://schemas.openxmlformats.org/presentationml/2006/main" xmlns:r="http://schemas.openxmlformats.org/officeDocument/2006/relationships">
+  <p:cSld>
+    <p:spTree>
+      <p:nvGrpSpPr>
+        <p:cNvPr id="1" name=""/>
+        <p:cNvGrpSpPr/>
+        <p:nvPr/>
+      </p:nvGrpSpPr>
+      <p:grpSpPr/>
+      <p:sp>
+        <p:nvSpPr>
+          <p:cNvPr id="2" name="Rectangle 1"/>
+          <p:cNvSpPr/>
+          <p:nvPr/>
+        </p:nvSpPr>
+        <p:spPr>
+          <a:xfrm>
+            <a:off x="0" y="0"/>
+            <a:ext cx="12192000" cy="6858000"/>
+          </a:xfrm>
+          <a:prstGeom prst="rect">
+            <a:avLst/>
+          </a:prstGeom>
+          <a:solidFill>
+            <a:srgbClr val="FFFFFF"/>
+          </a:solidFill>
+          <a:ln>
+            <a:noFill/>
+          </a:ln>
+          <a:effectLst/>
+        </p:spPr>
+        <p:style>
+          <a:lnRef idx="1">
+            <a:schemeClr val="accent1"/>
+          </a:lnRef>
+          <a:fillRef idx="3">
+            <a:schemeClr val="accent1"/>
+          </a:fillRef>
+          <a:effectRef idx="2">
+            <a:schemeClr val="accent1"/>
+          </a:effectRef>
+          <a:fontRef idx="minor">
+            <a:schemeClr val="lt1"/>
+          </a:fontRef>
+        </p:style>
+        <p:txBody>
+          <a:bodyPr rtlCol="0" anchor="ctr"/>
+          <a:lstStyle/>
+          <a:p>
+            <a:pPr algn="ctr"/>
+          </a:p>
+        </p:txBody>
+      </p:sp>
+      <p:sp>
+        <p:nvSpPr>
+          <p:cNvPr id="3" name="TextBox 2"/>
+          <p:cNvSpPr txBox="1"/>
+          <p:nvPr/>
+        </p:nvSpPr>
+        <p:spPr>
+          <a:xfrm>
+            <a:off x="822960" y="502920"/>
+            <a:ext cx="10515600" cy="822960"/>
+          </a:xfrm>
+          <a:prstGeom prst="rect">
+            <a:avLst/>
+          </a:prstGeom>
+          <a:noFill/>
+        </p:spPr>
+        <p:txBody>
+          <a:bodyPr wrap="square">
+            <a:spAutoFit/>
+          </a:bodyPr>
+          <a:lstStyle/>
+          <a:p>
+            <a:r>
+              <a:rPr sz="2800" b="1">
+                <a:solidFill>
+                  <a:srgbClr val="2C5F2D"/>
+                </a:solidFill>
+                <a:latin typeface="Cambria"/>
+              </a:rPr>
+              <a:t>The Take-Home Sheet — the Four Parts</a:t>
+            </a:r>
+          </a:p>
+        </p:txBody>
+      </p:sp>
+      <p:pic>
+        <p:nvPicPr>
+          <p:cNvPr id="4" name="Picture 3" descr="s12_part2.png"/>
+          <p:cNvPicPr>
+            <a:picLocks noChangeAspect="1"/>
+          </p:cNvPicPr>
+          <p:nvPr/>
+        </p:nvPicPr>
+        <p:blipFill>
+          <a:blip r:embed="rId2"/>
+          <a:stretch>
+            <a:fillRect/>
+          </a:stretch>
+        </p:blipFill>
+        <p:spPr>
+          <a:xfrm>
+            <a:off x="2066004" y="1463040"/>
+            <a:ext cx="8059687" cy="4709160"/>
+          </a:xfrm>
+          <a:prstGeom prst="rect">
+            <a:avLst/>
+          </a:prstGeom>
+          <a:ln w="12700">
+            <a:solidFill>
+              <a:srgbClr val="C8C8C8"/>
+            </a:solidFill>
+          </a:ln>
+        </p:spPr>
+      </p:pic>
+      <p:sp>
+        <p:nvSpPr>
+          <p:cNvPr id="5" name="TextBox 4"/>
+          <p:cNvSpPr txBox="1"/>
+          <p:nvPr/>
+        </p:nvSpPr>
+        <p:spPr>
+          <a:xfrm>
+            <a:off x="822960" y="6355080"/>
+            <a:ext cx="10515600" cy="411480"/>
+          </a:xfrm>
+          <a:prstGeom prst="rect">
+            <a:avLst/>
+          </a:prstGeom>
+          <a:noFill/>
+        </p:spPr>
+        <p:txBody>
+          <a:bodyPr wrap="square">
+            <a:spAutoFit/>
+          </a:bodyPr>
+          <a:lstStyle/>
+          <a:p>
+            <a:r>
+              <a:rPr sz="1400" i="1">
+                <a:solidFill>
+                  <a:srgbClr val="595959"/>
+                </a:solidFill>
+                <a:latin typeface="Calibri"/>
+              </a:rPr>
+              <a:t>One practice at a time — and a partner expecting you at the end of week one.</a:t>
+            </a:r>
+          </a:p>
+        </p:txBody>
+      </p:sp>
+      <p:sp>
+        <p:nvSpPr>
+          <p:cNvPr id="90" name="SlideNum"/>
+          <p:cNvSpPr txBox="1"/>
+          <p:nvPr/>
+        </p:nvSpPr>
+        <p:spPr>
+          <a:xfrm>
+            <a:off x="11384280" y="6446520"/>
+            <a:ext cx="640080" cy="292608"/>
+          </a:xfrm>
+          <a:prstGeom prst="rect">
+            <a:avLst/>
+          </a:prstGeom>
+          <a:noFill/>
+        </p:spPr>
+        <p:txBody>
+          <a:bodyPr wrap="none" lIns="0" tIns="0" rIns="45720" bIns="0" anchor="ctr"/>
+          <a:lstStyle/>
+          <a:p>
+            <a:pPr algn="r"/>
+            <a:r>
+              <a:t>161a</a:t>
+            </a:r>
+            <a:endParaRPr sz="1000" b="1">
+              <a:solidFill>
+                <a:srgbClr val="7A8A6E"/>
+              </a:solidFill>
+              <a:latin typeface="Calibri"/>
+            </a:endParaRPr>
+          </a:p>
+        </p:txBody>
+      </p:sp>
+    </p:spTree>
+  </p:cSld>
+  <p:clrMapOvr>
+    <a:masterClrMapping/>
+  </p:clrMapOvr>
+</p:sld>
+</file>
+
+<file path=ppt/slides/slide14.xml><?xml version="1.0" encoding="utf-8"?>
 <p:sld xmlns:a="http://schemas.openxmlformats.org/drawingml/2006/main" xmlns:r="http://schemas.openxmlformats.org/officeDocument/2006/relationships" xmlns:p="http://schemas.openxmlformats.org/presentationml/2006/main">
   <p:cSld>
     <p:spTree>
@@ -5524,6 +5694,415 @@
                 </a:solidFill>
                 <a:latin typeface="Cambria"/>
               </a:rPr>
+              <a:t>Closing the Container + Aaronic Blessing</a:t>
+            </a:r>
+          </a:p>
+        </p:txBody>
+      </p:sp>
+      <p:sp>
+        <p:nvSpPr>
+          <p:cNvPr id="4" name="TextBox 4"/>
+          <p:cNvSpPr txBox="1"/>
+          <p:nvPr/>
+        </p:nvSpPr>
+        <p:spPr>
+          <a:xfrm>
+            <a:off x="822960" y="1600200"/>
+            <a:ext cx="5669280" cy="4572000"/>
+          </a:xfrm>
+          <a:prstGeom prst="rect">
+            <a:avLst/>
+          </a:prstGeom>
+          <a:noFill/>
+        </p:spPr>
+        <p:txBody>
+          <a:bodyPr wrap="square" lIns="91440" tIns="91440" rIns="91440" bIns="91440"/>
+          <a:lstStyle/>
+          <a:p>
+            <a:pPr marL="274320" indent="-274320">
+              <a:spcAft>
+                <a:spcPts val="900"/>
+              </a:spcAft>
+            </a:pPr>
+            <a:r>
+              <a:rPr sz="2200" b="1" i="0">
+                <a:solidFill>
+                  <a:srgbClr val="97BC62"/>
+                </a:solidFill>
+                <a:latin typeface="Calibri"/>
+              </a:rPr>
+              <a:t>•  </a:t>
+            </a:r>
+            <a:r>
+              <a:rPr sz="2200" b="0" i="0">
+                <a:solidFill>
+                  <a:srgbClr val="222B22"/>
+                </a:solidFill>
+                <a:latin typeface="Calibri"/>
+              </a:rPr>
+              <a:t>We close the way we opened — the container, six steps:</a:t>
+            </a:r>
+          </a:p>
+          <a:p>
+            <a:pPr marL="685800" indent="-274320">
+              <a:spcAft>
+                <a:spcPts val="700"/>
+              </a:spcAft>
+            </a:pPr>
+            <a:r>
+              <a:rPr sz="2000" b="1" i="0">
+                <a:solidFill>
+                  <a:srgbClr val="97BC62"/>
+                </a:solidFill>
+                <a:latin typeface="Calibri"/>
+              </a:rPr>
+              <a:t>1   </a:t>
+            </a:r>
+            <a:r>
+              <a:rPr sz="2000" b="0" i="0">
+                <a:solidFill>
+                  <a:srgbClr val="222B22"/>
+                </a:solidFill>
+                <a:latin typeface="Calibri"/>
+              </a:rPr>
+              <a:t>Stand again — same circle, same posture as the open</a:t>
+            </a:r>
+          </a:p>
+          <a:p>
+            <a:pPr marL="685800" indent="-274320">
+              <a:spcAft>
+                <a:spcPts val="700"/>
+              </a:spcAft>
+            </a:pPr>
+            <a:r>
+              <a:rPr sz="2000" b="1" i="0">
+                <a:solidFill>
+                  <a:srgbClr val="97BC62"/>
+                </a:solidFill>
+                <a:latin typeface="Calibri"/>
+              </a:rPr>
+              <a:t>2   </a:t>
+            </a:r>
+            <a:r>
+              <a:rPr sz="2000" b="0" i="0">
+                <a:solidFill>
+                  <a:srgbClr val="222B22"/>
+                </a:solidFill>
+                <a:latin typeface="Calibri"/>
+              </a:rPr>
+              <a:t>One-word landing — compare it to your opening word</a:t>
+            </a:r>
+          </a:p>
+          <a:p>
+            <a:pPr marL="685800" indent="-274320">
+              <a:spcAft>
+                <a:spcPts val="700"/>
+              </a:spcAft>
+            </a:pPr>
+            <a:r>
+              <a:rPr sz="2000" b="1" i="0">
+                <a:solidFill>
+                  <a:srgbClr val="97BC62"/>
+                </a:solidFill>
+                <a:latin typeface="Calibri"/>
+              </a:rPr>
+              <a:t>3   </a:t>
+            </a:r>
+            <a:r>
+              <a:rPr sz="2000" b="0" i="0">
+                <a:solidFill>
+                  <a:srgbClr val="222B22"/>
+                </a:solidFill>
+                <a:latin typeface="Calibri"/>
+              </a:rPr>
+              <a:t>The one thing you are taking from tonight</a:t>
+            </a:r>
+          </a:p>
+          <a:p>
+            <a:pPr marL="685800" indent="-274320">
+              <a:spcAft>
+                <a:spcPts val="700"/>
+              </a:spcAft>
+            </a:pPr>
+            <a:r>
+              <a:rPr sz="2000" b="1" i="0">
+                <a:solidFill>
+                  <a:srgbClr val="97BC62"/>
+                </a:solidFill>
+                <a:latin typeface="Calibri"/>
+              </a:rPr>
+              <a:t>4   </a:t>
+            </a:r>
+            <a:r>
+              <a:rPr sz="2000" b="0" i="0">
+                <a:solidFill>
+                  <a:srgbClr val="222B22"/>
+                </a:solidFill>
+                <a:latin typeface="Calibri"/>
+              </a:rPr>
+              <a:t>The one practice — committed aloud, or modified to one you will actually keep</a:t>
+            </a:r>
+          </a:p>
+          <a:p>
+            <a:pPr marL="685800" indent="-274320">
+              <a:spcAft>
+                <a:spcPts val="700"/>
+              </a:spcAft>
+            </a:pPr>
+            <a:r>
+              <a:rPr sz="2000" b="1" i="0">
+                <a:solidFill>
+                  <a:srgbClr val="97BC62"/>
+                </a:solidFill>
+                <a:latin typeface="Calibri"/>
+              </a:rPr>
+              <a:t>5   </a:t>
+            </a:r>
+            <a:r>
+              <a:rPr sz="2000" b="0" i="0">
+                <a:solidFill>
+                  <a:srgbClr val="222B22"/>
+                </a:solidFill>
+                <a:latin typeface="Calibri"/>
+              </a:rPr>
+              <a:t>Blessings — specific, witnessed, short</a:t>
+            </a:r>
+          </a:p>
+          <a:p>
+            <a:pPr marL="685800" indent="-274320">
+              <a:spcAft>
+                <a:spcPts val="700"/>
+              </a:spcAft>
+            </a:pPr>
+            <a:r>
+              <a:rPr sz="2000" b="1" i="0">
+                <a:solidFill>
+                  <a:srgbClr val="97BC62"/>
+                </a:solidFill>
+                <a:latin typeface="Calibri"/>
+              </a:rPr>
+              <a:t>6   </a:t>
+            </a:r>
+            <a:r>
+              <a:rPr sz="2000" b="0" i="0">
+                <a:solidFill>
+                  <a:srgbClr val="222B22"/>
+                </a:solidFill>
+                <a:latin typeface="Calibri"/>
+              </a:rPr>
+              <a:t>Closing prayer — and the Aaronic blessing, spoken over each other, face to face</a:t>
+            </a:r>
+          </a:p>
+        </p:txBody>
+      </p:sp>
+      <p:sp>
+        <p:nvSpPr>
+          <p:cNvPr id="6" name="TextBox 6"/>
+          <p:cNvSpPr txBox="1"/>
+          <p:nvPr/>
+        </p:nvSpPr>
+        <p:spPr>
+          <a:xfrm>
+            <a:off x="6766560" y="1737360"/>
+            <a:ext cx="4663440" cy="2926080"/>
+          </a:xfrm>
+          <a:prstGeom prst="rect">
+            <a:avLst/>
+          </a:prstGeom>
+          <a:solidFill>
+            <a:srgbClr val="F1F6EC"/>
+          </a:solidFill>
+        </p:spPr>
+        <p:txBody>
+          <a:bodyPr wrap="square" lIns="91440" tIns="91440" rIns="91440" bIns="91440" anchor="ctr"/>
+          <a:lstStyle/>
+          <a:p>
+            <a:pPr>
+              <a:spcAft>
+                <a:spcPts val="900"/>
+              </a:spcAft>
+            </a:pPr>
+            <a:r>
+              <a:rPr sz="1200" b="1" i="0">
+                <a:solidFill>
+                  <a:srgbClr val="97BC62"/>
+                </a:solidFill>
+                <a:latin typeface="Calibri"/>
+              </a:rPr>
+              <a:t>THE AARONIC BLESSING — NUMBERS 6:24–26</a:t>
+            </a:r>
+          </a:p>
+          <a:p>
+            <a:pPr>
+              <a:spcAft>
+                <a:spcPts val="600"/>
+              </a:spcAft>
+            </a:pPr>
+            <a:r>
+              <a:rPr sz="2400" b="0" i="1">
+                <a:solidFill>
+                  <a:srgbClr val="222B22"/>
+                </a:solidFill>
+                <a:latin typeface="Cambria"/>
+              </a:rPr>
+              <a:t>“The Lord bless you and keep you;</a:t>
+            </a:r>
+          </a:p>
+          <a:p>
+            <a:pPr>
+              <a:spcAft>
+                <a:spcPts val="600"/>
+              </a:spcAft>
+            </a:pPr>
+            <a:r>
+              <a:rPr sz="2400" b="0" i="1">
+                <a:solidFill>
+                  <a:srgbClr val="222B22"/>
+                </a:solidFill>
+                <a:latin typeface="Cambria"/>
+              </a:rPr>
+              <a:t>the Lord make his face to shine upon you, and be gracious to you;</a:t>
+            </a:r>
+          </a:p>
+          <a:p>
+            <a:pPr>
+              <a:spcAft>
+                <a:spcPts val="600"/>
+              </a:spcAft>
+            </a:pPr>
+            <a:r>
+              <a:rPr sz="2400" b="0" i="1">
+                <a:solidFill>
+                  <a:srgbClr val="222B22"/>
+                </a:solidFill>
+                <a:latin typeface="Cambria"/>
+              </a:rPr>
+              <a:t>the Lord lift up his countenance upon you, and give you peace.”</a:t>
+            </a:r>
+          </a:p>
+        </p:txBody>
+      </p:sp>
+      <p:sp>
+        <p:nvSpPr>
+          <p:cNvPr id="90" name="SlideNum"/>
+          <p:cNvSpPr txBox="1"/>
+          <p:nvPr/>
+        </p:nvSpPr>
+        <p:spPr>
+          <a:xfrm>
+            <a:off x="11384280" y="6446520"/>
+            <a:ext cx="640080" cy="292608"/>
+          </a:xfrm>
+          <a:prstGeom prst="rect">
+            <a:avLst/>
+          </a:prstGeom>
+          <a:noFill/>
+        </p:spPr>
+        <p:txBody>
+          <a:bodyPr wrap="none" lIns="0" tIns="0" rIns="45720" bIns="0" anchor="ctr"/>
+          <a:lstStyle/>
+          <a:p>
+            <a:pPr algn="r"/>
+            <a:r>
+              <a:t>162</a:t>
+            </a:r>
+            <a:endParaRPr sz="1000" b="1">
+              <a:solidFill>
+                <a:srgbClr val="7A8A6E"/>
+              </a:solidFill>
+              <a:latin typeface="Calibri"/>
+            </a:endParaRPr>
+          </a:p>
+        </p:txBody>
+      </p:sp>
+    </p:spTree>
+  </p:cSld>
+  <p:clrMapOvr>
+    <a:masterClrMapping/>
+  </p:clrMapOvr>
+</p:sld>
+</file>
+
+<file path=ppt/slides/slide15.xml><?xml version="1.0" encoding="utf-8"?>
+<p:sld xmlns:a="http://schemas.openxmlformats.org/drawingml/2006/main" xmlns:r="http://schemas.openxmlformats.org/officeDocument/2006/relationships" xmlns:p="http://schemas.openxmlformats.org/presentationml/2006/main">
+  <p:cSld>
+    <p:spTree>
+      <p:nvGrpSpPr>
+        <p:cNvPr id="1" name=""/>
+        <p:cNvGrpSpPr/>
+        <p:nvPr/>
+      </p:nvGrpSpPr>
+      <p:grpSpPr>
+        <a:xfrm>
+          <a:off x="0" y="0"/>
+          <a:ext cx="0" cy="0"/>
+          <a:chOff x="0" y="0"/>
+          <a:chExt cx="0" cy="0"/>
+        </a:xfrm>
+      </p:grpSpPr>
+      <p:sp>
+        <p:nvSpPr>
+          <p:cNvPr id="2" name="Rectangle 1"/>
+          <p:cNvSpPr/>
+          <p:nvPr/>
+        </p:nvSpPr>
+        <p:spPr>
+          <a:xfrm>
+            <a:off x="0" y="0"/>
+            <a:ext cx="12191695" cy="6858000"/>
+          </a:xfrm>
+          <a:prstGeom prst="rect">
+            <a:avLst/>
+          </a:prstGeom>
+          <a:solidFill>
+            <a:srgbClr val="FFFFFF"/>
+          </a:solidFill>
+          <a:ln>
+            <a:noFill/>
+          </a:ln>
+        </p:spPr>
+        <p:txBody>
+          <a:bodyPr/>
+          <a:lstStyle/>
+          <a:p>
+            <a:endParaRPr/>
+          </a:p>
+        </p:txBody>
+      </p:sp>
+      <p:sp>
+        <p:nvSpPr>
+          <p:cNvPr id="3" name="TextBox 2"/>
+          <p:cNvSpPr txBox="1"/>
+          <p:nvPr/>
+        </p:nvSpPr>
+        <p:spPr>
+          <a:xfrm>
+            <a:off x="822960" y="502920"/>
+            <a:ext cx="10515600" cy="822960"/>
+          </a:xfrm>
+          <a:prstGeom prst="rect">
+            <a:avLst/>
+          </a:prstGeom>
+          <a:noFill/>
+        </p:spPr>
+        <p:txBody>
+          <a:bodyPr wrap="square">
+            <a:spAutoFit/>
+          </a:bodyPr>
+          <a:lstStyle/>
+          <a:p>
+            <a:pPr algn="l">
+              <a:spcAft>
+                <a:spcPts val="600"/>
+              </a:spcAft>
+            </a:pPr>
+            <a:r>
+              <a:rPr sz="2800" b="1" i="0">
+                <a:solidFill>
+                  <a:srgbClr val="2C5F2D"/>
+                </a:solidFill>
+                <a:latin typeface="Cambria"/>
+              </a:rPr>
               <a:t>The Leader Feedback Round</a:t>
             </a:r>
           </a:p>
@@ -5769,595 +6348,6 @@
           </a:effectLst>
         </p:spPr>
       </p:pic>
-    </p:spTree>
-  </p:cSld>
-  <p:clrMapOvr>
-    <a:masterClrMapping/>
-  </p:clrMapOvr>
-</p:sld>
-</file>
-
-<file path=ppt/slides/slide14.xml><?xml version="1.0" encoding="utf-8"?>
-<p:sld xmlns:a="http://schemas.openxmlformats.org/drawingml/2006/main" xmlns:p="http://schemas.openxmlformats.org/presentationml/2006/main" xmlns:r="http://schemas.openxmlformats.org/officeDocument/2006/relationships">
-  <p:cSld>
-    <p:spTree>
-      <p:nvGrpSpPr>
-        <p:cNvPr id="1" name=""/>
-        <p:cNvGrpSpPr/>
-        <p:nvPr/>
-      </p:nvGrpSpPr>
-      <p:grpSpPr/>
-      <p:sp>
-        <p:nvSpPr>
-          <p:cNvPr id="2" name="Rectangle 1"/>
-          <p:cNvSpPr/>
-          <p:nvPr/>
-        </p:nvSpPr>
-        <p:spPr>
-          <a:xfrm>
-            <a:off x="0" y="0"/>
-            <a:ext cx="12192000" cy="6858000"/>
-          </a:xfrm>
-          <a:prstGeom prst="rect">
-            <a:avLst/>
-          </a:prstGeom>
-          <a:solidFill>
-            <a:srgbClr val="FFFFFF"/>
-          </a:solidFill>
-          <a:ln>
-            <a:noFill/>
-          </a:ln>
-          <a:effectLst/>
-        </p:spPr>
-        <p:style>
-          <a:lnRef idx="1">
-            <a:schemeClr val="accent1"/>
-          </a:lnRef>
-          <a:fillRef idx="3">
-            <a:schemeClr val="accent1"/>
-          </a:fillRef>
-          <a:effectRef idx="2">
-            <a:schemeClr val="accent1"/>
-          </a:effectRef>
-          <a:fontRef idx="minor">
-            <a:schemeClr val="lt1"/>
-          </a:fontRef>
-        </p:style>
-        <p:txBody>
-          <a:bodyPr rtlCol="0" anchor="ctr"/>
-          <a:lstStyle/>
-          <a:p>
-            <a:pPr algn="ctr"/>
-          </a:p>
-        </p:txBody>
-      </p:sp>
-      <p:sp>
-        <p:nvSpPr>
-          <p:cNvPr id="3" name="TextBox 2"/>
-          <p:cNvSpPr txBox="1"/>
-          <p:nvPr/>
-        </p:nvSpPr>
-        <p:spPr>
-          <a:xfrm>
-            <a:off x="822960" y="502920"/>
-            <a:ext cx="10515600" cy="822960"/>
-          </a:xfrm>
-          <a:prstGeom prst="rect">
-            <a:avLst/>
-          </a:prstGeom>
-          <a:noFill/>
-        </p:spPr>
-        <p:txBody>
-          <a:bodyPr wrap="square">
-            <a:spAutoFit/>
-          </a:bodyPr>
-          <a:lstStyle/>
-          <a:p>
-            <a:r>
-              <a:rPr sz="2800" b="1">
-                <a:solidFill>
-                  <a:srgbClr val="2C5F2D"/>
-                </a:solidFill>
-                <a:latin typeface="Cambria"/>
-              </a:rPr>
-              <a:t>Where We Are — the Four Connects</a:t>
-            </a:r>
-          </a:p>
-        </p:txBody>
-      </p:sp>
-      <p:pic>
-        <p:nvPicPr>
-          <p:cNvPr id="4" name="Picture 3" descr="four-connects.png"/>
-          <p:cNvPicPr>
-            <a:picLocks noChangeAspect="1"/>
-          </p:cNvPicPr>
-          <p:nvPr/>
-        </p:nvPicPr>
-        <p:blipFill>
-          <a:blip r:embed="rId2"/>
-          <a:stretch>
-            <a:fillRect/>
-          </a:stretch>
-        </p:blipFill>
-        <p:spPr>
-          <a:xfrm>
-            <a:off x="932688" y="1645920"/>
-            <a:ext cx="10332720" cy="3708663"/>
-          </a:xfrm>
-          <a:prstGeom prst="rect">
-            <a:avLst/>
-          </a:prstGeom>
-        </p:spPr>
-      </p:pic>
-      <p:sp>
-        <p:nvSpPr>
-          <p:cNvPr id="5" name="TextBox 4"/>
-          <p:cNvSpPr txBox="1"/>
-          <p:nvPr/>
-        </p:nvSpPr>
-        <p:spPr>
-          <a:xfrm>
-            <a:off x="822960" y="5623560"/>
-            <a:ext cx="10515600" cy="914400"/>
-          </a:xfrm>
-          <a:prstGeom prst="rect">
-            <a:avLst/>
-          </a:prstGeom>
-          <a:noFill/>
-        </p:spPr>
-        <p:txBody>
-          <a:bodyPr wrap="square">
-            <a:spAutoFit/>
-          </a:bodyPr>
-          <a:lstStyle/>
-          <a:p>
-            <a:r>
-              <a:rPr sz="1800" b="0">
-                <a:solidFill>
-                  <a:srgbClr val="222B22"/>
-                </a:solidFill>
-                <a:latin typeface="Calibri"/>
-              </a:rPr>
-              <a:t>Session 12 returns to the whole map — </a:t>
-            </a:r>
-            <a:r>
-              <a:rPr sz="1800" b="1">
-                <a:solidFill>
-                  <a:srgbClr val="2C5F2D"/>
-                </a:solidFill>
-                <a:latin typeface="Calibri"/>
-              </a:rPr>
-              <a:t>all four Connects</a:t>
-            </a:r>
-            <a:r>
-              <a:rPr sz="1800" b="0">
-                <a:solidFill>
-                  <a:srgbClr val="222B22"/>
-                </a:solidFill>
-                <a:latin typeface="Calibri"/>
-              </a:rPr>
-              <a:t>, rebuilt after the break. Each connection makes the next one real (Matt. 22:37–40).</a:t>
-            </a:r>
-          </a:p>
-        </p:txBody>
-      </p:sp>
-      <p:sp>
-        <p:nvSpPr>
-          <p:cNvPr id="90" name="SlideNum"/>
-          <p:cNvSpPr txBox="1"/>
-          <p:nvPr/>
-        </p:nvSpPr>
-        <p:spPr>
-          <a:xfrm>
-            <a:off x="11384280" y="6446520"/>
-            <a:ext cx="640080" cy="292608"/>
-          </a:xfrm>
-          <a:prstGeom prst="rect">
-            <a:avLst/>
-          </a:prstGeom>
-          <a:noFill/>
-        </p:spPr>
-        <p:txBody>
-          <a:bodyPr wrap="none" lIns="0" tIns="0" rIns="45720" bIns="0" anchor="ctr"/>
-          <a:lstStyle/>
-          <a:p>
-            <a:pPr algn="r"/>
-            <a:r>
-              <a:t>152a</a:t>
-            </a:r>
-            <a:endParaRPr sz="1000" b="1">
-              <a:solidFill>
-                <a:srgbClr val="7A8A6E"/>
-              </a:solidFill>
-              <a:latin typeface="Calibri"/>
-            </a:endParaRPr>
-          </a:p>
-        </p:txBody>
-      </p:sp>
-    </p:spTree>
-  </p:cSld>
-  <p:clrMapOvr>
-    <a:masterClrMapping/>
-  </p:clrMapOvr>
-</p:sld>
-</file>
-
-<file path=ppt/slides/slide15.xml><?xml version="1.0" encoding="utf-8"?>
-<p:sld xmlns:a="http://schemas.openxmlformats.org/drawingml/2006/main" xmlns:p="http://schemas.openxmlformats.org/presentationml/2006/main" xmlns:r="http://schemas.openxmlformats.org/officeDocument/2006/relationships">
-  <p:cSld>
-    <p:spTree>
-      <p:nvGrpSpPr>
-        <p:cNvPr id="1" name=""/>
-        <p:cNvGrpSpPr/>
-        <p:nvPr/>
-      </p:nvGrpSpPr>
-      <p:grpSpPr/>
-      <p:sp>
-        <p:nvSpPr>
-          <p:cNvPr id="2" name="Rectangle 1"/>
-          <p:cNvSpPr/>
-          <p:nvPr/>
-        </p:nvSpPr>
-        <p:spPr>
-          <a:xfrm>
-            <a:off x="0" y="0"/>
-            <a:ext cx="12192000" cy="6858000"/>
-          </a:xfrm>
-          <a:prstGeom prst="rect">
-            <a:avLst/>
-          </a:prstGeom>
-          <a:solidFill>
-            <a:srgbClr val="FFFFFF"/>
-          </a:solidFill>
-          <a:ln>
-            <a:noFill/>
-          </a:ln>
-          <a:effectLst/>
-        </p:spPr>
-        <p:style>
-          <a:lnRef idx="1">
-            <a:schemeClr val="accent1"/>
-          </a:lnRef>
-          <a:fillRef idx="3">
-            <a:schemeClr val="accent1"/>
-          </a:fillRef>
-          <a:effectRef idx="2">
-            <a:schemeClr val="accent1"/>
-          </a:effectRef>
-          <a:fontRef idx="minor">
-            <a:schemeClr val="lt1"/>
-          </a:fontRef>
-        </p:style>
-        <p:txBody>
-          <a:bodyPr rtlCol="0" anchor="ctr"/>
-          <a:lstStyle/>
-          <a:p>
-            <a:pPr algn="ctr"/>
-          </a:p>
-        </p:txBody>
-      </p:sp>
-      <p:sp>
-        <p:nvSpPr>
-          <p:cNvPr id="3" name="TextBox 2"/>
-          <p:cNvSpPr txBox="1"/>
-          <p:nvPr/>
-        </p:nvSpPr>
-        <p:spPr>
-          <a:xfrm>
-            <a:off x="822960" y="502920"/>
-            <a:ext cx="10515600" cy="822960"/>
-          </a:xfrm>
-          <a:prstGeom prst="rect">
-            <a:avLst/>
-          </a:prstGeom>
-          <a:noFill/>
-        </p:spPr>
-        <p:txBody>
-          <a:bodyPr wrap="square">
-            <a:spAutoFit/>
-          </a:bodyPr>
-          <a:lstStyle/>
-          <a:p>
-            <a:r>
-              <a:rPr sz="2800" b="1">
-                <a:solidFill>
-                  <a:srgbClr val="2C5F2D"/>
-                </a:solidFill>
-                <a:latin typeface="Cambria"/>
-              </a:rPr>
-              <a:t>The Take-Home Sheet — the Daily Rhythm</a:t>
-            </a:r>
-          </a:p>
-        </p:txBody>
-      </p:sp>
-      <p:pic>
-        <p:nvPicPr>
-          <p:cNvPr id="4" name="Picture 3" descr="s12_part1.png"/>
-          <p:cNvPicPr>
-            <a:picLocks noChangeAspect="1"/>
-          </p:cNvPicPr>
-          <p:nvPr/>
-        </p:nvPicPr>
-        <p:blipFill>
-          <a:blip r:embed="rId2"/>
-          <a:stretch>
-            <a:fillRect/>
-          </a:stretch>
-        </p:blipFill>
-        <p:spPr>
-          <a:xfrm>
-            <a:off x="1798167" y="1463040"/>
-            <a:ext cx="8595360" cy="4039819"/>
-          </a:xfrm>
-          <a:prstGeom prst="rect">
-            <a:avLst/>
-          </a:prstGeom>
-          <a:ln w="12700">
-            <a:solidFill>
-              <a:srgbClr val="C8C8C8"/>
-            </a:solidFill>
-          </a:ln>
-        </p:spPr>
-      </p:pic>
-      <p:sp>
-        <p:nvSpPr>
-          <p:cNvPr id="5" name="TextBox 4"/>
-          <p:cNvSpPr txBox="1"/>
-          <p:nvPr/>
-        </p:nvSpPr>
-        <p:spPr>
-          <a:xfrm>
-            <a:off x="822960" y="6355080"/>
-            <a:ext cx="10515600" cy="411480"/>
-          </a:xfrm>
-          <a:prstGeom prst="rect">
-            <a:avLst/>
-          </a:prstGeom>
-          <a:noFill/>
-        </p:spPr>
-        <p:txBody>
-          <a:bodyPr wrap="square">
-            <a:spAutoFit/>
-          </a:bodyPr>
-          <a:lstStyle/>
-          <a:p>
-            <a:r>
-              <a:rPr sz="1400" i="1">
-                <a:solidFill>
-                  <a:srgbClr val="595959"/>
-                </a:solidFill>
-                <a:latin typeface="Calibri"/>
-              </a:rPr>
-              <a:t>Handed out now — this is the sheet in your hands.</a:t>
-            </a:r>
-          </a:p>
-        </p:txBody>
-      </p:sp>
-      <p:sp>
-        <p:nvSpPr>
-          <p:cNvPr id="90" name="SlideNum"/>
-          <p:cNvSpPr txBox="1"/>
-          <p:nvPr/>
-        </p:nvSpPr>
-        <p:spPr>
-          <a:xfrm>
-            <a:off x="11384280" y="6446520"/>
-            <a:ext cx="640080" cy="292608"/>
-          </a:xfrm>
-          <a:prstGeom prst="rect">
-            <a:avLst/>
-          </a:prstGeom>
-          <a:noFill/>
-        </p:spPr>
-        <p:txBody>
-          <a:bodyPr wrap="none" lIns="0" tIns="0" rIns="45720" bIns="0" anchor="ctr"/>
-          <a:lstStyle/>
-          <a:p>
-            <a:pPr algn="r"/>
-            <a:r>
-              <a:t>161</a:t>
-            </a:r>
-            <a:endParaRPr sz="1000" b="1">
-              <a:solidFill>
-                <a:srgbClr val="7A8A6E"/>
-              </a:solidFill>
-              <a:latin typeface="Calibri"/>
-            </a:endParaRPr>
-          </a:p>
-        </p:txBody>
-      </p:sp>
-    </p:spTree>
-  </p:cSld>
-  <p:clrMapOvr>
-    <a:masterClrMapping/>
-  </p:clrMapOvr>
-</p:sld>
-</file>
-
-<file path=ppt/slides/slide16.xml><?xml version="1.0" encoding="utf-8"?>
-<p:sld xmlns:a="http://schemas.openxmlformats.org/drawingml/2006/main" xmlns:p="http://schemas.openxmlformats.org/presentationml/2006/main" xmlns:r="http://schemas.openxmlformats.org/officeDocument/2006/relationships">
-  <p:cSld>
-    <p:spTree>
-      <p:nvGrpSpPr>
-        <p:cNvPr id="1" name=""/>
-        <p:cNvGrpSpPr/>
-        <p:nvPr/>
-      </p:nvGrpSpPr>
-      <p:grpSpPr/>
-      <p:sp>
-        <p:nvSpPr>
-          <p:cNvPr id="2" name="Rectangle 1"/>
-          <p:cNvSpPr/>
-          <p:nvPr/>
-        </p:nvSpPr>
-        <p:spPr>
-          <a:xfrm>
-            <a:off x="0" y="0"/>
-            <a:ext cx="12192000" cy="6858000"/>
-          </a:xfrm>
-          <a:prstGeom prst="rect">
-            <a:avLst/>
-          </a:prstGeom>
-          <a:solidFill>
-            <a:srgbClr val="FFFFFF"/>
-          </a:solidFill>
-          <a:ln>
-            <a:noFill/>
-          </a:ln>
-          <a:effectLst/>
-        </p:spPr>
-        <p:style>
-          <a:lnRef idx="1">
-            <a:schemeClr val="accent1"/>
-          </a:lnRef>
-          <a:fillRef idx="3">
-            <a:schemeClr val="accent1"/>
-          </a:fillRef>
-          <a:effectRef idx="2">
-            <a:schemeClr val="accent1"/>
-          </a:effectRef>
-          <a:fontRef idx="minor">
-            <a:schemeClr val="lt1"/>
-          </a:fontRef>
-        </p:style>
-        <p:txBody>
-          <a:bodyPr rtlCol="0" anchor="ctr"/>
-          <a:lstStyle/>
-          <a:p>
-            <a:pPr algn="ctr"/>
-          </a:p>
-        </p:txBody>
-      </p:sp>
-      <p:sp>
-        <p:nvSpPr>
-          <p:cNvPr id="3" name="TextBox 2"/>
-          <p:cNvSpPr txBox="1"/>
-          <p:nvPr/>
-        </p:nvSpPr>
-        <p:spPr>
-          <a:xfrm>
-            <a:off x="822960" y="502920"/>
-            <a:ext cx="10515600" cy="822960"/>
-          </a:xfrm>
-          <a:prstGeom prst="rect">
-            <a:avLst/>
-          </a:prstGeom>
-          <a:noFill/>
-        </p:spPr>
-        <p:txBody>
-          <a:bodyPr wrap="square">
-            <a:spAutoFit/>
-          </a:bodyPr>
-          <a:lstStyle/>
-          <a:p>
-            <a:r>
-              <a:rPr sz="2800" b="1">
-                <a:solidFill>
-                  <a:srgbClr val="2C5F2D"/>
-                </a:solidFill>
-                <a:latin typeface="Cambria"/>
-              </a:rPr>
-              <a:t>The Take-Home Sheet — the Four Parts</a:t>
-            </a:r>
-          </a:p>
-        </p:txBody>
-      </p:sp>
-      <p:pic>
-        <p:nvPicPr>
-          <p:cNvPr id="4" name="Picture 3" descr="s12_part2.png"/>
-          <p:cNvPicPr>
-            <a:picLocks noChangeAspect="1"/>
-          </p:cNvPicPr>
-          <p:nvPr/>
-        </p:nvPicPr>
-        <p:blipFill>
-          <a:blip r:embed="rId2"/>
-          <a:stretch>
-            <a:fillRect/>
-          </a:stretch>
-        </p:blipFill>
-        <p:spPr>
-          <a:xfrm>
-            <a:off x="2066004" y="1463040"/>
-            <a:ext cx="8059687" cy="4709160"/>
-          </a:xfrm>
-          <a:prstGeom prst="rect">
-            <a:avLst/>
-          </a:prstGeom>
-          <a:ln w="12700">
-            <a:solidFill>
-              <a:srgbClr val="C8C8C8"/>
-            </a:solidFill>
-          </a:ln>
-        </p:spPr>
-      </p:pic>
-      <p:sp>
-        <p:nvSpPr>
-          <p:cNvPr id="5" name="TextBox 4"/>
-          <p:cNvSpPr txBox="1"/>
-          <p:nvPr/>
-        </p:nvSpPr>
-        <p:spPr>
-          <a:xfrm>
-            <a:off x="822960" y="6355080"/>
-            <a:ext cx="10515600" cy="411480"/>
-          </a:xfrm>
-          <a:prstGeom prst="rect">
-            <a:avLst/>
-          </a:prstGeom>
-          <a:noFill/>
-        </p:spPr>
-        <p:txBody>
-          <a:bodyPr wrap="square">
-            <a:spAutoFit/>
-          </a:bodyPr>
-          <a:lstStyle/>
-          <a:p>
-            <a:r>
-              <a:rPr sz="1400" i="1">
-                <a:solidFill>
-                  <a:srgbClr val="595959"/>
-                </a:solidFill>
-                <a:latin typeface="Calibri"/>
-              </a:rPr>
-              <a:t>One practice at a time — and a partner expecting you at the end of week one.</a:t>
-            </a:r>
-          </a:p>
-        </p:txBody>
-      </p:sp>
-      <p:sp>
-        <p:nvSpPr>
-          <p:cNvPr id="90" name="SlideNum"/>
-          <p:cNvSpPr txBox="1"/>
-          <p:nvPr/>
-        </p:nvSpPr>
-        <p:spPr>
-          <a:xfrm>
-            <a:off x="11384280" y="6446520"/>
-            <a:ext cx="640080" cy="292608"/>
-          </a:xfrm>
-          <a:prstGeom prst="rect">
-            <a:avLst/>
-          </a:prstGeom>
-          <a:noFill/>
-        </p:spPr>
-        <p:txBody>
-          <a:bodyPr wrap="none" lIns="0" tIns="0" rIns="45720" bIns="0" anchor="ctr"/>
-          <a:lstStyle/>
-          <a:p>
-            <a:pPr algn="r"/>
-            <a:r>
-              <a:t>161a</a:t>
-            </a:r>
-            <a:endParaRPr sz="1000" b="1">
-              <a:solidFill>
-                <a:srgbClr val="7A8A6E"/>
-              </a:solidFill>
-              <a:latin typeface="Calibri"/>
-            </a:endParaRPr>
-          </a:p>
-        </p:txBody>
-      </p:sp>
     </p:spTree>
   </p:cSld>
   <p:clrMapOvr>
@@ -6616,7 +6606,7 @@
 </file>
 
 <file path=ppt/slides/slide3.xml><?xml version="1.0" encoding="utf-8"?>
-<p:sld xmlns:a="http://schemas.openxmlformats.org/drawingml/2006/main" xmlns:r="http://schemas.openxmlformats.org/officeDocument/2006/relationships" xmlns:p="http://schemas.openxmlformats.org/presentationml/2006/main">
+<p:sld xmlns:a="http://schemas.openxmlformats.org/drawingml/2006/main" xmlns:p="http://schemas.openxmlformats.org/presentationml/2006/main" xmlns:r="http://schemas.openxmlformats.org/officeDocument/2006/relationships">
   <p:cSld>
     <p:spTree>
       <p:nvGrpSpPr>
@@ -6624,14 +6614,7 @@
         <p:cNvGrpSpPr/>
         <p:nvPr/>
       </p:nvGrpSpPr>
-      <p:grpSpPr>
-        <a:xfrm>
-          <a:off x="0" y="0"/>
-          <a:ext cx="0" cy="0"/>
-          <a:chOff x="0" y="0"/>
-          <a:chExt cx="0" cy="0"/>
-        </a:xfrm>
-      </p:grpSpPr>
+      <p:grpSpPr/>
       <p:sp>
         <p:nvSpPr>
           <p:cNvPr id="2" name="Rectangle 1"/>
@@ -6641,7 +6624,7 @@
         <p:spPr>
           <a:xfrm>
             <a:off x="0" y="0"/>
-            <a:ext cx="12191695" cy="6858000"/>
+            <a:ext cx="12192000" cy="6858000"/>
           </a:xfrm>
           <a:prstGeom prst="rect">
             <a:avLst/>
@@ -6673,7 +6656,6 @@
           <a:lstStyle/>
           <a:p>
             <a:pPr algn="ctr"/>
-            <a:endParaRPr/>
           </a:p>
         </p:txBody>
       </p:sp>
@@ -6699,33 +6681,28 @@
           </a:bodyPr>
           <a:lstStyle/>
           <a:p>
-            <a:pPr algn="l">
-              <a:spcAft>
-                <a:spcPts val="600"/>
-              </a:spcAft>
-            </a:pPr>
-            <a:r>
-              <a:rPr sz="2800" b="1" i="0">
+            <a:r>
+              <a:rPr sz="2800" b="1">
                 <a:solidFill>
                   <a:srgbClr val="2C5F2D"/>
                 </a:solidFill>
                 <a:latin typeface="Cambria"/>
               </a:rPr>
-              <a:t>Session 12 — Tonight’s Road</a:t>
-            </a:r>
-          </a:p>
-        </p:txBody>
-      </p:sp>
-      <p:sp>
-        <p:nvSpPr>
-          <p:cNvPr id="4" name="TextBox 3"/>
+              <a:t>Where We Are — the Four Connects</a:t>
+            </a:r>
+          </a:p>
+        </p:txBody>
+      </p:sp>
+      <p:sp>
+        <p:nvSpPr>
+          <p:cNvPr id="5" name="TextBox 4"/>
           <p:cNvSpPr txBox="1"/>
           <p:nvPr/>
         </p:nvSpPr>
         <p:spPr>
           <a:xfrm>
-            <a:off x="822960" y="1508760"/>
-            <a:ext cx="7040880" cy="4754880"/>
+            <a:off x="822960" y="5623560"/>
+            <a:ext cx="10515600" cy="914400"/>
           </a:xfrm>
           <a:prstGeom prst="rect">
             <a:avLst/>
@@ -6738,228 +6715,32 @@
           </a:bodyPr>
           <a:lstStyle/>
           <a:p>
-            <a:pPr>
-              <a:spcAft>
-                <a:spcPts val="500"/>
-              </a:spcAft>
-            </a:pPr>
-            <a:r>
-              <a:rPr sz="2800" b="1">
-                <a:solidFill>
-                  <a:srgbClr val="97BC62"/>
-                </a:solidFill>
-                <a:latin typeface="Calibri"/>
-              </a:rPr>
-              <a:t>1   </a:t>
-            </a:r>
-            <a:r>
-              <a:rPr sz="2800">
+            <a:r>
+              <a:rPr sz="1800" b="0">
                 <a:solidFill>
                   <a:srgbClr val="222B22"/>
                 </a:solidFill>
                 <a:latin typeface="Calibri"/>
               </a:rPr>
-              <a:t>Opening container — run slow</a:t>
-            </a:r>
-          </a:p>
-          <a:p>
-            <a:pPr>
-              <a:spcAft>
-                <a:spcPts val="500"/>
-              </a:spcAft>
-            </a:pPr>
-            <a:r>
-              <a:rPr sz="2800" b="1">
-                <a:solidFill>
-                  <a:srgbClr val="97BC62"/>
-                </a:solidFill>
-                <a:latin typeface="Calibri"/>
-              </a:rPr>
-              <a:t>2   </a:t>
-            </a:r>
-            <a:r>
-              <a:rPr sz="2800">
+              <a:t>Session 12 returns to the whole map — </a:t>
+            </a:r>
+            <a:r>
+              <a:rPr sz="1800" b="1">
+                <a:solidFill>
+                  <a:srgbClr val="2C5F2D"/>
+                </a:solidFill>
+                <a:latin typeface="Calibri"/>
+              </a:rPr>
+              <a:t>all four Connects</a:t>
+            </a:r>
+            <a:r>
+              <a:rPr sz="1800" b="0">
                 <a:solidFill>
                   <a:srgbClr val="222B22"/>
                 </a:solidFill>
                 <a:latin typeface="Calibri"/>
               </a:rPr>
-              <a:t>New every morning — Lam. 3:22–23, Ps. 126</a:t>
-            </a:r>
-          </a:p>
-          <a:p>
-            <a:pPr>
-              <a:spcAft>
-                <a:spcPts val="500"/>
-              </a:spcAft>
-            </a:pPr>
-            <a:r>
-              <a:rPr sz="2800" b="1">
-                <a:solidFill>
-                  <a:srgbClr val="97BC62"/>
-                </a:solidFill>
-                <a:latin typeface="Calibri"/>
-              </a:rPr>
-              <a:t>3   </a:t>
-            </a:r>
-            <a:r>
-              <a:rPr sz="2800">
-                <a:solidFill>
-                  <a:srgbClr val="222B22"/>
-                </a:solidFill>
-                <a:latin typeface="Calibri"/>
-              </a:rPr>
-              <a:t>“What held?”</a:t>
-            </a:r>
-          </a:p>
-          <a:p>
-            <a:pPr>
-              <a:spcAft>
-                <a:spcPts val="500"/>
-              </a:spcAft>
-            </a:pPr>
-            <a:r>
-              <a:rPr sz="2800" b="1">
-                <a:solidFill>
-                  <a:srgbClr val="97BC62"/>
-                </a:solidFill>
-                <a:latin typeface="Calibri"/>
-              </a:rPr>
-              <a:t>4   </a:t>
-            </a:r>
-            <a:r>
-              <a:rPr sz="2800">
-                <a:solidFill>
-                  <a:srgbClr val="222B22"/>
-                </a:solidFill>
-                <a:latin typeface="Calibri"/>
-              </a:rPr>
-              <a:t>The walk home</a:t>
-            </a:r>
-          </a:p>
-          <a:p>
-            <a:pPr>
-              <a:spcAft>
-                <a:spcPts val="500"/>
-              </a:spcAft>
-            </a:pPr>
-            <a:r>
-              <a:rPr sz="2800" b="1">
-                <a:solidFill>
-                  <a:srgbClr val="97BC62"/>
-                </a:solidFill>
-                <a:latin typeface="Calibri"/>
-              </a:rPr>
-              <a:t>5   </a:t>
-            </a:r>
-            <a:r>
-              <a:rPr sz="2800">
-                <a:solidFill>
-                  <a:srgbClr val="222B22"/>
-                </a:solidFill>
-                <a:latin typeface="Calibri"/>
-              </a:rPr>
-              <a:t>Re-anchoring the year — and the door out, once</a:t>
-            </a:r>
-          </a:p>
-          <a:p>
-            <a:pPr>
-              <a:spcAft>
-                <a:spcPts val="500"/>
-              </a:spcAft>
-            </a:pPr>
-            <a:r>
-              <a:rPr sz="2800" b="1">
-                <a:solidFill>
-                  <a:srgbClr val="97BC62"/>
-                </a:solidFill>
-                <a:latin typeface="Calibri"/>
-              </a:rPr>
-              <a:t>6   </a:t>
-            </a:r>
-            <a:r>
-              <a:rPr sz="2800">
-                <a:solidFill>
-                  <a:srgbClr val="222B22"/>
-                </a:solidFill>
-                <a:latin typeface="Calibri"/>
-              </a:rPr>
-              <a:t>Between-session practice — restart one</a:t>
-            </a:r>
-          </a:p>
-          <a:p>
-            <a:pPr>
-              <a:spcAft>
-                <a:spcPts val="500"/>
-              </a:spcAft>
-            </a:pPr>
-            <a:r>
-              <a:rPr sz="2800" b="1">
-                <a:solidFill>
-                  <a:srgbClr val="97BC62"/>
-                </a:solidFill>
-                <a:latin typeface="Calibri"/>
-              </a:rPr>
-              <a:t>7   </a:t>
-            </a:r>
-            <a:r>
-              <a:rPr sz="2800">
-                <a:solidFill>
-                  <a:srgbClr val="222B22"/>
-                </a:solidFill>
-                <a:latin typeface="Calibri"/>
-              </a:rPr>
-              <a:t>Closing container</a:t>
-            </a:r>
-          </a:p>
-          <a:p>
-            <a:pPr>
-              <a:spcAft>
-                <a:spcPts val="500"/>
-              </a:spcAft>
-            </a:pPr>
-            <a:r>
-              <a:rPr sz="2800" b="1">
-                <a:solidFill>
-                  <a:srgbClr val="97BC62"/>
-                </a:solidFill>
-                <a:latin typeface="Calibri"/>
-              </a:rPr>
-              <a:t>8   </a:t>
-            </a:r>
-            <a:r>
-              <a:rPr sz="2800">
-                <a:solidFill>
-                  <a:srgbClr val="222B22"/>
-                </a:solidFill>
-                <a:latin typeface="Calibri"/>
-              </a:rPr>
-              <a:t>Leader Feedback Round</a:t>
-            </a:r>
-          </a:p>
-          <a:p>
-            <a:pPr>
-              <a:spcAft>
-                <a:spcPts val="500"/>
-              </a:spcAft>
-            </a:pPr>
-            <a:r>
-              <a:rPr sz="2800" b="1">
-                <a:solidFill>
-                  <a:srgbClr val="97BC62"/>
-                </a:solidFill>
-                <a:latin typeface="Calibri"/>
-              </a:rPr>
-              <a:t>9   </a:t>
-            </a:r>
-            <a:r>
-              <a:rPr sz="2800">
-                <a:solidFill>
-                  <a:srgbClr val="222B22"/>
-                </a:solidFill>
-                <a:latin typeface="Calibri"/>
-              </a:rPr>
-              <a:t>Aaronic blessing and sending</a:t>
+              <a:t>, rebuilt after the break. Each connection makes the next one real (Matt. 22:37–40).</a:t>
             </a:r>
           </a:p>
         </p:txBody>
@@ -6986,7 +6767,7 @@
           <a:p>
             <a:pPr algn="r"/>
             <a:r>
-              <a:t>153</a:t>
+              <a:t>152a</a:t>
             </a:r>
             <a:endParaRPr sz="1000" b="1">
               <a:solidFill>
@@ -6999,38 +6780,26 @@
       </p:sp>
       <p:pic>
         <p:nvPicPr>
-          <p:cNvPr id="31" name="Picture 31" descr="the open container bowl"/>
+          <p:cNvPr id="91" name="Picture 90" descr="four-connects.png"/>
           <p:cNvPicPr>
             <a:picLocks noChangeAspect="1"/>
           </p:cNvPicPr>
           <p:nvPr/>
         </p:nvPicPr>
         <p:blipFill>
-          <a:blip r:embed="rId3"/>
+          <a:blip r:embed="rId4"/>
           <a:stretch>
             <a:fillRect/>
           </a:stretch>
         </p:blipFill>
         <p:spPr>
           <a:xfrm>
-            <a:off x="8001000" y="1554480"/>
-            <a:ext cx="3017520" cy="4526280"/>
+            <a:off x="932688" y="1645920"/>
+            <a:ext cx="10332720" cy="3708663"/>
           </a:xfrm>
           <a:prstGeom prst="rect">
             <a:avLst/>
           </a:prstGeom>
-          <a:ln w="76200">
-            <a:solidFill>
-              <a:srgbClr val="FFFFFF"/>
-            </a:solidFill>
-          </a:ln>
-          <a:effectLst>
-            <a:outerShdw blurRad="63500" dist="25400" dir="5400000" rotWithShape="0">
-              <a:srgbClr val="000000">
-                <a:alpha val="35000"/>
-              </a:srgbClr>
-            </a:outerShdw>
-          </a:effectLst>
         </p:spPr>
       </p:pic>
     </p:spTree>
@@ -7078,11 +6847,27 @@
           <a:ln>
             <a:noFill/>
           </a:ln>
-        </p:spPr>
-        <p:txBody>
-          <a:bodyPr/>
-          <a:lstStyle/>
-          <a:p>
+          <a:effectLst/>
+        </p:spPr>
+        <p:style>
+          <a:lnRef idx="1">
+            <a:schemeClr val="accent1"/>
+          </a:lnRef>
+          <a:fillRef idx="3">
+            <a:schemeClr val="accent1"/>
+          </a:fillRef>
+          <a:effectRef idx="2">
+            <a:schemeClr val="accent1"/>
+          </a:effectRef>
+          <a:fontRef idx="minor">
+            <a:schemeClr val="lt1"/>
+          </a:fontRef>
+        </p:style>
+        <p:txBody>
+          <a:bodyPr rtlCol="0" anchor="ctr"/>
+          <a:lstStyle/>
+          <a:p>
+            <a:pPr algn="ctr"/>
             <a:endParaRPr/>
           </a:p>
         </p:txBody>
@@ -7121,21 +6906,21 @@
                 </a:solidFill>
                 <a:latin typeface="Cambria"/>
               </a:rPr>
-              <a:t>Opening Container — Run Slow</a:t>
-            </a:r>
-          </a:p>
-        </p:txBody>
-      </p:sp>
-      <p:sp>
-        <p:nvSpPr>
-          <p:cNvPr id="4" name="TextBox 4"/>
+              <a:t>Session 12 — Tonight’s Road</a:t>
+            </a:r>
+          </a:p>
+        </p:txBody>
+      </p:sp>
+      <p:sp>
+        <p:nvSpPr>
+          <p:cNvPr id="4" name="TextBox 3"/>
           <p:cNvSpPr txBox="1"/>
           <p:nvPr/>
         </p:nvSpPr>
         <p:spPr>
           <a:xfrm>
-            <a:off x="822960" y="1600200"/>
-            <a:ext cx="5669280" cy="4572000"/>
+            <a:off x="822960" y="1508760"/>
+            <a:ext cx="7040880" cy="4754880"/>
           </a:xfrm>
           <a:prstGeom prst="rect">
             <a:avLst/>
@@ -7143,161 +6928,233 @@
           <a:noFill/>
         </p:spPr>
         <p:txBody>
-          <a:bodyPr wrap="square" lIns="91440" tIns="91440" rIns="91440" bIns="91440"/>
-          <a:lstStyle/>
-          <a:p>
-            <a:pPr marL="274320" indent="-274320">
+          <a:bodyPr wrap="square">
+            <a:spAutoFit/>
+          </a:bodyPr>
+          <a:lstStyle/>
+          <a:p>
+            <a:pPr>
               <a:spcAft>
-                <a:spcPts val="800"/>
+                <a:spcPts val="500"/>
               </a:spcAft>
             </a:pPr>
             <a:r>
-              <a:rPr sz="2000" b="1" i="0">
+              <a:rPr sz="2800" b="1">
                 <a:solidFill>
                   <a:srgbClr val="97BC62"/>
                 </a:solidFill>
                 <a:latin typeface="Calibri"/>
               </a:rPr>
-              <a:t>•  </a:t>
-            </a:r>
-            <a:r>
-              <a:rPr sz="2000" b="0" i="0">
+              <a:t>1   </a:t>
+            </a:r>
+            <a:r>
+              <a:rPr sz="2800">
                 <a:solidFill>
                   <a:srgbClr val="222B22"/>
                 </a:solidFill>
                 <a:latin typeface="Calibri"/>
               </a:rPr>
-              <a:t>Two weeks without Wednesdays — containers don’t keep. They are rebuilt every time, by the same small faithful steps</a:t>
-            </a:r>
-          </a:p>
-          <a:p>
-            <a:pPr marL="274320" indent="-274320">
+              <a:t>Opening container — run slow</a:t>
+            </a:r>
+          </a:p>
+          <a:p>
+            <a:pPr>
               <a:spcAft>
-                <a:spcPts val="800"/>
+                <a:spcPts val="500"/>
               </a:spcAft>
             </a:pPr>
             <a:r>
-              <a:rPr sz="2000" b="1" i="0">
+              <a:rPr sz="2800" b="1">
                 <a:solidFill>
                   <a:srgbClr val="97BC62"/>
                 </a:solidFill>
                 <a:latin typeface="Calibri"/>
               </a:rPr>
-              <a:t>•  </a:t>
-            </a:r>
-            <a:r>
-              <a:rPr sz="2000" b="0" i="0">
+              <a:t>2   </a:t>
+            </a:r>
+            <a:r>
+              <a:rPr sz="2800">
                 <a:solidFill>
                   <a:srgbClr val="222B22"/>
                 </a:solidFill>
                 <a:latin typeface="Calibri"/>
               </a:rPr>
-              <a:t>“Tonight we open it slowly, on purpose. Don’t rush the steps. There is nowhere else we need to be.”</a:t>
-            </a:r>
-          </a:p>
-          <a:p>
-            <a:pPr marL="274320" indent="-274320">
+              <a:t>New every morning — Lam. 3:22–23, Ps. 126</a:t>
+            </a:r>
+          </a:p>
+          <a:p>
+            <a:pPr>
               <a:spcAft>
-                <a:spcPts val="800"/>
+                <a:spcPts val="500"/>
               </a:spcAft>
             </a:pPr>
             <a:r>
-              <a:rPr sz="2000" b="1" i="0">
+              <a:rPr sz="2800" b="1">
                 <a:solidFill>
                   <a:srgbClr val="97BC62"/>
                 </a:solidFill>
                 <a:latin typeface="Calibri"/>
               </a:rPr>
-              <a:t>•  </a:t>
-            </a:r>
-            <a:r>
-              <a:rPr sz="2000" b="0" i="0">
+              <a:t>3   </a:t>
+            </a:r>
+            <a:r>
+              <a:rPr sz="2800">
                 <a:solidFill>
                   <a:srgbClr val="222B22"/>
                 </a:solidFill>
                 <a:latin typeface="Calibri"/>
               </a:rPr>
-              <a:t>The full eight steps — phones away, standing circle, put out / bring in, the prayer</a:t>
-            </a:r>
-          </a:p>
-          <a:p>
-            <a:pPr marL="274320" indent="-274320">
+              <a:t>“What held?”</a:t>
+            </a:r>
+          </a:p>
+          <a:p>
+            <a:pPr>
               <a:spcAft>
-                <a:spcPts val="800"/>
+                <a:spcPts val="500"/>
               </a:spcAft>
             </a:pPr>
             <a:r>
-              <a:rPr sz="2000" b="1" i="0">
+              <a:rPr sz="2800" b="1">
                 <a:solidFill>
                   <a:srgbClr val="97BC62"/>
                 </a:solidFill>
                 <a:latin typeface="Calibri"/>
               </a:rPr>
-              <a:t>•  </a:t>
-            </a:r>
-            <a:r>
-              <a:rPr sz="2000" b="0" i="0">
+              <a:t>4   </a:t>
+            </a:r>
+            <a:r>
+              <a:rPr sz="2800">
                 <a:solidFill>
                   <a:srgbClr val="222B22"/>
                 </a:solidFill>
                 <a:latin typeface="Calibri"/>
               </a:rPr>
-              <a:t>One-word check-in: “One word for how you actually are right now — not how you usually are, not how you should be.” Let each word have a breath</a:t>
-            </a:r>
-          </a:p>
-        </p:txBody>
-      </p:sp>
-      <p:sp>
-        <p:nvSpPr>
-          <p:cNvPr id="6" name="TextBox 6"/>
-          <p:cNvSpPr txBox="1"/>
-          <p:nvPr/>
-        </p:nvSpPr>
-        <p:spPr>
-          <a:xfrm>
-            <a:off x="6766560" y="1737360"/>
-            <a:ext cx="4663440" cy="2194560"/>
-          </a:xfrm>
-          <a:prstGeom prst="rect">
-            <a:avLst/>
-          </a:prstGeom>
-          <a:solidFill>
-            <a:srgbClr val="F1F6EC"/>
-          </a:solidFill>
-        </p:spPr>
-        <p:txBody>
-          <a:bodyPr wrap="square" lIns="91440" tIns="91440" rIns="91440" bIns="91440" anchor="ctr"/>
-          <a:lstStyle/>
+              <a:t>The walk home</a:t>
+            </a:r>
+          </a:p>
           <a:p>
             <a:pPr>
               <a:spcAft>
-                <a:spcPts val="900"/>
+                <a:spcPts val="500"/>
               </a:spcAft>
             </a:pPr>
             <a:r>
-              <a:rPr sz="1800" b="1" i="0">
+              <a:rPr sz="2800" b="1">
                 <a:solidFill>
                   <a:srgbClr val="97BC62"/>
                 </a:solidFill>
                 <a:latin typeface="Calibri"/>
               </a:rPr>
-              <a:t>THE SPOKEN COMMITMENT</a:t>
+              <a:t>5   </a:t>
+            </a:r>
+            <a:r>
+              <a:rPr sz="2800">
+                <a:solidFill>
+                  <a:srgbClr val="222B22"/>
+                </a:solidFill>
+                <a:latin typeface="Calibri"/>
+              </a:rPr>
+              <a:t>Re-anchoring the year — and the door out, once</a:t>
             </a:r>
           </a:p>
           <a:p>
             <a:pPr>
               <a:spcAft>
-                <a:spcPts val="600"/>
+                <a:spcPts val="500"/>
               </a:spcAft>
             </a:pPr>
             <a:r>
-              <a:rPr sz="2400" b="0" i="1">
+              <a:rPr sz="2800" b="1">
+                <a:solidFill>
+                  <a:srgbClr val="97BC62"/>
+                </a:solidFill>
+                <a:latin typeface="Calibri"/>
+              </a:rPr>
+              <a:t>6   </a:t>
+            </a:r>
+            <a:r>
+              <a:rPr sz="2800">
                 <a:solidFill>
                   <a:srgbClr val="222B22"/>
                 </a:solidFill>
-                <a:latin typeface="Cambria"/>
-              </a:rPr>
-              <a:t>“I am here. I am paying attention. I am willing to be moved.”</a:t>
+                <a:latin typeface="Calibri"/>
+              </a:rPr>
+              <a:t>Between-session practice — restart one</a:t>
+            </a:r>
+          </a:p>
+          <a:p>
+            <a:pPr>
+              <a:spcAft>
+                <a:spcPts val="500"/>
+              </a:spcAft>
+            </a:pPr>
+            <a:r>
+              <a:rPr sz="2800" b="1">
+                <a:solidFill>
+                  <a:srgbClr val="97BC62"/>
+                </a:solidFill>
+                <a:latin typeface="Calibri"/>
+              </a:rPr>
+              <a:t>7   </a:t>
+            </a:r>
+            <a:r>
+              <a:rPr sz="2800">
+                <a:solidFill>
+                  <a:srgbClr val="222B22"/>
+                </a:solidFill>
+                <a:latin typeface="Calibri"/>
+              </a:rPr>
+              <a:t>Closing container</a:t>
+            </a:r>
+          </a:p>
+          <a:p>
+            <a:pPr>
+              <a:spcAft>
+                <a:spcPts val="500"/>
+              </a:spcAft>
+            </a:pPr>
+            <a:r>
+              <a:rPr sz="2800" b="1">
+                <a:solidFill>
+                  <a:srgbClr val="97BC62"/>
+                </a:solidFill>
+                <a:latin typeface="Calibri"/>
+              </a:rPr>
+              <a:t>8   </a:t>
+            </a:r>
+            <a:r>
+              <a:rPr sz="2800">
+                <a:solidFill>
+                  <a:srgbClr val="222B22"/>
+                </a:solidFill>
+                <a:latin typeface="Calibri"/>
+              </a:rPr>
+              <a:t>Leader Feedback Round</a:t>
+            </a:r>
+          </a:p>
+          <a:p>
+            <a:pPr>
+              <a:spcAft>
+                <a:spcPts val="500"/>
+              </a:spcAft>
+            </a:pPr>
+            <a:r>
+              <a:rPr sz="2800" b="1">
+                <a:solidFill>
+                  <a:srgbClr val="97BC62"/>
+                </a:solidFill>
+                <a:latin typeface="Calibri"/>
+              </a:rPr>
+              <a:t>9   </a:t>
+            </a:r>
+            <a:r>
+              <a:rPr sz="2800">
+                <a:solidFill>
+                  <a:srgbClr val="222B22"/>
+                </a:solidFill>
+                <a:latin typeface="Calibri"/>
+              </a:rPr>
+              <a:t>Aaronic blessing and sending</a:t>
             </a:r>
           </a:p>
         </p:txBody>
@@ -7324,7 +7181,7 @@
           <a:p>
             <a:pPr algn="r"/>
             <a:r>
-              <a:t>154</a:t>
+              <a:t>153</a:t>
             </a:r>
             <a:endParaRPr sz="1000" b="1">
               <a:solidFill>
@@ -7335,6 +7192,42 @@
           </a:p>
         </p:txBody>
       </p:sp>
+      <p:pic>
+        <p:nvPicPr>
+          <p:cNvPr id="31" name="Picture 31" descr="the open container bowl"/>
+          <p:cNvPicPr>
+            <a:picLocks noChangeAspect="1"/>
+          </p:cNvPicPr>
+          <p:nvPr/>
+        </p:nvPicPr>
+        <p:blipFill>
+          <a:blip r:embed="rId3"/>
+          <a:stretch>
+            <a:fillRect/>
+          </a:stretch>
+        </p:blipFill>
+        <p:spPr>
+          <a:xfrm>
+            <a:off x="8001000" y="1554480"/>
+            <a:ext cx="3017520" cy="4526280"/>
+          </a:xfrm>
+          <a:prstGeom prst="rect">
+            <a:avLst/>
+          </a:prstGeom>
+          <a:ln w="76200">
+            <a:solidFill>
+              <a:srgbClr val="FFFFFF"/>
+            </a:solidFill>
+          </a:ln>
+          <a:effectLst>
+            <a:outerShdw blurRad="63500" dist="25400" dir="5400000" rotWithShape="0">
+              <a:srgbClr val="000000">
+                <a:alpha val="35000"/>
+              </a:srgbClr>
+            </a:outerShdw>
+          </a:effectLst>
+        </p:spPr>
+      </p:pic>
     </p:spTree>
   </p:cSld>
   <p:clrMapOvr>
@@ -7423,7 +7316,7 @@
                 </a:solidFill>
                 <a:latin typeface="Cambria"/>
               </a:rPr>
-              <a:t>New Every Morning — Lam. 3:22–23, Ps. 126</a:t>
+              <a:t>Opening Container — Run Slow</a:t>
             </a:r>
           </a:p>
         </p:txBody>
@@ -7469,7 +7362,7 @@
                 </a:solidFill>
                 <a:latin typeface="Calibri"/>
               </a:rPr>
-              <a:t>Written in the ashes of Jerusalem — the mercies-new truth lives in the mornings after the seasons that didn’t hold</a:t>
+              <a:t>Two weeks without Wednesdays — containers don’t keep. They are rebuilt every time, by the same small faithful steps</a:t>
             </a:r>
           </a:p>
           <a:p>
@@ -7494,7 +7387,7 @@
                 </a:solidFill>
                 <a:latin typeface="Calibri"/>
               </a:rPr>
-              <a:t>Not new every morning that you earned. Issued fresh, this morning, to everyone in this circle — whatever the break looked like</a:t>
+              <a:t>“Tonight we open it slowly, on purpose. Don’t rush the steps. There is nowhere else we need to be.”</a:t>
             </a:r>
           </a:p>
           <a:p>
@@ -7519,7 +7412,7 @@
                 </a:solidFill>
                 <a:latin typeface="Calibri"/>
               </a:rPr>
-              <a:t>Psalm 126 — “those who sow in tears shall reap with shouts of joy!” Coming home is not make-up work; it is the happiest walk there is</a:t>
+              <a:t>The full eight steps — phones away, standing circle, put out / bring in, the prayer</a:t>
             </a:r>
           </a:p>
           <a:p>
@@ -7544,7 +7437,7 @@
                 </a:solidFill>
                 <a:latin typeface="Calibri"/>
               </a:rPr>
-              <a:t>Tonight we read the break honestly — and we can afford to, because the mercy was already new before we walked in</a:t>
+              <a:t>One-word check-in: “One word for how you actually are right now — not how you usually are, not how you should be.” Let each word have a breath</a:t>
             </a:r>
           </a:p>
         </p:txBody>
@@ -7577,13 +7470,13 @@
               </a:spcAft>
             </a:pPr>
             <a:r>
-              <a:rPr sz="1200" b="1" i="0">
+              <a:rPr sz="1800" b="1" i="0">
                 <a:solidFill>
                   <a:srgbClr val="97BC62"/>
                 </a:solidFill>
                 <a:latin typeface="Calibri"/>
               </a:rPr>
-              <a:t>LAMENTATIONS 3:22–23</a:t>
+              <a:t>THE SPOKEN COMMITMENT</a:t>
             </a:r>
           </a:p>
           <a:p>
@@ -7599,7 +7492,7 @@
                 </a:solidFill>
                 <a:latin typeface="Cambria"/>
               </a:rPr>
-              <a:t>“The steadfast love of the LORD never ceases; his mercies never come to an end; they are new every morning; great is your faithfulness.”</a:t>
+              <a:t>“I am here. I am paying attention. I am willing to be moved.”</a:t>
             </a:r>
           </a:p>
         </p:txBody>
@@ -7626,7 +7519,7 @@
           <a:p>
             <a:pPr algn="r"/>
             <a:r>
-              <a:t>155</a:t>
+              <a:t>154</a:t>
             </a:r>
             <a:endParaRPr sz="1000" b="1">
               <a:solidFill>
@@ -7725,7 +7618,7 @@
                 </a:solidFill>
                 <a:latin typeface="Cambria"/>
               </a:rPr>
-              <a:t>“What Held?”</a:t>
+              <a:t>New Every Morning — Lam. 3:22–23, Ps. 126</a:t>
             </a:r>
           </a:p>
         </p:txBody>
@@ -7738,8 +7631,8 @@
         </p:nvSpPr>
         <p:spPr>
           <a:xfrm>
-            <a:off x="822960" y="1554480"/>
-            <a:ext cx="6675120" cy="4892040"/>
+            <a:off x="822960" y="1600200"/>
+            <a:ext cx="5669280" cy="4572000"/>
           </a:xfrm>
           <a:prstGeom prst="rect">
             <a:avLst/>
@@ -7752,7 +7645,7 @@
           <a:p>
             <a:pPr marL="274320" indent="-274320">
               <a:spcAft>
-                <a:spcPts val="750"/>
+                <a:spcPts val="800"/>
               </a:spcAft>
             </a:pPr>
             <a:r>
@@ -7771,13 +7664,13 @@
                 </a:solidFill>
                 <a:latin typeface="Calibri"/>
               </a:rPr>
-              <a:t>A reading, not a report card — which practices held through the break, and which slipped</a:t>
+              <a:t>Written in the ashes of Jerusalem — the mercies-new truth lives in the mornings after the seasons that didn’t hold</a:t>
             </a:r>
           </a:p>
           <a:p>
             <a:pPr marL="274320" indent="-274320">
               <a:spcAft>
-                <a:spcPts val="750"/>
+                <a:spcPts val="800"/>
               </a:spcAft>
             </a:pPr>
             <a:r>
@@ -7796,13 +7689,13 @@
                 </a:solidFill>
                 <a:latin typeface="Calibri"/>
               </a:rPr>
-              <a:t>“Every break is a natural test, and it is a test of the practices, not of you.”</a:t>
+              <a:t>Not new every morning that you earned. Issued fresh, this morning, to everyone in this circle — whatever the break looked like</a:t>
             </a:r>
           </a:p>
           <a:p>
             <a:pPr marL="274320" indent="-274320">
               <a:spcAft>
-                <a:spcPts val="750"/>
+                <a:spcPts val="800"/>
               </a:spcAft>
             </a:pPr>
             <a:r>
@@ -7821,13 +7714,13 @@
                 </a:solidFill>
                 <a:latin typeface="Calibri"/>
               </a:rPr>
-              <a:t>One at a time, plain words — a parent starts in each pair</a:t>
+              <a:t>Psalm 126 — “those who sow in tears shall reap with shouts of joy!” Coming home is not make-up work; it is the happiest walk there is</a:t>
             </a:r>
           </a:p>
           <a:p>
             <a:pPr marL="274320" indent="-274320">
               <a:spcAft>
-                <a:spcPts val="750"/>
+                <a:spcPts val="800"/>
               </a:spcAft>
             </a:pPr>
             <a:r>
@@ -7846,57 +7739,62 @@
                 </a:solidFill>
                 <a:latin typeface="Calibri"/>
               </a:rPr>
-              <a:t>Nobody fixes anybody. Nobody compares. Slips are data — useful information, not a verdict</a:t>
-            </a:r>
-          </a:p>
-          <a:p>
-            <a:pPr marL="274320" indent="-274320">
+              <a:t>Tonight we read the break honestly — and we can afford to, because the mercy was already new before we walked in</a:t>
+            </a:r>
+          </a:p>
+        </p:txBody>
+      </p:sp>
+      <p:sp>
+        <p:nvSpPr>
+          <p:cNvPr id="6" name="TextBox 6"/>
+          <p:cNvSpPr txBox="1"/>
+          <p:nvPr/>
+        </p:nvSpPr>
+        <p:spPr>
+          <a:xfrm>
+            <a:off x="6766560" y="1737360"/>
+            <a:ext cx="4663440" cy="2194560"/>
+          </a:xfrm>
+          <a:prstGeom prst="rect">
+            <a:avLst/>
+          </a:prstGeom>
+          <a:solidFill>
+            <a:srgbClr val="F1F6EC"/>
+          </a:solidFill>
+        </p:spPr>
+        <p:txBody>
+          <a:bodyPr wrap="square" lIns="91440" tIns="91440" rIns="91440" bIns="91440" anchor="ctr"/>
+          <a:lstStyle/>
+          <a:p>
+            <a:pPr>
               <a:spcAft>
-                <a:spcPts val="750"/>
+                <a:spcPts val="900"/>
               </a:spcAft>
             </a:pPr>
             <a:r>
-              <a:rPr sz="2000" b="1" i="0">
+              <a:rPr sz="1200" b="1" i="0">
                 <a:solidFill>
                   <a:srgbClr val="97BC62"/>
                 </a:solidFill>
                 <a:latin typeface="Calibri"/>
               </a:rPr>
-              <a:t>•  </a:t>
-            </a:r>
-            <a:r>
-              <a:rPr sz="2000" b="0" i="0">
-                <a:solidFill>
-                  <a:srgbClr val="222B22"/>
-                </a:solidFill>
-                <a:latin typeface="Calibri"/>
-              </a:rPr>
-              <a:t>“Most of it slipped” is a complete answer; pass is a complete answer</a:t>
-            </a:r>
-          </a:p>
-          <a:p>
-            <a:pPr marL="685800" indent="-274320">
+              <a:t>LAMENTATIONS 3:22–23</a:t>
+            </a:r>
+          </a:p>
+          <a:p>
+            <a:pPr>
               <a:spcAft>
-                <a:spcPts val="550"/>
+                <a:spcPts val="600"/>
               </a:spcAft>
             </a:pPr>
             <a:r>
-              <a:rPr sz="1800" b="1" i="0">
-                <a:solidFill>
-                  <a:srgbClr val="97BC62"/>
-                </a:solidFill>
-                <a:latin typeface="Calibri"/>
-              </a:rPr>
-              <a:t>–  </a:t>
-            </a:r>
-            <a:r>
-              <a:rPr sz="1800" b="0" i="1">
+              <a:rPr sz="2400" b="0" i="1">
                 <a:solidFill>
                   <a:srgbClr val="222B22"/>
                 </a:solidFill>
-                <a:latin typeface="Calibri"/>
-              </a:rPr>
-              <a:t>If time allows: “Did anything about the break surprise you?”</a:t>
+                <a:latin typeface="Cambria"/>
+              </a:rPr>
+              <a:t>“The steadfast love of the LORD never ceases; his mercies never come to an end; they are new every morning; great is your faithfulness.”</a:t>
             </a:r>
           </a:p>
         </p:txBody>
@@ -7923,7 +7821,7 @@
           <a:p>
             <a:pPr algn="r"/>
             <a:r>
-              <a:t>156</a:t>
+              <a:t>155</a:t>
             </a:r>
             <a:endParaRPr sz="1000" b="1">
               <a:solidFill>
@@ -7931,89 +7829,6 @@
               </a:solidFill>
               <a:latin typeface="Calibri"/>
             </a:endParaRPr>
-          </a:p>
-        </p:txBody>
-      </p:sp>
-      <p:pic>
-        <p:nvPicPr>
-          <p:cNvPr id="32" name="Picture 32" descr="trail cairn - the weekly check-in"/>
-          <p:cNvPicPr>
-            <a:picLocks noChangeAspect="1"/>
-          </p:cNvPicPr>
-          <p:nvPr/>
-        </p:nvPicPr>
-        <p:blipFill>
-          <a:blip r:embed="rId3"/>
-          <a:stretch>
-            <a:fillRect/>
-          </a:stretch>
-        </p:blipFill>
-        <p:spPr>
-          <a:xfrm>
-            <a:off x="8103612" y="1463040"/>
-            <a:ext cx="3262379" cy="4892040"/>
-          </a:xfrm>
-          <a:prstGeom prst="rect">
-            <a:avLst/>
-          </a:prstGeom>
-          <a:ln w="76200">
-            <a:solidFill>
-              <a:srgbClr val="FFFFFF"/>
-            </a:solidFill>
-          </a:ln>
-          <a:effectLst>
-            <a:outerShdw blurRad="63500" dist="25400" dir="5400000" rotWithShape="0">
-              <a:srgbClr val="000000">
-                <a:alpha val="35000"/>
-              </a:srgbClr>
-            </a:outerShdw>
-          </a:effectLst>
-        </p:spPr>
-      </p:pic>
-      <p:sp>
-        <p:nvSpPr>
-          <p:cNvPr id="91" name="JoshuaCard"/>
-          <p:cNvSpPr txBox="1"/>
-          <p:nvPr/>
-        </p:nvSpPr>
-        <p:spPr>
-          <a:xfrm>
-            <a:off x="822960" y="5230368"/>
-            <a:ext cx="6675120" cy="1078992"/>
-          </a:xfrm>
-          <a:prstGeom prst="rect">
-            <a:avLst/>
-          </a:prstGeom>
-          <a:solidFill>
-            <a:srgbClr val="F1F6EC"/>
-          </a:solidFill>
-        </p:spPr>
-        <p:txBody>
-          <a:bodyPr wrap="square" lIns="137160" tIns="73152" rIns="137160" bIns="73152" anchor="ctr"/>
-          <a:lstStyle/>
-          <a:p>
-            <a:pPr algn="l"/>
-            <a:r>
-              <a:rPr lang="en-US" sz="2400" i="1">
-                <a:solidFill>
-                  <a:srgbClr val="222B22"/>
-                </a:solidFill>
-                <a:latin typeface="Cambria"/>
-              </a:rPr>
-              <a:t>“When your children ask their fathers in times to come, ‘What do these stones mean?’”</a:t>
-            </a:r>
-          </a:p>
-          <a:p>
-            <a:pPr algn="l"/>
-            <a:r>
-              <a:rPr lang="en-US" sz="1100" b="1">
-                <a:solidFill>
-                  <a:srgbClr val="97BC62"/>
-                </a:solidFill>
-                <a:latin typeface="Calibri"/>
-              </a:rPr>
-              <a:t>— JOSHUA 4:21 (ESV)</a:t>
-            </a:r>
           </a:p>
         </p:txBody>
       </p:sp>
@@ -8105,7 +7920,7 @@
                 </a:solidFill>
                 <a:latin typeface="Cambria"/>
               </a:rPr>
-              <a:t>The Walk Home</a:t>
+              <a:t>“What Held?”</a:t>
             </a:r>
           </a:p>
         </p:txBody>
@@ -8118,8 +7933,8 @@
         </p:nvSpPr>
         <p:spPr>
           <a:xfrm>
-            <a:off x="822960" y="1600200"/>
-            <a:ext cx="5669280" cy="4572000"/>
+            <a:off x="822960" y="1554480"/>
+            <a:ext cx="6675120" cy="4892040"/>
           </a:xfrm>
           <a:prstGeom prst="rect">
             <a:avLst/>
@@ -8132,7 +7947,7 @@
           <a:p>
             <a:pPr marL="274320" indent="-274320">
               <a:spcAft>
-                <a:spcPts val="800"/>
+                <a:spcPts val="750"/>
               </a:spcAft>
             </a:pPr>
             <a:r>
@@ -8151,13 +7966,13 @@
                 </a:solidFill>
                 <a:latin typeface="Calibri"/>
               </a:rPr>
-              <a:t>The Path Home Card — filed weeks ago, while the room was warm. Tonight it is not taught; it is enacted</a:t>
+              <a:t>A reading, not a report card — which practices held through the break, and which slipped</a:t>
             </a:r>
           </a:p>
           <a:p>
             <a:pPr marL="274320" indent="-274320">
               <a:spcAft>
-                <a:spcPts val="800"/>
+                <a:spcPts val="750"/>
               </a:spcAft>
             </a:pPr>
             <a:r>
@@ -8176,13 +7991,13 @@
                 </a:solidFill>
                 <a:latin typeface="Calibri"/>
               </a:rPr>
-              <a:t>“Nobody in this room owes anybody an explanation for the break. You already walked back. You are in the chair. That is the whole return.”</a:t>
+              <a:t>“Every break is a natural test, and it is a test of the practices, not of you.”</a:t>
             </a:r>
           </a:p>
           <a:p>
             <a:pPr marL="274320" indent="-274320">
               <a:spcAft>
-                <a:spcPts val="800"/>
+                <a:spcPts val="750"/>
               </a:spcAft>
             </a:pPr>
             <a:r>
@@ -8201,13 +8016,13 @@
                 </a:solidFill>
                 <a:latin typeface="Calibri"/>
               </a:rPr>
-              <a:t>The way back is unglamorous: do not start over from the beginning; begin again on the next available day. Five dry minutes tomorrow morning is a full return</a:t>
+              <a:t>One at a time, plain words — a parent starts in each pair</a:t>
             </a:r>
           </a:p>
           <a:p>
             <a:pPr marL="274320" indent="-274320">
               <a:spcAft>
-                <a:spcPts val="800"/>
+                <a:spcPts val="750"/>
               </a:spcAft>
             </a:pPr>
             <a:r>
@@ -8226,13 +8041,13 @@
                 </a:solidFill>
                 <a:latin typeface="Calibri"/>
               </a:rPr>
-              <a:t>Everybody here came back — every chair filled tonight is a small feast</a:t>
+              <a:t>Nobody fixes anybody. Nobody compares. Slips are data — useful information, not a verdict</a:t>
             </a:r>
           </a:p>
           <a:p>
             <a:pPr marL="274320" indent="-274320">
               <a:spcAft>
-                <a:spcPts val="800"/>
+                <a:spcPts val="750"/>
               </a:spcAft>
             </a:pPr>
             <a:r>
@@ -8251,21 +8066,115 @@
                 </a:solidFill>
                 <a:latin typeface="Calibri"/>
               </a:rPr>
-              <a:t>If the break was hard in ways that have nothing to do with practices — that is a Companion conversation, tonight or this week</a:t>
-            </a:r>
-          </a:p>
-        </p:txBody>
-      </p:sp>
-      <p:sp>
-        <p:nvSpPr>
-          <p:cNvPr id="6" name="TextBox 6"/>
+              <a:t>“Most of it slipped” is a complete answer; pass is a complete answer</a:t>
+            </a:r>
+          </a:p>
+          <a:p>
+            <a:pPr marL="685800" indent="-274320">
+              <a:spcAft>
+                <a:spcPts val="550"/>
+              </a:spcAft>
+            </a:pPr>
+            <a:r>
+              <a:rPr sz="1800" b="1" i="0">
+                <a:solidFill>
+                  <a:srgbClr val="97BC62"/>
+                </a:solidFill>
+                <a:latin typeface="Calibri"/>
+              </a:rPr>
+              <a:t>–  </a:t>
+            </a:r>
+            <a:r>
+              <a:rPr sz="1800" b="0" i="1">
+                <a:solidFill>
+                  <a:srgbClr val="222B22"/>
+                </a:solidFill>
+                <a:latin typeface="Calibri"/>
+              </a:rPr>
+              <a:t>If time allows: “Did anything about the break surprise you?”</a:t>
+            </a:r>
+          </a:p>
+        </p:txBody>
+      </p:sp>
+      <p:sp>
+        <p:nvSpPr>
+          <p:cNvPr id="90" name="SlideNum"/>
           <p:cNvSpPr txBox="1"/>
           <p:nvPr/>
         </p:nvSpPr>
         <p:spPr>
           <a:xfrm>
-            <a:off x="6766560" y="1737360"/>
-            <a:ext cx="4663440" cy="2194560"/>
+            <a:off x="11384280" y="6446520"/>
+            <a:ext cx="640080" cy="292608"/>
+          </a:xfrm>
+          <a:prstGeom prst="rect">
+            <a:avLst/>
+          </a:prstGeom>
+          <a:noFill/>
+        </p:spPr>
+        <p:txBody>
+          <a:bodyPr wrap="none" lIns="0" tIns="0" rIns="45720" bIns="0" anchor="ctr"/>
+          <a:lstStyle/>
+          <a:p>
+            <a:pPr algn="r"/>
+            <a:r>
+              <a:t>156</a:t>
+            </a:r>
+            <a:endParaRPr sz="1000" b="1">
+              <a:solidFill>
+                <a:srgbClr val="7A8A6E"/>
+              </a:solidFill>
+              <a:latin typeface="Calibri"/>
+            </a:endParaRPr>
+          </a:p>
+        </p:txBody>
+      </p:sp>
+      <p:pic>
+        <p:nvPicPr>
+          <p:cNvPr id="32" name="Picture 32" descr="trail cairn - the weekly check-in"/>
+          <p:cNvPicPr>
+            <a:picLocks noChangeAspect="1"/>
+          </p:cNvPicPr>
+          <p:nvPr/>
+        </p:nvPicPr>
+        <p:blipFill>
+          <a:blip r:embed="rId3"/>
+          <a:stretch>
+            <a:fillRect/>
+          </a:stretch>
+        </p:blipFill>
+        <p:spPr>
+          <a:xfrm>
+            <a:off x="8103612" y="1463040"/>
+            <a:ext cx="3262379" cy="4892040"/>
+          </a:xfrm>
+          <a:prstGeom prst="rect">
+            <a:avLst/>
+          </a:prstGeom>
+          <a:ln w="76200">
+            <a:solidFill>
+              <a:srgbClr val="FFFFFF"/>
+            </a:solidFill>
+          </a:ln>
+          <a:effectLst>
+            <a:outerShdw blurRad="63500" dist="25400" dir="5400000" rotWithShape="0">
+              <a:srgbClr val="000000">
+                <a:alpha val="35000"/>
+              </a:srgbClr>
+            </a:outerShdw>
+          </a:effectLst>
+        </p:spPr>
+      </p:pic>
+      <p:sp>
+        <p:nvSpPr>
+          <p:cNvPr id="91" name="JoshuaCard"/>
+          <p:cNvSpPr txBox="1"/>
+          <p:nvPr/>
+        </p:nvSpPr>
+        <p:spPr>
+          <a:xfrm>
+            <a:off x="822960" y="5230368"/>
+            <a:ext cx="6675120" cy="1078992"/>
           </a:xfrm>
           <a:prstGeom prst="rect">
             <a:avLst/>
@@ -8275,72 +8184,31 @@
           </a:solidFill>
         </p:spPr>
         <p:txBody>
-          <a:bodyPr wrap="square" lIns="91440" tIns="91440" rIns="91440" bIns="91440" anchor="ctr"/>
-          <a:lstStyle/>
-          <a:p>
-            <a:pPr>
-              <a:spcAft>
-                <a:spcPts val="900"/>
-              </a:spcAft>
-            </a:pPr>
-            <a:r>
-              <a:rPr sz="1800" b="1" i="0">
+          <a:bodyPr wrap="square" lIns="137160" tIns="73152" rIns="137160" bIns="73152" anchor="ctr"/>
+          <a:lstStyle/>
+          <a:p>
+            <a:pPr algn="l"/>
+            <a:r>
+              <a:rPr lang="en-US" sz="2400" i="1">
+                <a:solidFill>
+                  <a:srgbClr val="222B22"/>
+                </a:solidFill>
+                <a:latin typeface="Cambria"/>
+              </a:rPr>
+              <a:t>“When your children ask their fathers in times to come, ‘What do these stones mean?’”</a:t>
+            </a:r>
+          </a:p>
+          <a:p>
+            <a:pPr algn="l"/>
+            <a:r>
+              <a:rPr lang="en-US" sz="1100" b="1">
                 <a:solidFill>
                   <a:srgbClr val="97BC62"/>
                 </a:solidFill>
                 <a:latin typeface="Calibri"/>
               </a:rPr>
-              <a:t>LUKE 15:20</a:t>
-            </a:r>
-          </a:p>
-          <a:p>
-            <a:pPr>
-              <a:spcAft>
-                <a:spcPts val="600"/>
-              </a:spcAft>
-            </a:pPr>
-            <a:r>
-              <a:rPr sz="2400" b="0" i="1">
-                <a:solidFill>
-                  <a:srgbClr val="222B22"/>
-                </a:solidFill>
-                <a:latin typeface="Cambria"/>
-              </a:rPr>
-              <a:t>“But while he was still a long way off, his father saw him and felt compassion, and ran and embraced him and kissed him.”</a:t>
-            </a:r>
-          </a:p>
-        </p:txBody>
-      </p:sp>
-      <p:sp>
-        <p:nvSpPr>
-          <p:cNvPr id="90" name="SlideNum"/>
-          <p:cNvSpPr txBox="1"/>
-          <p:nvPr/>
-        </p:nvSpPr>
-        <p:spPr>
-          <a:xfrm>
-            <a:off x="11384280" y="6446520"/>
-            <a:ext cx="640080" cy="292608"/>
-          </a:xfrm>
-          <a:prstGeom prst="rect">
-            <a:avLst/>
-          </a:prstGeom>
-          <a:noFill/>
-        </p:spPr>
-        <p:txBody>
-          <a:bodyPr wrap="none" lIns="0" tIns="0" rIns="45720" bIns="0" anchor="ctr"/>
-          <a:lstStyle/>
-          <a:p>
-            <a:pPr algn="r"/>
-            <a:r>
-              <a:t>157</a:t>
-            </a:r>
-            <a:endParaRPr sz="1000" b="1">
-              <a:solidFill>
-                <a:srgbClr val="7A8A6E"/>
-              </a:solidFill>
-              <a:latin typeface="Calibri"/>
-            </a:endParaRPr>
+              <a:t>— JOSHUA 4:21 (ESV)</a:t>
+            </a:r>
           </a:p>
         </p:txBody>
       </p:sp>
@@ -8432,7 +8300,7 @@
                 </a:solidFill>
                 <a:latin typeface="Cambria"/>
               </a:rPr>
-              <a:t>Re-Anchoring the Year</a:t>
+              <a:t>The Walk Home</a:t>
             </a:r>
           </a:p>
         </p:txBody>
@@ -8445,8 +8313,8 @@
         </p:nvSpPr>
         <p:spPr>
           <a:xfrm>
-            <a:off x="822960" y="1554480"/>
-            <a:ext cx="10515600" cy="4892040"/>
+            <a:off x="822960" y="1600200"/>
+            <a:ext cx="5669280" cy="4572000"/>
           </a:xfrm>
           <a:prstGeom prst="rect">
             <a:avLst/>
@@ -8459,11 +8327,11 @@
           <a:p>
             <a:pPr marL="274320" indent="-274320">
               <a:spcAft>
-                <a:spcPts val="900"/>
+                <a:spcPts val="800"/>
               </a:spcAft>
             </a:pPr>
             <a:r>
-              <a:rPr sz="2800" b="1" i="0">
+              <a:rPr sz="2000" b="1" i="0">
                 <a:solidFill>
                   <a:srgbClr val="97BC62"/>
                 </a:solidFill>
@@ -8472,88 +8340,168 @@
               <a:t>•  </a:t>
             </a:r>
             <a:r>
-              <a:rPr sz="2800" b="0" i="0">
+              <a:rPr sz="2000" b="0" i="0">
                 <a:solidFill>
                   <a:srgbClr val="222B22"/>
                 </a:solidFill>
                 <a:latin typeface="Calibri"/>
               </a:rPr>
-              <a:t>Behind us: the whole God arc — the container, your story, the soils, being known; then the hearing: PROAPT, the garden, the doubts brought honestly</a:t>
+              <a:t>The Path Home Card — filed weeks ago, while the room was warm. Tonight it is not taught; it is enacted</a:t>
             </a:r>
           </a:p>
           <a:p>
             <a:pPr marL="274320" indent="-274320">
+              <a:spcAft>
+                <a:spcPts val="800"/>
+              </a:spcAft>
+            </a:pPr>
+            <a:r>
+              <a:rPr sz="2000" b="1" i="0">
+                <a:solidFill>
+                  <a:srgbClr val="97BC62"/>
+                </a:solidFill>
+                <a:latin typeface="Calibri"/>
+              </a:rPr>
+              <a:t>•  </a:t>
+            </a:r>
+            <a:r>
+              <a:rPr sz="2000" b="0" i="0">
+                <a:solidFill>
+                  <a:srgbClr val="222B22"/>
+                </a:solidFill>
+                <a:latin typeface="Calibri"/>
+              </a:rPr>
+              <a:t>“Nobody in this room owes anybody an explanation for the break. You already walked back. You are in the chair. That is the whole return.”</a:t>
+            </a:r>
+          </a:p>
+          <a:p>
+            <a:pPr marL="274320" indent="-274320">
+              <a:spcAft>
+                <a:spcPts val="800"/>
+              </a:spcAft>
+            </a:pPr>
+            <a:r>
+              <a:rPr sz="2000" b="1" i="0">
+                <a:solidFill>
+                  <a:srgbClr val="97BC62"/>
+                </a:solidFill>
+                <a:latin typeface="Calibri"/>
+              </a:rPr>
+              <a:t>•  </a:t>
+            </a:r>
+            <a:r>
+              <a:rPr sz="2000" b="0" i="0">
+                <a:solidFill>
+                  <a:srgbClr val="222B22"/>
+                </a:solidFill>
+                <a:latin typeface="Calibri"/>
+              </a:rPr>
+              <a:t>The way back is unglamorous: do not start over from the beginning; begin again on the next available day. Five dry minutes tomorrow morning is a full return</a:t>
+            </a:r>
+          </a:p>
+          <a:p>
+            <a:pPr marL="274320" indent="-274320">
+              <a:spcAft>
+                <a:spcPts val="800"/>
+              </a:spcAft>
+            </a:pPr>
+            <a:r>
+              <a:rPr sz="2000" b="1" i="0">
+                <a:solidFill>
+                  <a:srgbClr val="97BC62"/>
+                </a:solidFill>
+                <a:latin typeface="Calibri"/>
+              </a:rPr>
+              <a:t>•  </a:t>
+            </a:r>
+            <a:r>
+              <a:rPr sz="2000" b="0" i="0">
+                <a:solidFill>
+                  <a:srgbClr val="222B22"/>
+                </a:solidFill>
+                <a:latin typeface="Calibri"/>
+              </a:rPr>
+              <a:t>Everybody here came back — every chair filled tonight is a small feast</a:t>
+            </a:r>
+          </a:p>
+          <a:p>
+            <a:pPr marL="274320" indent="-274320">
+              <a:spcAft>
+                <a:spcPts val="800"/>
+              </a:spcAft>
+            </a:pPr>
+            <a:r>
+              <a:rPr sz="2000" b="1" i="0">
+                <a:solidFill>
+                  <a:srgbClr val="97BC62"/>
+                </a:solidFill>
+                <a:latin typeface="Calibri"/>
+              </a:rPr>
+              <a:t>•  </a:t>
+            </a:r>
+            <a:r>
+              <a:rPr sz="2000" b="0" i="0">
+                <a:solidFill>
+                  <a:srgbClr val="222B22"/>
+                </a:solidFill>
+                <a:latin typeface="Calibri"/>
+              </a:rPr>
+              <a:t>If the break was hard in ways that have nothing to do with practices — that is a Companion conversation, tonight or this week</a:t>
+            </a:r>
+          </a:p>
+        </p:txBody>
+      </p:sp>
+      <p:sp>
+        <p:nvSpPr>
+          <p:cNvPr id="6" name="TextBox 6"/>
+          <p:cNvSpPr txBox="1"/>
+          <p:nvPr/>
+        </p:nvSpPr>
+        <p:spPr>
+          <a:xfrm>
+            <a:off x="6766560" y="1737360"/>
+            <a:ext cx="4663440" cy="2194560"/>
+          </a:xfrm>
+          <a:prstGeom prst="rect">
+            <a:avLst/>
+          </a:prstGeom>
+          <a:solidFill>
+            <a:srgbClr val="F1F6EC"/>
+          </a:solidFill>
+        </p:spPr>
+        <p:txBody>
+          <a:bodyPr wrap="square" lIns="91440" tIns="91440" rIns="91440" bIns="91440" anchor="ctr"/>
+          <a:lstStyle/>
+          <a:p>
+            <a:pPr>
               <a:spcAft>
                 <a:spcPts val="900"/>
               </a:spcAft>
             </a:pPr>
             <a:r>
-              <a:rPr sz="2800" b="1" i="0">
+              <a:rPr sz="1800" b="1" i="0">
                 <a:solidFill>
                   <a:srgbClr val="97BC62"/>
                 </a:solidFill>
                 <a:latin typeface="Calibri"/>
               </a:rPr>
-              <a:t>•  </a:t>
-            </a:r>
-            <a:r>
-              <a:rPr sz="2800" b="0" i="0">
-                <a:solidFill>
-                  <a:srgbClr val="222B22"/>
-                </a:solidFill>
-                <a:latin typeface="Calibri"/>
-              </a:rPr>
-              <a:t>“That work is in you now. The break did not take it away.”</a:t>
-            </a:r>
-          </a:p>
-          <a:p>
-            <a:pPr marL="274320" indent="-274320">
+              <a:t>LUKE 15:20</a:t>
+            </a:r>
+          </a:p>
+          <a:p>
+            <a:pPr>
               <a:spcAft>
-                <a:spcPts val="900"/>
+                <a:spcPts val="600"/>
               </a:spcAft>
             </a:pPr>
             <a:r>
-              <a:rPr sz="2800" b="1" i="0">
-                <a:solidFill>
-                  <a:srgbClr val="97BC62"/>
-                </a:solidFill>
-                <a:latin typeface="Calibri"/>
-              </a:rPr>
-              <a:t>•  </a:t>
-            </a:r>
-            <a:r>
-              <a:rPr sz="2800" b="0" i="0">
+              <a:rPr sz="2400" b="0" i="1">
                 <a:solidFill>
                   <a:srgbClr val="222B22"/>
                 </a:solidFill>
-                <a:latin typeface="Calibri"/>
-              </a:rPr>
-              <a:t>Ahead: Week 13 — Mission, the turn outward; then the Rhythm — one card you build with your own hand; then the sendings and the commissionings</a:t>
-            </a:r>
-          </a:p>
-          <a:p>
-            <a:pPr marL="274320" indent="-274320">
-              <a:spcAft>
-                <a:spcPts val="900"/>
-              </a:spcAft>
-            </a:pPr>
-            <a:r>
-              <a:rPr sz="2800" b="1" i="0">
-                <a:solidFill>
-                  <a:srgbClr val="97BC62"/>
-                </a:solidFill>
-                <a:latin typeface="Calibri"/>
-              </a:rPr>
-              <a:t>•  </a:t>
-            </a:r>
-            <a:r>
-              <a:rPr sz="2800" b="0" i="0">
-                <a:solidFill>
-                  <a:srgbClr val="222B22"/>
-                </a:solidFill>
-                <a:latin typeface="Calibri"/>
-              </a:rPr>
-              <a:t>“We are not starting over tonight. We are picking the trail back up, together, further along than we have ever been.”</a:t>
+                <a:latin typeface="Cambria"/>
+              </a:rPr>
+              <a:t>“But while he was still a long way off, his father saw him and felt compassion, and ran and embraced him and kissed him.”</a:t>
             </a:r>
           </a:p>
         </p:txBody>
@@ -8580,7 +8528,7 @@
           <a:p>
             <a:pPr algn="r"/>
             <a:r>
-              <a:t>158</a:t>
+              <a:t>157</a:t>
             </a:r>
             <a:endParaRPr sz="1000" b="1">
               <a:solidFill>
@@ -8679,7 +8627,7 @@
                 </a:solidFill>
                 <a:latin typeface="Cambria"/>
               </a:rPr>
-              <a:t>One More Thing, While We Are Getting Our Bearings</a:t>
+              <a:t>Re-Anchoring the Year</a:t>
             </a:r>
           </a:p>
         </p:txBody>
@@ -8693,7 +8641,7 @@
         <p:spPr>
           <a:xfrm>
             <a:off x="822960" y="1554480"/>
-            <a:ext cx="6675120" cy="4754880"/>
+            <a:ext cx="10515600" cy="4892040"/>
           </a:xfrm>
           <a:prstGeom prst="rect">
             <a:avLst/>
@@ -8716,7 +8664,16 @@
                 </a:solidFill>
                 <a:latin typeface="Calibri"/>
               </a:rPr>
-              <a:t>•  Pastor Bobby Gore  ·  (831) 277-9878  —  still there, and still not part of our team</a:t>
+              <a:t>•  </a:t>
+            </a:r>
+            <a:r>
+              <a:rPr sz="2800" b="0" i="0">
+                <a:solidFill>
+                  <a:srgbClr val="222B22"/>
+                </a:solidFill>
+                <a:latin typeface="Calibri"/>
+              </a:rPr>
+              <a:t>Behind us: the whole God arc — the container, your story, the soils, being known; then the hearing: PROAPT, the garden, the doubts brought honestly</a:t>
             </a:r>
           </a:p>
           <a:p>
@@ -8732,7 +8689,16 @@
                 </a:solidFill>
                 <a:latin typeface="Calibri"/>
               </a:rPr>
-              <a:t>•  His number is on the safety page at the front of your journal</a:t>
+              <a:t>•  </a:t>
+            </a:r>
+            <a:r>
+              <a:rPr sz="2800" b="0" i="0">
+                <a:solidFill>
+                  <a:srgbClr val="222B22"/>
+                </a:solidFill>
+                <a:latin typeface="Calibri"/>
+              </a:rPr>
+              <a:t>“That work is in you now. The break did not take it away.”</a:t>
             </a:r>
           </a:p>
           <a:p>
@@ -8748,7 +8714,41 @@
                 </a:solidFill>
                 <a:latin typeface="Calibri"/>
               </a:rPr>
-              <a:t>•  Same as we said in September</a:t>
+              <a:t>•  </a:t>
+            </a:r>
+            <a:r>
+              <a:rPr sz="2800" b="0" i="0">
+                <a:solidFill>
+                  <a:srgbClr val="222B22"/>
+                </a:solidFill>
+                <a:latin typeface="Calibri"/>
+              </a:rPr>
+              <a:t>Ahead: Week 13 — Mission, the turn outward; then the Rhythm — one card you build with your own hand; then the sendings and the commissionings</a:t>
+            </a:r>
+          </a:p>
+          <a:p>
+            <a:pPr marL="274320" indent="-274320">
+              <a:spcAft>
+                <a:spcPts val="900"/>
+              </a:spcAft>
+            </a:pPr>
+            <a:r>
+              <a:rPr sz="2800" b="1" i="0">
+                <a:solidFill>
+                  <a:srgbClr val="97BC62"/>
+                </a:solidFill>
+                <a:latin typeface="Calibri"/>
+              </a:rPr>
+              <a:t>•  </a:t>
+            </a:r>
+            <a:r>
+              <a:rPr sz="2800" b="0" i="0">
+                <a:solidFill>
+                  <a:srgbClr val="222B22"/>
+                </a:solidFill>
+                <a:latin typeface="Calibri"/>
+              </a:rPr>
+              <a:t>“We are not starting over tonight. We are picking the trail back up, together, further along than we have ever been.”</a:t>
             </a:r>
           </a:p>
         </p:txBody>
@@ -8775,7 +8775,7 @@
           <a:p>
             <a:pPr algn="r"/>
             <a:r>
-              <a:t>159</a:t>
+              <a:t>158</a:t>
             </a:r>
             <a:endParaRPr sz="1000" b="1">
               <a:solidFill>

--- a/_implementation-notes/evening-series/FotH Evening Session 12 Slides DRAFT v1.pptx
+++ b/_implementation-notes/evening-series/FotH Evening Session 12 Slides DRAFT v1.pptx
@@ -6787,7 +6787,7 @@
           <p:nvPr/>
         </p:nvPicPr>
         <p:blipFill>
-          <a:blip r:embed="rId4"/>
+          <a:blip r:embed="rId5"/>
           <a:stretch>
             <a:fillRect/>
           </a:stretch>

--- a/_implementation-notes/evening-series/FotH Evening Session 12 Slides DRAFT v1.pptx
+++ b/_implementation-notes/evening-series/FotH Evening Session 12 Slides DRAFT v1.pptx
@@ -4903,7 +4903,7 @@
           <a:p>
             <a:pPr algn="r"/>
             <a:r>
-              <a:t>159</a:t>
+              <a:t>182</a:t>
             </a:r>
             <a:endParaRPr sz="1000" b="1">
               <a:solidFill>
@@ -5175,7 +5175,7 @@
           <a:p>
             <a:pPr algn="r"/>
             <a:r>
-              <a:t>160</a:t>
+              <a:t>183</a:t>
             </a:r>
             <a:endParaRPr sz="1000" b="1">
               <a:solidFill>
@@ -5403,7 +5403,7 @@
           <a:p>
             <a:pPr algn="r"/>
             <a:r>
-              <a:t>161</a:t>
+              <a:t>184</a:t>
             </a:r>
             <a:endParaRPr sz="1000" b="1">
               <a:solidFill>
@@ -5595,7 +5595,7 @@
           <a:p>
             <a:pPr algn="r"/>
             <a:r>
-              <a:t>161a</a:t>
+              <a:t>185</a:t>
             </a:r>
             <a:endParaRPr sz="1000" b="1">
               <a:solidFill>
@@ -6004,7 +6004,7 @@
           <a:p>
             <a:pPr algn="r"/>
             <a:r>
-              <a:t>162</a:t>
+              <a:t>186</a:t>
             </a:r>
             <a:endParaRPr sz="1000" b="1">
               <a:solidFill>
@@ -6301,7 +6301,7 @@
           <a:p>
             <a:pPr algn="r"/>
             <a:r>
-              <a:t>163</a:t>
+              <a:t>187</a:t>
             </a:r>
             <a:endParaRPr sz="1000" b="1">
               <a:solidFill>
@@ -6550,7 +6550,7 @@
           <a:p>
             <a:pPr algn="r"/>
             <a:r>
-              <a:t>152</a:t>
+              <a:t>174</a:t>
             </a:r>
             <a:endParaRPr sz="1000" b="1">
               <a:solidFill>
@@ -6767,7 +6767,7 @@
           <a:p>
             <a:pPr algn="r"/>
             <a:r>
-              <a:t>152a</a:t>
+              <a:t>175</a:t>
             </a:r>
             <a:endParaRPr sz="1000" b="1">
               <a:solidFill>
@@ -7181,7 +7181,7 @@
           <a:p>
             <a:pPr algn="r"/>
             <a:r>
-              <a:t>153</a:t>
+              <a:t>176</a:t>
             </a:r>
             <a:endParaRPr sz="1000" b="1">
               <a:solidFill>
@@ -7519,7 +7519,7 @@
           <a:p>
             <a:pPr algn="r"/>
             <a:r>
-              <a:t>154</a:t>
+              <a:t>177</a:t>
             </a:r>
             <a:endParaRPr sz="1000" b="1">
               <a:solidFill>
@@ -7821,7 +7821,7 @@
           <a:p>
             <a:pPr algn="r"/>
             <a:r>
-              <a:t>155</a:t>
+              <a:t>178</a:t>
             </a:r>
             <a:endParaRPr sz="1000" b="1">
               <a:solidFill>
@@ -8118,7 +8118,7 @@
           <a:p>
             <a:pPr algn="r"/>
             <a:r>
-              <a:t>156</a:t>
+              <a:t>179</a:t>
             </a:r>
             <a:endParaRPr sz="1000" b="1">
               <a:solidFill>
@@ -8528,7 +8528,7 @@
           <a:p>
             <a:pPr algn="r"/>
             <a:r>
-              <a:t>157</a:t>
+              <a:t>180</a:t>
             </a:r>
             <a:endParaRPr sz="1000" b="1">
               <a:solidFill>
@@ -8775,7 +8775,7 @@
           <a:p>
             <a:pPr algn="r"/>
             <a:r>
-              <a:t>158</a:t>
+              <a:t>181</a:t>
             </a:r>
             <a:endParaRPr sz="1000" b="1">
               <a:solidFill>

--- a/_implementation-notes/evening-series/FotH Evening Session 12 Slides DRAFT v1.pptx
+++ b/_implementation-notes/evening-series/FotH Evening Session 12 Slides DRAFT v1.pptx
@@ -6787,7 +6787,7 @@
           <p:nvPr/>
         </p:nvPicPr>
         <p:blipFill>
-          <a:blip r:embed="rId5"/>
+          <a:blip r:embed="rId6"/>
           <a:stretch>
             <a:fillRect/>
           </a:stretch>

--- a/_implementation-notes/evening-series/FotH Evening Session 12 Slides DRAFT v1.pptx
+++ b/_implementation-notes/evening-series/FotH Evening Session 12 Slides DRAFT v1.pptx
@@ -1450,13 +1450,13 @@
           <a:p>
             <a:r>
               <a:rPr lang="en-US" sz="1200"/>
-              <a:t>S12 · 8:28–8:30 · LEAD: CONTAINER HOLDER</a:t>
+              <a:t>S12 · 8:24–8:26, return 8:29–8:30 · LEAD: CONTAINER HOLDER</a:t>
             </a:r>
           </a:p>
           <a:p>
             <a:r>
               <a:rPr lang="en-US" sz="1200"/>
-              <a:t>BEATS: 1. Closing protocol 5:12–5:20, unhurried: stand; one-word landing (the contrast with the opening words is today's best data); the one thing taken from today; the one practice (each names the one just written); blessings — let this step run warm today; the first evenings back is the right night for the room to bless itself. 2. Then the Leader Feedback Round interposes, 5:23–5:27 (next slide). 3. Return here 5:27–5:30: 'His mercies did not run out over the break, and they will not run out over this quarter.' Aaronic blessing, hands up. 'Welcome home. See you evenings — Week 13, Mission.'</a:t>
+              <a:t>BEATS: 1. Closing protocol 8:24–8:26, unhurried: stand; one-word landing (the contrast with the opening words is today's best data); the one thing taken from today; the one practice (each names the one just written); blessings — let this step run warm today; the first evenings back is the right night for the room to bless itself. 2. Then the Leader Feedback Round interposes, 8:26–8:29 (next slide). 3. Return here 8:29–8:30: 'His mercies did not run out over the break, and they will not run out over this quarter.' Aaronic blessing, hands up. 'Welcome home. See you evenings — Week 13, Mission.'</a:t>
             </a:r>
           </a:p>
           <a:p>
@@ -1509,7 +1509,7 @@
           <a:p>
             <a:r>
               <a:rPr lang="en-US" sz="1200"/>
-              <a:t>S12 · 8:24–8:28 · LEAD: BOTH LEADERS</a:t>
+              <a:t>S12 · 8:26–8:29 · LEAD: BOTH LEADERS</a:t>
             </a:r>
           </a:p>
           <a:p>

--- a/_implementation-notes/evening-series/FotH Evening Session 12 Slides DRAFT v1.pptx
+++ b/_implementation-notes/evening-series/FotH Evening Session 12 Slides DRAFT v1.pptx
@@ -4903,7 +4903,7 @@
           <a:p>
             <a:pPr algn="r"/>
             <a:r>
-              <a:t>182</a:t>
+              <a:t>183</a:t>
             </a:r>
             <a:endParaRPr sz="1000" b="1">
               <a:solidFill>
@@ -5175,7 +5175,7 @@
           <a:p>
             <a:pPr algn="r"/>
             <a:r>
-              <a:t>183</a:t>
+              <a:t>184</a:t>
             </a:r>
             <a:endParaRPr sz="1000" b="1">
               <a:solidFill>
@@ -5403,7 +5403,7 @@
           <a:p>
             <a:pPr algn="r"/>
             <a:r>
-              <a:t>184</a:t>
+              <a:t>185</a:t>
             </a:r>
             <a:endParaRPr sz="1000" b="1">
               <a:solidFill>
@@ -5595,7 +5595,7 @@
           <a:p>
             <a:pPr algn="r"/>
             <a:r>
-              <a:t>185</a:t>
+              <a:t>186</a:t>
             </a:r>
             <a:endParaRPr sz="1000" b="1">
               <a:solidFill>
@@ -6004,7 +6004,7 @@
           <a:p>
             <a:pPr algn="r"/>
             <a:r>
-              <a:t>186</a:t>
+              <a:t>187</a:t>
             </a:r>
             <a:endParaRPr sz="1000" b="1">
               <a:solidFill>
@@ -6301,7 +6301,7 @@
           <a:p>
             <a:pPr algn="r"/>
             <a:r>
-              <a:t>187</a:t>
+              <a:t>188</a:t>
             </a:r>
             <a:endParaRPr sz="1000" b="1">
               <a:solidFill>
@@ -6550,7 +6550,7 @@
           <a:p>
             <a:pPr algn="r"/>
             <a:r>
-              <a:t>174</a:t>
+              <a:t>175</a:t>
             </a:r>
             <a:endParaRPr sz="1000" b="1">
               <a:solidFill>
@@ -6767,7 +6767,7 @@
           <a:p>
             <a:pPr algn="r"/>
             <a:r>
-              <a:t>175</a:t>
+              <a:t>176</a:t>
             </a:r>
             <a:endParaRPr sz="1000" b="1">
               <a:solidFill>
@@ -7181,7 +7181,7 @@
           <a:p>
             <a:pPr algn="r"/>
             <a:r>
-              <a:t>176</a:t>
+              <a:t>177</a:t>
             </a:r>
             <a:endParaRPr sz="1000" b="1">
               <a:solidFill>
@@ -7519,7 +7519,7 @@
           <a:p>
             <a:pPr algn="r"/>
             <a:r>
-              <a:t>177</a:t>
+              <a:t>178</a:t>
             </a:r>
             <a:endParaRPr sz="1000" b="1">
               <a:solidFill>
@@ -7821,7 +7821,7 @@
           <a:p>
             <a:pPr algn="r"/>
             <a:r>
-              <a:t>178</a:t>
+              <a:t>179</a:t>
             </a:r>
             <a:endParaRPr sz="1000" b="1">
               <a:solidFill>
@@ -8118,7 +8118,7 @@
           <a:p>
             <a:pPr algn="r"/>
             <a:r>
-              <a:t>179</a:t>
+              <a:t>180</a:t>
             </a:r>
             <a:endParaRPr sz="1000" b="1">
               <a:solidFill>
@@ -8528,7 +8528,7 @@
           <a:p>
             <a:pPr algn="r"/>
             <a:r>
-              <a:t>180</a:t>
+              <a:t>181</a:t>
             </a:r>
             <a:endParaRPr sz="1000" b="1">
               <a:solidFill>
@@ -8775,7 +8775,7 @@
           <a:p>
             <a:pPr algn="r"/>
             <a:r>
-              <a:t>181</a:t>
+              <a:t>182</a:t>
             </a:r>
             <a:endParaRPr sz="1000" b="1">
               <a:solidFill>

--- a/_implementation-notes/evening-series/FotH Evening Session 12 Slides DRAFT v1.pptx
+++ b/_implementation-notes/evening-series/FotH Evening Session 12 Slides DRAFT v1.pptx
@@ -5519,15 +5519,15 @@
           <p:nvPr/>
         </p:nvPicPr>
         <p:blipFill>
-          <a:blip r:embed="rId2"/>
+          <a:blip r:embed="rId4"/>
           <a:stretch>
             <a:fillRect/>
           </a:stretch>
         </p:blipFill>
         <p:spPr>
           <a:xfrm>
-            <a:off x="2066004" y="1463040"/>
-            <a:ext cx="8059687" cy="4709160"/>
+            <a:off x="2697485" y="1463040"/>
+            <a:ext cx="6796725" cy="4709160"/>
           </a:xfrm>
           <a:prstGeom prst="rect">
             <a:avLst/>

--- a/_implementation-notes/evening-series/FotH Evening Session 12 Slides DRAFT v1.pptx
+++ b/_implementation-notes/evening-series/FotH Evening Session 12 Slides DRAFT v1.pptx
@@ -1449,20 +1449,22 @@
           <a:lstStyle/>
           <a:p>
             <a:r>
-              <a:rPr lang="en-US" sz="1200"/>
               <a:t>S12 · 8:24–8:26, return 8:29–8:30 · LEAD: CONTAINER HOLDER</a:t>
             </a:r>
           </a:p>
           <a:p>
             <a:r>
-              <a:rPr lang="en-US" sz="1200"/>
               <a:t>BEATS: 1. Closing protocol 8:24–8:26, unhurried: stand; one-word landing (the contrast with the opening words is today's best data); the one thing taken from today; the one practice (each names the one just written); blessings — let this step run warm today; the first evenings back is the right night for the room to bless itself. 2. Then the Leader Feedback Round interposes, 8:26–8:29 (next slide). 3. Return here 8:29–8:30: 'His mercies did not run out over the break, and they will not run out over this quarter.' Aaronic blessing, hands up. 'Welcome home. See you evenings — Week 13, Mission.'</a:t>
             </a:r>
           </a:p>
           <a:p>
             <a:r>
-              <a:rPr lang="en-US" sz="1200"/>
               <a:t>CUES: Today's order is unusual — closing container BEFORE the feedback round, blessing last. Follow the slide flow, not habit.</a:t>
+            </a:r>
+          </a:p>
+          <a:p>
+            <a:r>
+              <a:t>BLESSINGS: eyes on the person, not the screen — nothing to read; say what is on your heart for them, specific and short.</a:t>
             </a:r>
           </a:p>
         </p:txBody>
@@ -5865,7 +5867,7 @@
                 </a:solidFill>
                 <a:latin typeface="Calibri"/>
               </a:rPr>
-              <a:t>Blessings — specific, witnessed, short</a:t>
+              <a:t>Blessings — eyes on the person, not the screen: say what is on your heart for them. Specific, witnessed, short</a:t>
             </a:r>
           </a:p>
           <a:p>

--- a/_implementation-notes/evening-series/FotH Evening Session 12 Slides DRAFT v1.pptx
+++ b/_implementation-notes/evening-series/FotH Evening Session 12 Slides DRAFT v1.pptx
@@ -4905,7 +4905,7 @@
           <a:p>
             <a:pPr algn="r"/>
             <a:r>
-              <a:t>183</a:t>
+              <a:t>184</a:t>
             </a:r>
             <a:endParaRPr sz="1000" b="1">
               <a:solidFill>
@@ -5177,7 +5177,7 @@
           <a:p>
             <a:pPr algn="r"/>
             <a:r>
-              <a:t>184</a:t>
+              <a:t>185</a:t>
             </a:r>
             <a:endParaRPr sz="1000" b="1">
               <a:solidFill>
@@ -5405,7 +5405,7 @@
           <a:p>
             <a:pPr algn="r"/>
             <a:r>
-              <a:t>185</a:t>
+              <a:t>186</a:t>
             </a:r>
             <a:endParaRPr sz="1000" b="1">
               <a:solidFill>
@@ -5597,7 +5597,7 @@
           <a:p>
             <a:pPr algn="r"/>
             <a:r>
-              <a:t>186</a:t>
+              <a:t>187</a:t>
             </a:r>
             <a:endParaRPr sz="1000" b="1">
               <a:solidFill>
@@ -6006,7 +6006,7 @@
           <a:p>
             <a:pPr algn="r"/>
             <a:r>
-              <a:t>187</a:t>
+              <a:t>188</a:t>
             </a:r>
             <a:endParaRPr sz="1000" b="1">
               <a:solidFill>
@@ -6303,7 +6303,7 @@
           <a:p>
             <a:pPr algn="r"/>
             <a:r>
-              <a:t>188</a:t>
+              <a:t>189</a:t>
             </a:r>
             <a:endParaRPr sz="1000" b="1">
               <a:solidFill>
@@ -6552,7 +6552,7 @@
           <a:p>
             <a:pPr algn="r"/>
             <a:r>
-              <a:t>175</a:t>
+              <a:t>176</a:t>
             </a:r>
             <a:endParaRPr sz="1000" b="1">
               <a:solidFill>
@@ -6769,7 +6769,7 @@
           <a:p>
             <a:pPr algn="r"/>
             <a:r>
-              <a:t>176</a:t>
+              <a:t>177</a:t>
             </a:r>
             <a:endParaRPr sz="1000" b="1">
               <a:solidFill>
@@ -7183,7 +7183,7 @@
           <a:p>
             <a:pPr algn="r"/>
             <a:r>
-              <a:t>177</a:t>
+              <a:t>178</a:t>
             </a:r>
             <a:endParaRPr sz="1000" b="1">
               <a:solidFill>
@@ -7521,7 +7521,7 @@
           <a:p>
             <a:pPr algn="r"/>
             <a:r>
-              <a:t>178</a:t>
+              <a:t>179</a:t>
             </a:r>
             <a:endParaRPr sz="1000" b="1">
               <a:solidFill>
@@ -7823,7 +7823,7 @@
           <a:p>
             <a:pPr algn="r"/>
             <a:r>
-              <a:t>179</a:t>
+              <a:t>180</a:t>
             </a:r>
             <a:endParaRPr sz="1000" b="1">
               <a:solidFill>
@@ -8120,7 +8120,7 @@
           <a:p>
             <a:pPr algn="r"/>
             <a:r>
-              <a:t>180</a:t>
+              <a:t>181</a:t>
             </a:r>
             <a:endParaRPr sz="1000" b="1">
               <a:solidFill>
@@ -8530,7 +8530,7 @@
           <a:p>
             <a:pPr algn="r"/>
             <a:r>
-              <a:t>181</a:t>
+              <a:t>182</a:t>
             </a:r>
             <a:endParaRPr sz="1000" b="1">
               <a:solidFill>
@@ -8777,7 +8777,7 @@
           <a:p>
             <a:pPr algn="r"/>
             <a:r>
-              <a:t>182</a:t>
+              <a:t>183</a:t>
             </a:r>
             <a:endParaRPr sz="1000" b="1">
               <a:solidFill>

--- a/_implementation-notes/evening-series/FotH Evening Session 12 Slides DRAFT v1.pptx
+++ b/_implementation-notes/evening-series/FotH Evening Session 12 Slides DRAFT v1.pptx
@@ -785,7 +785,7 @@
           <a:lstStyle/>
           <a:p>
             <a:r>
-              <a:t>S12 · WELCOME · LEAD: CONTAINER HOLDER · GROUNDING — every session opens on this map</a:t>
+              <a:t>E9 · WELCOME · LEAD: CONTAINER HOLDER · GROUNDING — every session opens on this map</a:t>
             </a:r>
           </a:p>
           <a:p>
@@ -795,7 +795,7 @@
           </a:p>
           <a:p>
             <a:r>
-              <a:t>1. Locate tonight on the map, plainly: Session 12 returns to the whole map — all four Connects, rebuilt after the break. Each connection makes the next one real (Matt. 22:37–40).</a:t>
+              <a:t>1. Locate tonight on the map, plainly: Evening 9 returns to the whole map — all four Connects, rebuilt after the break. Each connection makes the next one real (Matt. 22:37–40).</a:t>
             </a:r>
           </a:p>
           <a:p>
@@ -856,7 +856,7 @@
           <a:lstStyle/>
           <a:p>
             <a:r>
-              <a:t>S12 · COMMISSIONING · LEAD: CONTENT PRESENTER</a:t>
+              <a:t>E9 · COMMISSIONING · LEAD: CONTENT PRESENTER</a:t>
             </a:r>
           </a:p>
           <a:p>
@@ -927,7 +927,7 @@
           <a:lstStyle/>
           <a:p>
             <a:r>
-              <a:t>S12 · COMMISSIONING · LEAD: CONTENT PRESENTER</a:t>
+              <a:t>E9 · COMMISSIONING · LEAD: CONTENT PRESENTER</a:t>
             </a:r>
           </a:p>
           <a:p>
@@ -993,13 +993,11 @@
           <a:lstStyle/>
           <a:p>
             <a:r>
-              <a:rPr lang="en-US" sz="1200"/>
-              <a:t>S12 · pre-session · DIVIDER</a:t>
-            </a:r>
-          </a:p>
-          <a:p>
-            <a:r>
-              <a:rPr lang="en-US" sz="1200"/>
+              <a:t>E9 · pre-session · DIVIDER</a:t>
+            </a:r>
+          </a:p>
+          <a:p>
+            <a:r>
               <a:t>On screen through dinner and as the circle forms. Greet at the door — the slide holds the room.</a:t>
             </a:r>
           </a:p>
@@ -1046,20 +1044,17 @@
           <a:lstStyle/>
           <a:p>
             <a:r>
-              <a:rPr lang="en-US" sz="1200"/>
-              <a:t>S12 · 7:00–7:08 · LEAD: CONTAINER HOLDER</a:t>
-            </a:r>
-          </a:p>
-          <a:p>
-            <a:r>
-              <a:rPr lang="en-US" sz="1200"/>
+              <a:t>E9 · 7:00–7:08 · LEAD: CONTAINER HOLDER</a:t>
+            </a:r>
+          </a:p>
+          <a:p>
+            <a:r>
               <a:t>BEATS: 1. First evenings back after Christmas — nothing new is taught today; the whole evening rebuilds what the break interrupted. 2. Three movements: 'What held?' in pairs; the Walk Home (the Path Home Card enacted); re-anchoring the year's map. 3. Deliberately adult-carried today — the container protocol itself is the teaching.</a:t>
             </a:r>
           </a:p>
           <a:p>
             <a:r>
-              <a:rPr lang="en-US" sz="1200"/>
-              <a:t>CUES: Pulse 2 bin staffed at the door — thank you and nothing else; name tags run again as if it were Week 1; note every empty chair for warm contact this week.</a:t>
+              <a:t>CUES: Pulse 2 bin staffed at the door — thank you and nothing else; name tags run again as if it were Evening 1; note every empty chair for warm contact this week.</a:t>
             </a:r>
           </a:p>
         </p:txBody>
@@ -1105,7 +1100,7 @@
           <a:lstStyle/>
           <a:p>
             <a:r>
-              <a:t>S12 · 7:00–7:08 · LEAD: CONTAINER HOLDER</a:t>
+              <a:t>E9 · 7:00–7:08 · LEAD: CONTAINER HOLDER</a:t>
             </a:r>
           </a:p>
           <a:p>
@@ -1166,13 +1161,11 @@
           <a:lstStyle/>
           <a:p>
             <a:r>
-              <a:rPr lang="en-US" sz="1200"/>
-              <a:t>S12 · 7:25–7:34 · LEAD: CONTENT PRESENTER</a:t>
-            </a:r>
-          </a:p>
-          <a:p>
-            <a:r>
-              <a:rPr lang="en-US" sz="1200"/>
+              <a:t>E9 · 7:25–7:34 · LEAD: CONTENT PRESENTER</a:t>
+            </a:r>
+          </a:p>
+          <a:p>
+            <a:r>
               <a:t>BEATS: 1. Read Lamentations 3:22–23 and Psalm 126 aloud, slowly, from the physical Bible. 2. Teach where the verse lives: in the ashes of Jerusalem — mercies-new-every-morning belongs to the mornings after the seasons that didn't hold. 3. No carried balance: His mercies are issued fresh this morning, to everyone in the circle, whatever the break looked like — that is why today's reading costs nothing. 4. Psalm 126: coming home is the happiest walk there is. Hold it — we come back to it after the pairs.</a:t>
             </a:r>
           </a:p>
@@ -1219,25 +1212,21 @@
           <a:lstStyle/>
           <a:p>
             <a:r>
-              <a:rPr lang="en-US" sz="1200"/>
-              <a:t>S12 · 7:34–7:57 · LEAD: CONTENT PRESENTER · PAIRS</a:t>
-            </a:r>
-          </a:p>
-          <a:p>
-            <a:r>
-              <a:rPr lang="en-US" sz="1200"/>
+              <a:t>E9 · 7:34–7:57 · LEAD: CONTENT PRESENTER · PAIRS</a:t>
+            </a:r>
+          </a:p>
+          <a:p>
+            <a:r>
               <a:t>BEATS: 1. Bridge from the front: a reading, not a report card — every break is a natural test of the practices, not of you. Then split. 2. In pairs, one at a time: which practices held, which slipped — plain words. Receive each with a nod and nothing else. 3. If time allows: 'did anything about the break surprise you?' 4. Companions keep rough counts for the debrief — numbers only, no names.</a:t>
             </a:r>
           </a:p>
           <a:p>
             <a:r>
-              <a:rPr lang="en-US" sz="1200"/>
               <a:t>CUES: Arranged parent reads first, slips included (check the Run Card) — never cold-call a teen; 'most of it slipped' and pass are complete answers.</a:t>
             </a:r>
           </a:p>
           <a:p>
             <a:r>
-              <a:rPr lang="en-US" sz="1200"/>
               <a:t>GUARD: Slips are data, not failure. Cut off confession warmly — 'no apology owed; that's data' — and widen the frame on any scoreboard reading. Everyone reads: a round where three talk long and four not at all has failed its shape.</a:t>
             </a:r>
           </a:p>
@@ -1284,19 +1273,16 @@
           <a:lstStyle/>
           <a:p>
             <a:r>
-              <a:rPr lang="en-US" sz="1200"/>
-              <a:t>S12 · 7:57–8:15 · LEAD: CONTENT PRESENTER</a:t>
-            </a:r>
-          </a:p>
-          <a:p>
-            <a:r>
-              <a:rPr lang="en-US" sz="1200"/>
+              <a:t>E9 · 7:57–8:15 · LEAD: CONTENT PRESENTER</a:t>
+            </a:r>
+          </a:p>
+          <a:p>
+            <a:r>
               <a:t>BEATS: 1. The heart of the session. Speak the welcome over the WHOLE room at once, so everyone who drifted walks back through the door together and nobody has to identify themselves to be received. 2. Luke 15: 'while he was still a long way off' — the father runs; nobody owes an explanation before the robe. 3. The house rule, said aloud: nobody in this room owes anybody an explanation for the break. You are in the chair — that is the whole return. 4. The way back is unglamorous: begin again on the next available day; five dry minutes tomorrow is a full return. Every chair filled today is a small feast.</a:t>
             </a:r>
           </a:p>
           <a:p>
             <a:r>
-              <a:rPr lang="en-US" sz="1200"/>
               <a:t>CUES: No hands, no testimonies, no self-identification. If someone names their own drift, bless the telling, honor the return, add nothing. Watch for the going-still and the wet eyes — no spotlight; follow up at the door or this week.</a:t>
             </a:r>
           </a:p>
@@ -1343,14 +1329,12 @@
           <a:lstStyle/>
           <a:p>
             <a:r>
-              <a:rPr lang="en-US" sz="1200"/>
-              <a:t>S12 · 8:15–8:20 · LEAD: CONTENT PRESENTER</a:t>
-            </a:r>
-          </a:p>
-          <a:p>
-            <a:r>
-              <a:rPr lang="en-US" sz="1200"/>
-              <a:t>BEATS: 1. Brief and plain — the map moment. 2. Behind us: the whole God arc — container, story, soils, being known, then PROAPT, the garden, the doubts brought honestly. That work is in you now; the break did not take it away. 3. Ahead: Week 13 turns outward to Mission; then the Rhythm week; then the closing quarter and the commissionings. 4. 'We are not starting over today. We are picking the trail back up, together, further along than we have ever been.'</a:t>
+              <a:t>E9 · 8:15–8:20 · LEAD: CONTENT PRESENTER</a:t>
+            </a:r>
+          </a:p>
+          <a:p>
+            <a:r>
+              <a:t>BEATS: 1. Brief and plain — the map moment. 2. Behind us: the whole God arc — container, story, soils, being known, then PROAPT, the garden, the doubts brought honestly. That work is in you now; the break did not take it away. 3. Ahead: Evening 10 turns outward to Mission; then the Rhythm week; then the closing quarter and the commissionings. 4. 'We are not starting over today. We are picking the trail back up, together, further along than we have ever been.'</a:t>
             </a:r>
           </a:p>
         </p:txBody>
@@ -1396,13 +1380,11 @@
           <a:lstStyle/>
           <a:p>
             <a:r>
-              <a:rPr lang="en-US" sz="1200"/>
-              <a:t>S12 · 8:20–8:24 · LEAD: CONTENT PRESENTER</a:t>
-            </a:r>
-          </a:p>
-          <a:p>
-            <a:r>
-              <a:rPr lang="en-US" sz="1200"/>
+              <a:t>E9 · 8:20–8:24 · LEAD: CONTENT PRESENTER</a:t>
+            </a:r>
+          </a:p>
+          <a:p>
+            <a:r>
               <a:t>BEATS: 1. Co-Companion (Parent) leads. Restart ONE daily practice — just one; the smallness is the wisdom. 2. Journals open, ninety seconds to write: the practice at the top of a fresh page with when and where — 'the morning question, 6:50, kitchen table.' 3. Miss a day? Do not start over from the beginning — begin again on the next available day. One seed goes back in the ground this week.</a:t>
             </a:r>
           </a:p>
@@ -1449,12 +1431,12 @@
           <a:lstStyle/>
           <a:p>
             <a:r>
-              <a:t>S12 · 8:24–8:26, return 8:29–8:30 · LEAD: CONTAINER HOLDER</a:t>
-            </a:r>
-          </a:p>
-          <a:p>
-            <a:r>
-              <a:t>BEATS: 1. Closing protocol 8:24–8:26, unhurried: stand; one-word landing (the contrast with the opening words is today's best data); the one thing taken from today; the one practice (each names the one just written); blessings — let this step run warm today; the first evenings back is the right night for the room to bless itself. 2. Then the Leader Feedback Round interposes, 8:26–8:29 (next slide). 3. Return here 8:29–8:30: 'His mercies did not run out over the break, and they will not run out over this quarter.' Aaronic blessing, hands up. 'Welcome home. See you evenings — Week 13, Mission.'</a:t>
+              <a:t>E9 · 8:24–8:26, return 8:29–8:30 · LEAD: CONTAINER HOLDER</a:t>
+            </a:r>
+          </a:p>
+          <a:p>
+            <a:r>
+              <a:t>BEATS: 1. Closing protocol 8:24–8:26, unhurried: stand; one-word landing (the contrast with the opening words is today's best data); the one thing taken from today; the one practice (each names the one just written); blessings — let this step run warm today; the first evenings back is the right night for the room to bless itself. 2. Then the Leader Feedback Round interposes, 8:26–8:29 (next slide). 3. Return here 8:29–8:30: 'His mercies did not run out over the break, and they will not run out over this quarter.' Aaronic blessing, hands up. 'Welcome home. See you evenings — Evening 10, Mission.'</a:t>
             </a:r>
           </a:p>
           <a:p>
@@ -1510,13 +1492,11 @@
           <a:lstStyle/>
           <a:p>
             <a:r>
-              <a:rPr lang="en-US" sz="1200"/>
-              <a:t>S12 · 8:26–8:29 · LEAD: BOTH LEADERS</a:t>
-            </a:r>
-          </a:p>
-          <a:p>
-            <a:r>
-              <a:rPr lang="en-US" sz="1200"/>
+              <a:t>E9 · 8:26–8:29 · LEAD: BOTH LEADERS</a:t>
+            </a:r>
+          </a:p>
+          <a:p>
+            <a:r>
               <a:t>BEATS: 1. Same round: leader's three answers first, then the room's two questions; 'thank you' is the whole response. 2. Today it sits between the closing container and the blessing — after this round, flip back for the Aaronic blessing and sending. 3. May be dropped if the room's energy needs something else; dropping it twice running goes to the team debrief.</a:t>
             </a:r>
           </a:p>
@@ -6454,7 +6434,7 @@
                 </a:solidFill>
                 <a:latin typeface="Calibri"/>
               </a:rPr>
-              <a:t>SESSION 12</a:t>
+              <a:t>EVENING 9</a:t>
             </a:r>
           </a:p>
           <a:p>
@@ -6724,7 +6704,7 @@
                 </a:solidFill>
                 <a:latin typeface="Calibri"/>
               </a:rPr>
-              <a:t>Session 12 returns to the whole map — </a:t>
+              <a:t>Evening 9 returns to the whole map — </a:t>
             </a:r>
             <a:r>
               <a:rPr sz="1800" b="1">
@@ -6908,7 +6888,7 @@
                 </a:solidFill>
                 <a:latin typeface="Cambria"/>
               </a:rPr>
-              <a:t>Session 12 — Tonight’s Road</a:t>
+              <a:t>Evening 9 — Tonight’s Road</a:t>
             </a:r>
           </a:p>
         </p:txBody>
@@ -8725,7 +8705,7 @@
                 </a:solidFill>
                 <a:latin typeface="Calibri"/>
               </a:rPr>
-              <a:t>Ahead: Week 13 — Mission, the turn outward; then the Rhythm — one card you build with your own hand; then the sendings and the commissionings</a:t>
+              <a:t>Ahead: Evening 10 — Mission, the turn outward; then the Rhythm — one card you build with your own hand; then the sendings and the commissionings</a:t>
             </a:r>
           </a:p>
           <a:p>

--- a/_implementation-notes/evening-series/FotH Evening Session 12 Slides DRAFT v1.pptx
+++ b/_implementation-notes/evening-series/FotH Evening Session 12 Slides DRAFT v1.pptx
@@ -1049,7 +1049,7 @@
           </a:p>
           <a:p>
             <a:r>
-              <a:t>BEATS: 1. First evenings back after Christmas — nothing new is taught today; the whole evening rebuilds what the break interrupted. 2. Three movements: 'What held?' in pairs; the Walk Home (the Path Home Card enacted); re-anchoring the year's map. 3. Deliberately adult-carried today — the container protocol itself is the teaching.</a:t>
+              <a:t>BEATS: 1. First evening back after the break — nothing new is taught today; the whole evening rebuilds what the break interrupted. If no holiday break falls before this evening, the break is simply the two weeks since we last met; the evening form runs this test at every return. 2. Three movements: 'What held?' in pairs; the Walk Home (the Path Home Card enacted); re-anchoring the year's map. 3. Deliberately adult-carried today — the container protocol itself is the teaching.</a:t>
             </a:r>
           </a:p>
           <a:p>
@@ -7344,7 +7344,7 @@
                 </a:solidFill>
                 <a:latin typeface="Calibri"/>
               </a:rPr>
-              <a:t>Two weeks without Wednesdays — containers don’t keep. They are rebuilt every time, by the same small faithful steps</a:t>
+              <a:t>Time apart — containers don’t keep. They are rebuilt every time, by the same small faithful steps</a:t>
             </a:r>
           </a:p>
           <a:p>

--- a/_implementation-notes/evening-series/FotH Evening Session 12 Slides DRAFT v1.pptx
+++ b/_implementation-notes/evening-series/FotH Evening Session 12 Slides DRAFT v1.pptx
@@ -1054,7 +1054,7 @@
           </a:p>
           <a:p>
             <a:r>
-              <a:t>CUES: Pulse 2 bin staffed at the door — thank you and nothing else; name tags run again as if it were Evening 1; note every empty chair for warm contact this week.</a:t>
+              <a:t>CUES: name tags run again as if it were Evening 1; note every empty chair for warm contact this week.</a:t>
             </a:r>
           </a:p>
         </p:txBody>
